--- a/capacitaciones/co-broking/Capacitacion-Co-broking.pptx
+++ b/capacitaciones/co-broking/Capacitacion-Co-broking.pptx
@@ -19,9 +19,10 @@
     <p:sldId id="267" r:id="rId13"/>
     <p:sldId id="268" r:id="rId14"/>
     <p:sldId id="269" r:id="rId15"/>
+    <p:sldId id="270" r:id="rId16"/>
   </p:sldIdLst>
   <p:notesMasterIdLst>
-    <p:notesMasterId r:id="rId16"/>
+    <p:notesMasterId r:id="rId17"/>
   </p:notesMasterIdLst>
   <p:sldSz cx="9144000" cy="5143500"/>
   <p:notesSz cx="5143500" cy="9144000"/>
@@ -603,7 +604,7 @@
           <a:p>
             <a:r>
               <a:rPr lang="en-US" dirty="0"/>
-              <a:t>Checklist de contenido mínimo. Cinco elementos: quiénes, sobre qué operación, qué esquema, sobre qué base y cuándo y cómo se paga. El último no tiene una regla única del grupo: cada pareja de colegas lo define, pero tiene que quedar definido. Esta lista sirve igual para la reserva, el convenio o el mensaje de respaldo.</a:t>
+              <a:t>El mail o el WhatsApp pueden usarse como prueba del acuerdo. Pero la jerarquía es clara: lo mejor es el documento firmado; un mensaje escrito y confirmado por el colega sirve como respaldo; el acuerdo de palabra no deja nada. Un hábito práctico: después de una llamada, escribir un mensaje resumiendo lo acordado y pedir un 'ok'.</a:t>
             </a:r>
             <a:endParaRPr lang="en-US" dirty="0"/>
           </a:p>
@@ -691,7 +692,7 @@
           <a:p>
             <a:r>
               <a:rPr lang="en-US" dirty="0"/>
-              <a:t>Casos hipotéticos armados para ilustrar. No son conflictos reales de la empresa. Leer cada caso, pedir al equipo que diga qué falló antes de mostrar la respuesta en rojo. Los tres tienen el mismo patrón: faltó preguntar o faltó escribir. Dejar abierta la puerta: los casos reales los traen los agentes en la próxima diapositiva.</a:t>
+              <a:t>Checklist de contenido mínimo. Cinco elementos: quiénes, sobre qué operación, qué esquema, sobre qué base y cuándo y cómo se paga. El último no tiene una regla única del grupo: cada pareja de colegas lo define, pero tiene que quedar definido. Esta lista sirve igual para la reserva, el convenio o el mensaje de respaldo.</a:t>
             </a:r>
             <a:endParaRPr lang="en-US" dirty="0"/>
           </a:p>
@@ -779,7 +780,7 @@
           <a:p>
             <a:r>
               <a:rPr lang="en-US" dirty="0"/>
-              <a:t>Espacio para que los agentes cuenten sus propias experiencias. No hay casos de conflicto documentados por la empresa: el valor está en lo que el equipo ya vivió. Pedir que se cuenten sin nombres de colegas ni de clientes. Anotar los casos y las preguntas para reemplazar los hipotéticos de la diapositiva anterior en la próxima versión. Tiempo sugerido: 10 a 15 minutos.</a:t>
+              <a:t>Casos hipotéticos armados para ilustrar. No son conflictos reales de la empresa. Leer cada caso, pedir al equipo que diga qué falló antes de mostrar la respuesta en rojo. Los tres tienen el mismo patrón: faltó preguntar o faltó escribir. Dejar abierta la puerta: los casos reales los traen los agentes en la próxima diapositiva.</a:t>
             </a:r>
             <a:endParaRPr lang="en-US" dirty="0"/>
           </a:p>
@@ -867,7 +868,7 @@
           <a:p>
             <a:r>
               <a:rPr lang="en-US" dirty="0"/>
-              <a:t>Resumen operativo. Cinco puntos. Si el equipo se acuerda de uno solo, que sea el primero: preguntar. Esta diapositiva se puede imprimir o dejar fijada en el escritorio. Cerrar con el mensaje final.</a:t>
+              <a:t>Espacio para que los agentes cuenten sus propias experiencias. No hay casos de conflicto documentados por la empresa: el valor está en lo que el equipo ya vivió. Pedir que se cuenten sin nombres de colegas ni de clientes. Anotar los casos y las preguntas para reemplazar los hipotéticos de la diapositiva anterior en la próxima versión. Tiempo sugerido: 10 a 15 minutos.</a:t>
             </a:r>
             <a:endParaRPr lang="en-US" dirty="0"/>
           </a:p>
@@ -955,7 +956,7 @@
           <a:p>
             <a:r>
               <a:rPr lang="en-US" dirty="0"/>
-              <a:t>Cierre. Mensaje: preguntar primero y dejar por escrito. Recordar que los esquemas de reparto son usos del mercado, que los números del ejemplo son hipotéticos y que el criterio de Krak está vigente a la fecha indicada. Antes de volver a dictar la capacitación: confirmar el alcance de la tercera forma de reparto, la regla para otros productos como naves y locales, y sumar los casos reales del taller.</a:t>
+              <a:t>Resumen operativo. Cinco puntos. Si el equipo se acuerda de uno solo, que sea el primero: preguntar. Esta diapositiva se puede imprimir o dejar fijada en el escritorio. Cerrar con el mensaje final.</a:t>
             </a:r>
             <a:endParaRPr lang="en-US" dirty="0"/>
           </a:p>
@@ -979,6 +980,94 @@
             <a:fld id="{F7021451-1387-4CA6-816F-3879F97B5CBC}" type="slidenum">
               <a:rPr lang="en-US"/>
               <a:t>14</a:t>
+            </a:fld>
+            <a:endParaRPr lang="en-US"/>
+          </a:p>
+        </p:txBody>
+      </p:sp>
+    </p:spTree>
+    <p:extLst>
+      <p:ext uri="{BB962C8B-B14F-4D97-AF65-F5344CB8AC3E}">
+        <p14:creationId xmlns:p14="http://schemas.microsoft.com/office/powerpoint/2010/main" val="1024086991"/>
+      </p:ext>
+    </p:extLst>
+  </p:cSld>
+  <p:clrMapOvr>
+    <a:masterClrMapping/>
+  </p:clrMapOvr>
+</p:notes>
+</file>
+
+<file path=ppt/notesSlides/notesSlide15.xml><?xml version="1.0" encoding="utf-8"?>
+<p:notes xmlns:a="http://schemas.openxmlformats.org/drawingml/2006/main" xmlns:r="http://schemas.openxmlformats.org/officeDocument/2006/relationships" xmlns:p="http://schemas.openxmlformats.org/presentationml/2006/main">
+  <p:cSld>
+    <p:spTree>
+      <p:nvGrpSpPr>
+        <p:cNvPr id="1" name=""/>
+        <p:cNvGrpSpPr/>
+        <p:nvPr/>
+      </p:nvGrpSpPr>
+      <p:grpSpPr>
+        <a:xfrm>
+          <a:off x="0" y="0"/>
+          <a:ext cx="0" cy="0"/>
+          <a:chOff x="0" y="0"/>
+          <a:chExt cx="0" cy="0"/>
+        </a:xfrm>
+      </p:grpSpPr>
+      <p:sp>
+        <p:nvSpPr>
+          <p:cNvPr id="2" name="Slide Image Placeholder 1"/>
+          <p:cNvSpPr>
+            <a:spLocks noGrp="1" noRot="1" noChangeAspect="1"/>
+          </p:cNvSpPr>
+          <p:nvPr>
+            <p:ph type="sldImg"/>
+          </p:nvPr>
+        </p:nvSpPr>
+        <p:spPr/>
+      </p:sp>
+      <p:sp>
+        <p:nvSpPr>
+          <p:cNvPr id="3" name="Notes Placeholder 2"/>
+          <p:cNvSpPr>
+            <a:spLocks noGrp="1"/>
+          </p:cNvSpPr>
+          <p:nvPr>
+            <p:ph type="body" idx="1"/>
+          </p:nvPr>
+        </p:nvSpPr>
+        <p:spPr/>
+        <p:txBody>
+          <a:bodyPr/>
+          <a:lstStyle/>
+          <a:p>
+            <a:r>
+              <a:rPr lang="en-US" dirty="0"/>
+              <a:t>Cierre. Mensaje: preguntar primero y dejar por escrito. Recordar que los esquemas de reparto son usos del mercado, que los números del ejemplo son hipotéticos y que el criterio de Krak está vigente a la fecha indicada. Antes de volver a dictar la capacitación: confirmar el alcance de la tercera forma de reparto, la regla para otros productos como naves y locales, y sumar los casos reales del taller.</a:t>
+            </a:r>
+            <a:endParaRPr lang="en-US" dirty="0"/>
+          </a:p>
+        </p:txBody>
+      </p:sp>
+      <p:sp>
+        <p:nvSpPr>
+          <p:cNvPr id="4" name="Slide Number Placeholder 3"/>
+          <p:cNvSpPr>
+            <a:spLocks noGrp="1"/>
+          </p:cNvSpPr>
+          <p:nvPr>
+            <p:ph type="sldNum" sz="quarter" idx="10"/>
+          </p:nvPr>
+        </p:nvSpPr>
+        <p:spPr/>
+        <p:txBody>
+          <a:bodyPr/>
+          <a:lstStyle/>
+          <a:p>
+            <a:fld id="{F7021451-1387-4CA6-816F-3879F97B5CBC}" type="slidenum">
+              <a:rPr lang="en-US"/>
+              <a:t>15</a:t>
             </a:fld>
             <a:endParaRPr lang="en-US"/>
           </a:p>
@@ -1483,7 +1572,7 @@
           <a:p>
             <a:r>
               <a:rPr lang="en-US" dirty="0"/>
-              <a:t>Dos caminos para asegurarse. A: poner la participación de cada uno en la reserva. B: firmar un convenio de honorarios con el colega. La diferencia entre ambos es quién ve el documento, y eso se explica en la próxima diapositiva. Lo que no cambia es el principio: por escrito. Y el objetivo real es la previsión: no llegar nunca a tener que ejecutar un cobro, sino evitar los malentendidos desde el principio.</a:t>
+              <a:t>Comunicar el reparto desde el principio sirve para dos cosas. Primero, claridad: cada uno sabe por lo que trabaja. Segundo, palanca: con un número acordado, hay de dónde mover. Lado uno, cuando hay que ceder: si el cliente pide un descuento sobre los honorarios para poder cerrar, o si en un caso extremo hace falta ceder un poco más al colega para que haga los esfuerzos necesarios para cerrar, existe un margen para hacerlo. Lado dos, cuando nos comparten un porcentaje: se puede pedir más con argumentos creíbles, por ejemplo que mi cliente ya me pidió un descuento, que el monto no me sirve para dedicarle tiempo a la operación, o que tengo un acuerdo con un productor o asesor del cliente. Matiz para el equipo: los argumentos tienen que ser reales. Es un agregado de esta presentación respecto del criterio dictado; si se quiere que sean solo 'creíbles', ajustar. Cualquier cambio de reparto se vuelve a dejar por escrito, como todo lo demás.</a:t>
             </a:r>
             <a:endParaRPr lang="en-US" dirty="0"/>
           </a:p>
@@ -1571,7 +1660,7 @@
           <a:p>
             <a:r>
               <a:rPr lang="en-US" dirty="0"/>
-              <a:t>La razón de existir del convenio: a veces hay que proteger la identidad de uno de los colegas por el bien de la operación, y la reserva la ven las partes. En ese caso el reparto queda en un acuerdo privado entre colegas. Además, en ningún documento que ven terceros se habla de ninguna relación entre las distintas marcas del grupo. Para el equipo de la agencia: esto se aplica igual cuando el colega pertenece a otra de nuestras empresas.</a:t>
+              <a:t>Dos caminos para asegurarse. A: poner la participación de cada uno en la reserva. B: firmar un convenio de honorarios con el colega. La diferencia entre ambos es quién ve el documento, y eso se explica en la próxima diapositiva. Lo que no cambia es el principio: por escrito. Y el objetivo real es la previsión: no llegar nunca a tener que ejecutar un cobro, sino evitar los malentendidos desde el principio.</a:t>
             </a:r>
             <a:endParaRPr lang="en-US" dirty="0"/>
           </a:p>
@@ -1659,7 +1748,7 @@
           <a:p>
             <a:r>
               <a:rPr lang="en-US" dirty="0"/>
-              <a:t>El mail o el WhatsApp pueden usarse como prueba del acuerdo. Pero la jerarquía es clara: lo mejor es el documento firmado; un mensaje escrito y confirmado por el colega sirve como respaldo; el acuerdo de palabra no deja nada. Un hábito práctico: después de una llamada, escribir un mensaje resumiendo lo acordado y pedir un 'ok'.</a:t>
+              <a:t>La razón de existir del convenio: a veces hay que proteger la identidad de uno de los colegas por el bien de la operación, y la reserva la ven las partes. En ese caso el reparto queda en un acuerdo privado entre colegas. Además, en ningún documento que ven terceros se habla de ninguna relación entre las distintas marcas del grupo. Para el equipo de la agencia: esto se aplica igual cuando el colega pertenece a otra de nuestras empresas.</a:t>
             </a:r>
             <a:endParaRPr lang="en-US" dirty="0"/>
           </a:p>
@@ -2329,7 +2418,7 @@
                 <a:ea typeface="Inter" pitchFamily="34" charset="-122"/>
                 <a:cs typeface="Inter" pitchFamily="34" charset="-120"/>
               </a:rPr>
-              <a:t>Qué debe quedar escrito</a:t>
+              <a:t>Mail y WhatsApp también sirven</a:t>
             </a:r>
             <a:endParaRPr lang="en-US" sz="2600" dirty="0"/>
           </a:p>
@@ -2368,7 +2457,7 @@
                 <a:ea typeface="Inter" pitchFamily="34" charset="-122"/>
                 <a:cs typeface="Inter" pitchFamily="34" charset="-120"/>
               </a:rPr>
-              <a:t>Ya sea en la reserva, en el convenio o en un mensaje.</a:t>
+              <a:t>Como respaldo: no reemplazan al documento, pero son prueba.</a:t>
             </a:r>
             <a:endParaRPr lang="en-US" sz="1200" dirty="0"/>
           </a:p>
@@ -2383,19 +2472,19 @@
         <p:spPr>
           <a:xfrm>
             <a:off x="603504" y="1188720"/>
-            <a:ext cx="8083296" cy="512064"/>
+            <a:ext cx="2542032" cy="2331720"/>
           </a:xfrm>
           <a:prstGeom prst="roundRect">
             <a:avLst>
-              <a:gd name="adj" fmla="val 16071"/>
+              <a:gd name="adj" fmla="val 3529"/>
             </a:avLst>
           </a:prstGeom>
           <a:solidFill>
-            <a:srgbClr val="F3F3F3"/>
+            <a:srgbClr val="08407C"/>
           </a:solidFill>
           <a:ln w="12700">
             <a:solidFill>
-              <a:srgbClr val="F3F3F3"/>
+              <a:srgbClr val="08407C"/>
             </a:solidFill>
             <a:prstDash val="solid"/>
           </a:ln>
@@ -2409,34 +2498,34 @@
         </p:nvSpPr>
         <p:spPr>
           <a:xfrm>
-            <a:off x="822960" y="1216152"/>
-            <a:ext cx="7626096" cy="219456"/>
-          </a:xfrm>
-          <a:prstGeom prst="rect">
-            <a:avLst/>
-          </a:prstGeom>
-          <a:noFill/>
-          <a:ln/>
-        </p:spPr>
-        <p:txBody>
-          <a:bodyPr wrap="square" lIns="0" tIns="0" rIns="0" bIns="0" rtlCol="0" anchor="ctr"/>
-          <a:lstStyle/>
-          <a:p>
-            <a:pPr indent="0" marL="0">
-              <a:buNone/>
-            </a:pPr>
-            <a:r>
-              <a:rPr lang="en-US" sz="1150" b="1" dirty="0">
-                <a:solidFill>
-                  <a:srgbClr val="08407C"/>
-                </a:solidFill>
-                <a:latin typeface="Inter" pitchFamily="34" charset="0"/>
-                <a:ea typeface="Inter" pitchFamily="34" charset="-122"/>
-                <a:cs typeface="Inter" pitchFamily="34" charset="-120"/>
-              </a:rPr>
-              <a:t>Quiénes son las partes</a:t>
-            </a:r>
-            <a:endParaRPr lang="en-US" sz="1150" dirty="0"/>
+            <a:off x="822960" y="1335024"/>
+            <a:ext cx="2103120" cy="201168"/>
+          </a:xfrm>
+          <a:prstGeom prst="rect">
+            <a:avLst/>
+          </a:prstGeom>
+          <a:noFill/>
+          <a:ln/>
+        </p:spPr>
+        <p:txBody>
+          <a:bodyPr wrap="square" lIns="0" tIns="0" rIns="0" bIns="0" rtlCol="0" anchor="ctr"/>
+          <a:lstStyle/>
+          <a:p>
+            <a:pPr indent="0" marL="0">
+              <a:buNone/>
+            </a:pPr>
+            <a:r>
+              <a:rPr lang="en-US" sz="900" b="1" spc="120" kern="0" dirty="0">
+                <a:solidFill>
+                  <a:srgbClr val="FFFFFF"/>
+                </a:solidFill>
+                <a:latin typeface="Inter" pitchFamily="34" charset="0"/>
+                <a:ea typeface="Inter" pitchFamily="34" charset="-122"/>
+                <a:cs typeface="Inter" pitchFamily="34" charset="-120"/>
+              </a:rPr>
+              <a:t>LO MEJOR</a:t>
+            </a:r>
+            <a:endParaRPr lang="en-US" sz="900" dirty="0"/>
           </a:p>
         </p:txBody>
       </p:sp>
@@ -2448,37 +2537,37 @@
         </p:nvSpPr>
         <p:spPr>
           <a:xfrm>
-            <a:off x="822960" y="1426464"/>
-            <a:ext cx="7626096" cy="256032"/>
-          </a:xfrm>
-          <a:prstGeom prst="rect">
-            <a:avLst/>
-          </a:prstGeom>
-          <a:noFill/>
-          <a:ln/>
-        </p:spPr>
-        <p:txBody>
-          <a:bodyPr wrap="square" lIns="0" tIns="0" rIns="0" bIns="0" rtlCol="0" anchor="ctr"/>
+            <a:off x="822960" y="1572768"/>
+            <a:ext cx="2103120" cy="566928"/>
+          </a:xfrm>
+          <a:prstGeom prst="rect">
+            <a:avLst/>
+          </a:prstGeom>
+          <a:noFill/>
+          <a:ln/>
+        </p:spPr>
+        <p:txBody>
+          <a:bodyPr wrap="square" lIns="0" tIns="0" rIns="0" bIns="0" rtlCol="0" anchor="t"/>
           <a:lstStyle/>
           <a:p>
             <a:pPr indent="0" marL="0">
               <a:lnSpc>
-                <a:spcPts val="1200"/>
+                <a:spcPts val="1900"/>
               </a:lnSpc>
               <a:buNone/>
             </a:pPr>
             <a:r>
-              <a:rPr lang="en-US" sz="1000" dirty="0">
-                <a:solidFill>
-                  <a:srgbClr val="2E4258"/>
-                </a:solidFill>
-                <a:latin typeface="Inter" pitchFamily="34" charset="0"/>
-                <a:ea typeface="Inter" pitchFamily="34" charset="-122"/>
-                <a:cs typeface="Inter" pitchFamily="34" charset="-120"/>
-              </a:rPr>
-              <a:t>Los dos colegas y la empresa que representa cada uno.</a:t>
-            </a:r>
-            <a:endParaRPr lang="en-US" sz="1000" dirty="0"/>
+              <a:rPr lang="en-US" sz="1600" b="1" dirty="0">
+                <a:solidFill>
+                  <a:srgbClr val="FFFFFF"/>
+                </a:solidFill>
+                <a:latin typeface="Inter" pitchFamily="34" charset="0"/>
+                <a:ea typeface="Inter" pitchFamily="34" charset="-122"/>
+                <a:cs typeface="Inter" pitchFamily="34" charset="-120"/>
+              </a:rPr>
+              <a:t>Reserva o convenio firmado</a:t>
+            </a:r>
+            <a:endParaRPr lang="en-US" sz="1600" dirty="0"/>
           </a:p>
         </p:txBody>
       </p:sp>
@@ -2490,101 +2579,62 @@
         </p:nvSpPr>
         <p:spPr>
           <a:xfrm>
-            <a:off x="822960" y="1783080"/>
-            <a:ext cx="7626096" cy="219456"/>
-          </a:xfrm>
-          <a:prstGeom prst="rect">
-            <a:avLst/>
-          </a:prstGeom>
-          <a:noFill/>
-          <a:ln/>
-        </p:spPr>
-        <p:txBody>
-          <a:bodyPr wrap="square" lIns="0" tIns="0" rIns="0" bIns="0" rtlCol="0" anchor="ctr"/>
-          <a:lstStyle/>
-          <a:p>
-            <a:pPr indent="0" marL="0">
-              <a:buNone/>
-            </a:pPr>
-            <a:r>
-              <a:rPr lang="en-US" sz="1150" b="1" dirty="0">
-                <a:solidFill>
-                  <a:srgbClr val="08407C"/>
-                </a:solidFill>
-                <a:latin typeface="Inter" pitchFamily="34" charset="0"/>
-                <a:ea typeface="Inter" pitchFamily="34" charset="-122"/>
-                <a:cs typeface="Inter" pitchFamily="34" charset="-120"/>
-              </a:rPr>
-              <a:t>Sobre qué operación</a:t>
-            </a:r>
-            <a:endParaRPr lang="en-US" sz="1150" dirty="0"/>
-          </a:p>
-        </p:txBody>
-      </p:sp>
-      <p:sp>
-        <p:nvSpPr>
-          <p:cNvPr id="11" name="Text 8"/>
-          <p:cNvSpPr/>
-          <p:nvPr/>
-        </p:nvSpPr>
-        <p:spPr>
-          <a:xfrm>
-            <a:off x="822960" y="1993392"/>
-            <a:ext cx="7626096" cy="256032"/>
-          </a:xfrm>
-          <a:prstGeom prst="rect">
-            <a:avLst/>
-          </a:prstGeom>
-          <a:noFill/>
-          <a:ln/>
-        </p:spPr>
-        <p:txBody>
-          <a:bodyPr wrap="square" lIns="0" tIns="0" rIns="0" bIns="0" rtlCol="0" anchor="ctr"/>
+            <a:off x="822960" y="2212848"/>
+            <a:ext cx="2103120" cy="1179576"/>
+          </a:xfrm>
+          <a:prstGeom prst="rect">
+            <a:avLst/>
+          </a:prstGeom>
+          <a:noFill/>
+          <a:ln/>
+        </p:spPr>
+        <p:txBody>
+          <a:bodyPr wrap="square" lIns="0" tIns="0" rIns="0" bIns="0" rtlCol="0" anchor="t"/>
           <a:lstStyle/>
           <a:p>
             <a:pPr indent="0" marL="0">
               <a:lnSpc>
-                <a:spcPts val="1200"/>
+                <a:spcPts val="1400"/>
               </a:lnSpc>
               <a:buNone/>
             </a:pPr>
             <a:r>
-              <a:rPr lang="en-US" sz="1000" dirty="0">
-                <a:solidFill>
-                  <a:srgbClr val="2E4258"/>
-                </a:solidFill>
-                <a:latin typeface="Inter" pitchFamily="34" charset="0"/>
-                <a:ea typeface="Inter" pitchFamily="34" charset="-122"/>
-                <a:cs typeface="Inter" pitchFamily="34" charset="-120"/>
-              </a:rPr>
-              <a:t>La propiedad o el producto y, si ya existe, el cliente o la reserva.</a:t>
-            </a:r>
-            <a:endParaRPr lang="en-US" sz="1000" dirty="0"/>
-          </a:p>
-        </p:txBody>
-      </p:sp>
-      <p:sp>
-        <p:nvSpPr>
-          <p:cNvPr id="12" name="Shape 9"/>
-          <p:cNvSpPr/>
-          <p:nvPr/>
-        </p:nvSpPr>
-        <p:spPr>
-          <a:xfrm>
-            <a:off x="603504" y="2322576"/>
-            <a:ext cx="8083296" cy="512064"/>
+              <a:rPr lang="en-US" sz="1100" dirty="0">
+                <a:solidFill>
+                  <a:srgbClr val="EAEFF5"/>
+                </a:solidFill>
+                <a:latin typeface="Inter" pitchFamily="34" charset="0"/>
+                <a:ea typeface="Inter" pitchFamily="34" charset="-122"/>
+                <a:cs typeface="Inter" pitchFamily="34" charset="-120"/>
+              </a:rPr>
+              <a:t>El acuerdo queda en un documento con la firma de las partes.</a:t>
+            </a:r>
+            <a:endParaRPr lang="en-US" sz="1100" dirty="0"/>
+          </a:p>
+        </p:txBody>
+      </p:sp>
+      <p:sp>
+        <p:nvSpPr>
+          <p:cNvPr id="11" name="Shape 8"/>
+          <p:cNvSpPr/>
+          <p:nvPr/>
+        </p:nvSpPr>
+        <p:spPr>
+          <a:xfrm>
+            <a:off x="3374136" y="1188720"/>
+            <a:ext cx="2542032" cy="2331720"/>
           </a:xfrm>
           <a:prstGeom prst="roundRect">
             <a:avLst>
-              <a:gd name="adj" fmla="val 16071"/>
+              <a:gd name="adj" fmla="val 3529"/>
             </a:avLst>
           </a:prstGeom>
           <a:solidFill>
-            <a:srgbClr val="F3F3F3"/>
+            <a:srgbClr val="7C8594"/>
           </a:solidFill>
           <a:ln w="12700">
             <a:solidFill>
-              <a:srgbClr val="F3F3F3"/>
+              <a:srgbClr val="7C8594"/>
             </a:solidFill>
             <a:prstDash val="solid"/>
           </a:ln>
@@ -2592,40 +2642,82 @@
       </p:sp>
       <p:sp>
         <p:nvSpPr>
+          <p:cNvPr id="12" name="Text 9"/>
+          <p:cNvSpPr/>
+          <p:nvPr/>
+        </p:nvSpPr>
+        <p:spPr>
+          <a:xfrm>
+            <a:off x="3593592" y="1335024"/>
+            <a:ext cx="2103120" cy="201168"/>
+          </a:xfrm>
+          <a:prstGeom prst="rect">
+            <a:avLst/>
+          </a:prstGeom>
+          <a:noFill/>
+          <a:ln/>
+        </p:spPr>
+        <p:txBody>
+          <a:bodyPr wrap="square" lIns="0" tIns="0" rIns="0" bIns="0" rtlCol="0" anchor="ctr"/>
+          <a:lstStyle/>
+          <a:p>
+            <a:pPr indent="0" marL="0">
+              <a:buNone/>
+            </a:pPr>
+            <a:r>
+              <a:rPr lang="en-US" sz="900" b="1" spc="120" kern="0" dirty="0">
+                <a:solidFill>
+                  <a:srgbClr val="FFFFFF"/>
+                </a:solidFill>
+                <a:latin typeface="Inter" pitchFamily="34" charset="0"/>
+                <a:ea typeface="Inter" pitchFamily="34" charset="-122"/>
+                <a:cs typeface="Inter" pitchFamily="34" charset="-120"/>
+              </a:rPr>
+              <a:t>SIRVE COMO PRUEBA</a:t>
+            </a:r>
+            <a:endParaRPr lang="en-US" sz="900" dirty="0"/>
+          </a:p>
+        </p:txBody>
+      </p:sp>
+      <p:sp>
+        <p:nvSpPr>
           <p:cNvPr id="13" name="Text 10"/>
           <p:cNvSpPr/>
           <p:nvPr/>
         </p:nvSpPr>
         <p:spPr>
           <a:xfrm>
-            <a:off x="822960" y="2350008"/>
-            <a:ext cx="7626096" cy="219456"/>
-          </a:xfrm>
-          <a:prstGeom prst="rect">
-            <a:avLst/>
-          </a:prstGeom>
-          <a:noFill/>
-          <a:ln/>
-        </p:spPr>
-        <p:txBody>
-          <a:bodyPr wrap="square" lIns="0" tIns="0" rIns="0" bIns="0" rtlCol="0" anchor="ctr"/>
-          <a:lstStyle/>
-          <a:p>
-            <a:pPr indent="0" marL="0">
-              <a:buNone/>
-            </a:pPr>
-            <a:r>
-              <a:rPr lang="en-US" sz="1150" b="1" dirty="0">
-                <a:solidFill>
-                  <a:srgbClr val="08407C"/>
-                </a:solidFill>
-                <a:latin typeface="Inter" pitchFamily="34" charset="0"/>
-                <a:ea typeface="Inter" pitchFamily="34" charset="-122"/>
-                <a:cs typeface="Inter" pitchFamily="34" charset="-120"/>
-              </a:rPr>
-              <a:t>Qué esquema se aplica</a:t>
-            </a:r>
-            <a:endParaRPr lang="en-US" sz="1150" dirty="0"/>
+            <a:off x="3593592" y="1572768"/>
+            <a:ext cx="2103120" cy="566928"/>
+          </a:xfrm>
+          <a:prstGeom prst="rect">
+            <a:avLst/>
+          </a:prstGeom>
+          <a:noFill/>
+          <a:ln/>
+        </p:spPr>
+        <p:txBody>
+          <a:bodyPr wrap="square" lIns="0" tIns="0" rIns="0" bIns="0" rtlCol="0" anchor="t"/>
+          <a:lstStyle/>
+          <a:p>
+            <a:pPr indent="0" marL="0">
+              <a:lnSpc>
+                <a:spcPts val="1900"/>
+              </a:lnSpc>
+              <a:buNone/>
+            </a:pPr>
+            <a:r>
+              <a:rPr lang="en-US" sz="1600" b="1" dirty="0">
+                <a:solidFill>
+                  <a:srgbClr val="FFFFFF"/>
+                </a:solidFill>
+                <a:latin typeface="Inter" pitchFamily="34" charset="0"/>
+                <a:ea typeface="Inter" pitchFamily="34" charset="-122"/>
+                <a:cs typeface="Inter" pitchFamily="34" charset="-120"/>
+              </a:rPr>
+              <a:t>Mail o WhatsApp</a:t>
+            </a:r>
+            <a:endParaRPr lang="en-US" sz="1600" dirty="0"/>
           </a:p>
         </p:txBody>
       </p:sp>
@@ -2637,243 +2729,54 @@
         </p:nvSpPr>
         <p:spPr>
           <a:xfrm>
-            <a:off x="822960" y="2560320"/>
-            <a:ext cx="7626096" cy="256032"/>
-          </a:xfrm>
-          <a:prstGeom prst="rect">
-            <a:avLst/>
-          </a:prstGeom>
-          <a:noFill/>
-          <a:ln/>
-        </p:spPr>
-        <p:txBody>
-          <a:bodyPr wrap="square" lIns="0" tIns="0" rIns="0" bIns="0" rtlCol="0" anchor="ctr"/>
+            <a:off x="3593592" y="2212848"/>
+            <a:ext cx="2103120" cy="1179576"/>
+          </a:xfrm>
+          <a:prstGeom prst="rect">
+            <a:avLst/>
+          </a:prstGeom>
+          <a:noFill/>
+          <a:ln/>
+        </p:spPr>
+        <p:txBody>
+          <a:bodyPr wrap="square" lIns="0" tIns="0" rIns="0" bIns="0" rtlCol="0" anchor="t"/>
           <a:lstStyle/>
           <a:p>
             <a:pPr indent="0" marL="0">
               <a:lnSpc>
-                <a:spcPts val="1200"/>
+                <a:spcPts val="1400"/>
               </a:lnSpc>
               <a:buNone/>
             </a:pPr>
             <a:r>
-              <a:rPr lang="en-US" sz="1000" dirty="0">
-                <a:solidFill>
-                  <a:srgbClr val="2E4258"/>
-                </a:solidFill>
-                <a:latin typeface="Inter" pitchFamily="34" charset="0"/>
-                <a:ea typeface="Inter" pitchFamily="34" charset="-122"/>
-                <a:cs typeface="Inter" pitchFamily="34" charset="-120"/>
-              </a:rPr>
-              <a:t>La bolsa 50 y 50, la mitad del comprador o un porcentaje fijo.</a:t>
-            </a:r>
-            <a:endParaRPr lang="en-US" sz="1000" dirty="0"/>
-          </a:p>
-        </p:txBody>
-      </p:sp>
-      <p:sp>
-        <p:nvSpPr>
-          <p:cNvPr id="15" name="Text 12"/>
-          <p:cNvSpPr/>
-          <p:nvPr/>
-        </p:nvSpPr>
-        <p:spPr>
-          <a:xfrm>
-            <a:off x="822960" y="2916936"/>
-            <a:ext cx="7626096" cy="219456"/>
-          </a:xfrm>
-          <a:prstGeom prst="rect">
-            <a:avLst/>
-          </a:prstGeom>
-          <a:noFill/>
-          <a:ln/>
-        </p:spPr>
-        <p:txBody>
-          <a:bodyPr wrap="square" lIns="0" tIns="0" rIns="0" bIns="0" rtlCol="0" anchor="ctr"/>
-          <a:lstStyle/>
-          <a:p>
-            <a:pPr indent="0" marL="0">
-              <a:buNone/>
-            </a:pPr>
-            <a:r>
-              <a:rPr lang="en-US" sz="1150" b="1" dirty="0">
-                <a:solidFill>
-                  <a:srgbClr val="08407C"/>
-                </a:solidFill>
-                <a:latin typeface="Inter" pitchFamily="34" charset="0"/>
-                <a:ea typeface="Inter" pitchFamily="34" charset="-122"/>
-                <a:cs typeface="Inter" pitchFamily="34" charset="-120"/>
-              </a:rPr>
-              <a:t>Sobre qué base se calcula</a:t>
-            </a:r>
-            <a:endParaRPr lang="en-US" sz="1150" dirty="0"/>
-          </a:p>
-        </p:txBody>
-      </p:sp>
-      <p:sp>
-        <p:nvSpPr>
-          <p:cNvPr id="16" name="Text 13"/>
-          <p:cNvSpPr/>
-          <p:nvPr/>
-        </p:nvSpPr>
-        <p:spPr>
-          <a:xfrm>
-            <a:off x="822960" y="3127248"/>
-            <a:ext cx="7626096" cy="256032"/>
-          </a:xfrm>
-          <a:prstGeom prst="rect">
-            <a:avLst/>
-          </a:prstGeom>
-          <a:noFill/>
-          <a:ln/>
-        </p:spPr>
-        <p:txBody>
-          <a:bodyPr wrap="square" lIns="0" tIns="0" rIns="0" bIns="0" rtlCol="0" anchor="ctr"/>
-          <a:lstStyle/>
-          <a:p>
-            <a:pPr indent="0" marL="0">
-              <a:lnSpc>
-                <a:spcPts val="1200"/>
-              </a:lnSpc>
-              <a:buNone/>
-            </a:pPr>
-            <a:r>
-              <a:rPr lang="en-US" sz="1000" dirty="0">
-                <a:solidFill>
-                  <a:srgbClr val="2E4258"/>
-                </a:solidFill>
-                <a:latin typeface="Inter" pitchFamily="34" charset="0"/>
-                <a:ea typeface="Inter" pitchFamily="34" charset="-122"/>
-                <a:cs typeface="Inter" pitchFamily="34" charset="-120"/>
-              </a:rPr>
-              <a:t>El total de los honorarios, solo el comprador o el valor de la operación.</a:t>
-            </a:r>
-            <a:endParaRPr lang="en-US" sz="1000" dirty="0"/>
-          </a:p>
-        </p:txBody>
-      </p:sp>
-      <p:sp>
-        <p:nvSpPr>
-          <p:cNvPr id="17" name="Shape 14"/>
-          <p:cNvSpPr/>
-          <p:nvPr/>
-        </p:nvSpPr>
-        <p:spPr>
-          <a:xfrm>
-            <a:off x="603504" y="3456432"/>
-            <a:ext cx="8083296" cy="512064"/>
+              <a:rPr lang="en-US" sz="1100" dirty="0">
+                <a:solidFill>
+                  <a:srgbClr val="EAEFF5"/>
+                </a:solidFill>
+                <a:latin typeface="Inter" pitchFamily="34" charset="0"/>
+                <a:ea typeface="Inter" pitchFamily="34" charset="-122"/>
+                <a:cs typeface="Inter" pitchFamily="34" charset="-120"/>
+              </a:rPr>
+              <a:t>Escribir el acuerdo y pedir que el colega lo confirme por el mismo medio.</a:t>
+            </a:r>
+            <a:endParaRPr lang="en-US" sz="1100" dirty="0"/>
+          </a:p>
+        </p:txBody>
+      </p:sp>
+      <p:sp>
+        <p:nvSpPr>
+          <p:cNvPr id="15" name="Shape 12"/>
+          <p:cNvSpPr/>
+          <p:nvPr/>
+        </p:nvSpPr>
+        <p:spPr>
+          <a:xfrm>
+            <a:off x="6144768" y="1188720"/>
+            <a:ext cx="2542032" cy="2331720"/>
           </a:xfrm>
           <a:prstGeom prst="roundRect">
             <a:avLst>
-              <a:gd name="adj" fmla="val 16071"/>
-            </a:avLst>
-          </a:prstGeom>
-          <a:solidFill>
-            <a:srgbClr val="F3F3F3"/>
-          </a:solidFill>
-          <a:ln w="12700">
-            <a:solidFill>
-              <a:srgbClr val="F3F3F3"/>
-            </a:solidFill>
-            <a:prstDash val="solid"/>
-          </a:ln>
-        </p:spPr>
-      </p:sp>
-      <p:sp>
-        <p:nvSpPr>
-          <p:cNvPr id="18" name="Text 15"/>
-          <p:cNvSpPr/>
-          <p:nvPr/>
-        </p:nvSpPr>
-        <p:spPr>
-          <a:xfrm>
-            <a:off x="822960" y="3483864"/>
-            <a:ext cx="7626096" cy="219456"/>
-          </a:xfrm>
-          <a:prstGeom prst="rect">
-            <a:avLst/>
-          </a:prstGeom>
-          <a:noFill/>
-          <a:ln/>
-        </p:spPr>
-        <p:txBody>
-          <a:bodyPr wrap="square" lIns="0" tIns="0" rIns="0" bIns="0" rtlCol="0" anchor="ctr"/>
-          <a:lstStyle/>
-          <a:p>
-            <a:pPr indent="0" marL="0">
-              <a:buNone/>
-            </a:pPr>
-            <a:r>
-              <a:rPr lang="en-US" sz="1150" b="1" dirty="0">
-                <a:solidFill>
-                  <a:srgbClr val="08407C"/>
-                </a:solidFill>
-                <a:latin typeface="Inter" pitchFamily="34" charset="0"/>
-                <a:ea typeface="Inter" pitchFamily="34" charset="-122"/>
-                <a:cs typeface="Inter" pitchFamily="34" charset="-120"/>
-              </a:rPr>
-              <a:t>Cuándo y cómo se paga</a:t>
-            </a:r>
-            <a:endParaRPr lang="en-US" sz="1150" dirty="0"/>
-          </a:p>
-        </p:txBody>
-      </p:sp>
-      <p:sp>
-        <p:nvSpPr>
-          <p:cNvPr id="19" name="Text 16"/>
-          <p:cNvSpPr/>
-          <p:nvPr/>
-        </p:nvSpPr>
-        <p:spPr>
-          <a:xfrm>
-            <a:off x="822960" y="3694176"/>
-            <a:ext cx="7626096" cy="256032"/>
-          </a:xfrm>
-          <a:prstGeom prst="rect">
-            <a:avLst/>
-          </a:prstGeom>
-          <a:noFill/>
-          <a:ln/>
-        </p:spPr>
-        <p:txBody>
-          <a:bodyPr wrap="square" lIns="0" tIns="0" rIns="0" bIns="0" rtlCol="0" anchor="ctr"/>
-          <a:lstStyle/>
-          <a:p>
-            <a:pPr indent="0" marL="0">
-              <a:lnSpc>
-                <a:spcPts val="1200"/>
-              </a:lnSpc>
-              <a:buNone/>
-            </a:pPr>
-            <a:r>
-              <a:rPr lang="en-US" sz="1000" dirty="0">
-                <a:solidFill>
-                  <a:srgbClr val="2E4258"/>
-                </a:solidFill>
-                <a:latin typeface="Inter" pitchFamily="34" charset="0"/>
-                <a:ea typeface="Inter" pitchFamily="34" charset="-122"/>
-                <a:cs typeface="Inter" pitchFamily="34" charset="-120"/>
-              </a:rPr>
-              <a:t>Lo define cada pareja de colegas; lo importante es que no quede abierto.</a:t>
-            </a:r>
-            <a:endParaRPr lang="en-US" sz="1000" dirty="0"/>
-          </a:p>
-        </p:txBody>
-      </p:sp>
-      <p:sp>
-        <p:nvSpPr>
-          <p:cNvPr id="20" name="Shape 17"/>
-          <p:cNvSpPr/>
-          <p:nvPr/>
-        </p:nvSpPr>
-        <p:spPr>
-          <a:xfrm>
-            <a:off x="603504" y="4114800"/>
-            <a:ext cx="8083296" cy="658368"/>
-          </a:xfrm>
-          <a:prstGeom prst="roundRect">
-            <a:avLst>
-              <a:gd name="adj" fmla="val 12500"/>
+              <a:gd name="adj" fmla="val 3529"/>
             </a:avLst>
           </a:prstGeom>
           <a:solidFill>
@@ -2889,14 +2792,14 @@
       </p:sp>
       <p:sp>
         <p:nvSpPr>
-          <p:cNvPr id="21" name="Text 18"/>
-          <p:cNvSpPr/>
-          <p:nvPr/>
-        </p:nvSpPr>
-        <p:spPr>
-          <a:xfrm>
-            <a:off x="841248" y="4160520"/>
-            <a:ext cx="7626096" cy="201168"/>
+          <p:cNvPr id="16" name="Text 13"/>
+          <p:cNvSpPr/>
+          <p:nvPr/>
+        </p:nvSpPr>
+        <p:spPr>
+          <a:xfrm>
+            <a:off x="6364224" y="1335024"/>
+            <a:ext cx="2103120" cy="201168"/>
           </a:xfrm>
           <a:prstGeom prst="rect">
             <a:avLst/>
@@ -2920,7 +2823,7 @@
                 <a:ea typeface="Inter" pitchFamily="34" charset="-122"/>
                 <a:cs typeface="Inter" pitchFamily="34" charset="-120"/>
               </a:rPr>
-              <a:t>REGLA</a:t>
+              <a:t>NO ALCANZA</a:t>
             </a:r>
             <a:endParaRPr lang="en-US" sz="900" dirty="0"/>
           </a:p>
@@ -2928,23 +2831,65 @@
       </p:sp>
       <p:sp>
         <p:nvSpPr>
-          <p:cNvPr id="22" name="Text 19"/>
-          <p:cNvSpPr/>
-          <p:nvPr/>
-        </p:nvSpPr>
-        <p:spPr>
-          <a:xfrm>
-            <a:off x="841248" y="4361688"/>
-            <a:ext cx="7607808" cy="347472"/>
-          </a:xfrm>
-          <a:prstGeom prst="rect">
-            <a:avLst/>
-          </a:prstGeom>
-          <a:noFill/>
-          <a:ln/>
-        </p:spPr>
-        <p:txBody>
-          <a:bodyPr wrap="square" lIns="0" tIns="0" rIns="0" bIns="0" rtlCol="0" anchor="ctr"/>
+          <p:cNvPr id="17" name="Text 14"/>
+          <p:cNvSpPr/>
+          <p:nvPr/>
+        </p:nvSpPr>
+        <p:spPr>
+          <a:xfrm>
+            <a:off x="6364224" y="1572768"/>
+            <a:ext cx="2103120" cy="566928"/>
+          </a:xfrm>
+          <a:prstGeom prst="rect">
+            <a:avLst/>
+          </a:prstGeom>
+          <a:noFill/>
+          <a:ln/>
+        </p:spPr>
+        <p:txBody>
+          <a:bodyPr wrap="square" lIns="0" tIns="0" rIns="0" bIns="0" rtlCol="0" anchor="t"/>
+          <a:lstStyle/>
+          <a:p>
+            <a:pPr indent="0" marL="0">
+              <a:lnSpc>
+                <a:spcPts val="1900"/>
+              </a:lnSpc>
+              <a:buNone/>
+            </a:pPr>
+            <a:r>
+              <a:rPr lang="en-US" sz="1600" b="1" dirty="0">
+                <a:solidFill>
+                  <a:srgbClr val="FFFFFF"/>
+                </a:solidFill>
+                <a:latin typeface="Inter" pitchFamily="34" charset="0"/>
+                <a:ea typeface="Inter" pitchFamily="34" charset="-122"/>
+                <a:cs typeface="Inter" pitchFamily="34" charset="-120"/>
+              </a:rPr>
+              <a:t>Acuerdo de palabra</a:t>
+            </a:r>
+            <a:endParaRPr lang="en-US" sz="1600" dirty="0"/>
+          </a:p>
+        </p:txBody>
+      </p:sp>
+      <p:sp>
+        <p:nvSpPr>
+          <p:cNvPr id="18" name="Text 15"/>
+          <p:cNvSpPr/>
+          <p:nvPr/>
+        </p:nvSpPr>
+        <p:spPr>
+          <a:xfrm>
+            <a:off x="6364224" y="2212848"/>
+            <a:ext cx="2103120" cy="1179576"/>
+          </a:xfrm>
+          <a:prstGeom prst="rect">
+            <a:avLst/>
+          </a:prstGeom>
+          <a:noFill/>
+          <a:ln/>
+        </p:spPr>
+        <p:txBody>
+          <a:bodyPr wrap="square" lIns="0" tIns="0" rIns="0" bIns="0" rtlCol="0" anchor="t"/>
           <a:lstStyle/>
           <a:p>
             <a:pPr indent="0" marL="0">
@@ -2956,13 +2901,121 @@
             <a:r>
               <a:rPr lang="en-US" sz="1100" dirty="0">
                 <a:solidFill>
+                  <a:srgbClr val="EAEFF5"/>
+                </a:solidFill>
+                <a:latin typeface="Inter" pitchFamily="34" charset="0"/>
+                <a:ea typeface="Inter" pitchFamily="34" charset="-122"/>
+                <a:cs typeface="Inter" pitchFamily="34" charset="-120"/>
+              </a:rPr>
+              <a:t>Un llamado o una charla en una visita no deja nada que mostrar si hay un malentendido.</a:t>
+            </a:r>
+            <a:endParaRPr lang="en-US" sz="1100" dirty="0"/>
+          </a:p>
+        </p:txBody>
+      </p:sp>
+      <p:sp>
+        <p:nvSpPr>
+          <p:cNvPr id="19" name="Shape 16"/>
+          <p:cNvSpPr/>
+          <p:nvPr/>
+        </p:nvSpPr>
+        <p:spPr>
+          <a:xfrm>
+            <a:off x="603504" y="3794760"/>
+            <a:ext cx="8083296" cy="658368"/>
+          </a:xfrm>
+          <a:prstGeom prst="roundRect">
+            <a:avLst>
+              <a:gd name="adj" fmla="val 12500"/>
+            </a:avLst>
+          </a:prstGeom>
+          <a:solidFill>
+            <a:srgbClr val="08407C"/>
+          </a:solidFill>
+          <a:ln w="12700">
+            <a:solidFill>
+              <a:srgbClr val="08407C"/>
+            </a:solidFill>
+            <a:prstDash val="solid"/>
+          </a:ln>
+        </p:spPr>
+      </p:sp>
+      <p:sp>
+        <p:nvSpPr>
+          <p:cNvPr id="20" name="Text 17"/>
+          <p:cNvSpPr/>
+          <p:nvPr/>
+        </p:nvSpPr>
+        <p:spPr>
+          <a:xfrm>
+            <a:off x="841248" y="3840480"/>
+            <a:ext cx="7626096" cy="201168"/>
+          </a:xfrm>
+          <a:prstGeom prst="rect">
+            <a:avLst/>
+          </a:prstGeom>
+          <a:noFill/>
+          <a:ln/>
+        </p:spPr>
+        <p:txBody>
+          <a:bodyPr wrap="square" lIns="0" tIns="0" rIns="0" bIns="0" rtlCol="0" anchor="ctr"/>
+          <a:lstStyle/>
+          <a:p>
+            <a:pPr indent="0" marL="0">
+              <a:buNone/>
+            </a:pPr>
+            <a:r>
+              <a:rPr lang="en-US" sz="900" b="1" spc="120" kern="0" dirty="0">
+                <a:solidFill>
                   <a:srgbClr val="FFFFFF"/>
                 </a:solidFill>
                 <a:latin typeface="Inter" pitchFamily="34" charset="0"/>
                 <a:ea typeface="Inter" pitchFamily="34" charset="-122"/>
                 <a:cs typeface="Inter" pitchFamily="34" charset="-120"/>
               </a:rPr>
-              <a:t>Si algo del acuerdo se puede interpretar de dos maneras, se escribe de una sola.</a:t>
+              <a:t>HÁBITO</a:t>
+            </a:r>
+            <a:endParaRPr lang="en-US" sz="900" dirty="0"/>
+          </a:p>
+        </p:txBody>
+      </p:sp>
+      <p:sp>
+        <p:nvSpPr>
+          <p:cNvPr id="21" name="Text 18"/>
+          <p:cNvSpPr/>
+          <p:nvPr/>
+        </p:nvSpPr>
+        <p:spPr>
+          <a:xfrm>
+            <a:off x="841248" y="4041648"/>
+            <a:ext cx="7607808" cy="347472"/>
+          </a:xfrm>
+          <a:prstGeom prst="rect">
+            <a:avLst/>
+          </a:prstGeom>
+          <a:noFill/>
+          <a:ln/>
+        </p:spPr>
+        <p:txBody>
+          <a:bodyPr wrap="square" lIns="0" tIns="0" rIns="0" bIns="0" rtlCol="0" anchor="ctr"/>
+          <a:lstStyle/>
+          <a:p>
+            <a:pPr indent="0" marL="0">
+              <a:lnSpc>
+                <a:spcPts val="1400"/>
+              </a:lnSpc>
+              <a:buNone/>
+            </a:pPr>
+            <a:r>
+              <a:rPr lang="en-US" sz="1100" dirty="0">
+                <a:solidFill>
+                  <a:srgbClr val="FFFFFF"/>
+                </a:solidFill>
+                <a:latin typeface="Inter" pitchFamily="34" charset="0"/>
+                <a:ea typeface="Inter" pitchFamily="34" charset="-122"/>
+                <a:cs typeface="Inter" pitchFamily="34" charset="-120"/>
+              </a:rPr>
+              <a:t>Si no hay documento a mano, se escribe el acuerdo por mail o WhatsApp y se pide la confirmación del colega.</a:t>
             </a:r>
             <a:endParaRPr lang="en-US" sz="1100" dirty="0"/>
           </a:p>
@@ -3114,7 +3167,7 @@
                 <a:ea typeface="Inter" pitchFamily="34" charset="-122"/>
                 <a:cs typeface="Inter" pitchFamily="34" charset="-120"/>
               </a:rPr>
-              <a:t>Tres casos para pensar</a:t>
+              <a:t>Qué debe quedar escrito</a:t>
             </a:r>
             <a:endParaRPr lang="en-US" sz="2600" dirty="0"/>
           </a:p>
@@ -3153,7 +3206,7 @@
                 <a:ea typeface="Inter" pitchFamily="34" charset="-122"/>
                 <a:cs typeface="Inter" pitchFamily="34" charset="-120"/>
               </a:rPr>
-              <a:t>Hipotéticos. En el taller los reemplazamos por los del equipo.</a:t>
+              <a:t>Ya sea en la reserva, en el convenio o en un mensaje.</a:t>
             </a:r>
             <a:endParaRPr lang="en-US" sz="1200" dirty="0"/>
           </a:p>
@@ -3168,11 +3221,11 @@
         <p:spPr>
           <a:xfrm>
             <a:off x="603504" y="1188720"/>
-            <a:ext cx="2542032" cy="2697480"/>
+            <a:ext cx="8083296" cy="512064"/>
           </a:xfrm>
           <a:prstGeom prst="roundRect">
             <a:avLst>
-              <a:gd name="adj" fmla="val 3237"/>
+              <a:gd name="adj" fmla="val 16071"/>
             </a:avLst>
           </a:prstGeom>
           <a:solidFill>
@@ -3188,210 +3241,180 @@
       </p:sp>
       <p:sp>
         <p:nvSpPr>
-          <p:cNvPr id="8" name="Shape 5"/>
-          <p:cNvSpPr/>
-          <p:nvPr/>
-        </p:nvSpPr>
-        <p:spPr>
-          <a:xfrm>
-            <a:off x="603504" y="1188720"/>
-            <a:ext cx="2542032" cy="457200"/>
+          <p:cNvPr id="8" name="Text 5"/>
+          <p:cNvSpPr/>
+          <p:nvPr/>
+        </p:nvSpPr>
+        <p:spPr>
+          <a:xfrm>
+            <a:off x="822960" y="1216152"/>
+            <a:ext cx="7626096" cy="219456"/>
+          </a:xfrm>
+          <a:prstGeom prst="rect">
+            <a:avLst/>
+          </a:prstGeom>
+          <a:noFill/>
+          <a:ln/>
+        </p:spPr>
+        <p:txBody>
+          <a:bodyPr wrap="square" lIns="0" tIns="0" rIns="0" bIns="0" rtlCol="0" anchor="ctr"/>
+          <a:lstStyle/>
+          <a:p>
+            <a:pPr indent="0" marL="0">
+              <a:buNone/>
+            </a:pPr>
+            <a:r>
+              <a:rPr lang="en-US" sz="1150" b="1" dirty="0">
+                <a:solidFill>
+                  <a:srgbClr val="08407C"/>
+                </a:solidFill>
+                <a:latin typeface="Inter" pitchFamily="34" charset="0"/>
+                <a:ea typeface="Inter" pitchFamily="34" charset="-122"/>
+                <a:cs typeface="Inter" pitchFamily="34" charset="-120"/>
+              </a:rPr>
+              <a:t>Quiénes son las partes</a:t>
+            </a:r>
+            <a:endParaRPr lang="en-US" sz="1150" dirty="0"/>
+          </a:p>
+        </p:txBody>
+      </p:sp>
+      <p:sp>
+        <p:nvSpPr>
+          <p:cNvPr id="9" name="Text 6"/>
+          <p:cNvSpPr/>
+          <p:nvPr/>
+        </p:nvSpPr>
+        <p:spPr>
+          <a:xfrm>
+            <a:off x="822960" y="1426464"/>
+            <a:ext cx="7626096" cy="256032"/>
+          </a:xfrm>
+          <a:prstGeom prst="rect">
+            <a:avLst/>
+          </a:prstGeom>
+          <a:noFill/>
+          <a:ln/>
+        </p:spPr>
+        <p:txBody>
+          <a:bodyPr wrap="square" lIns="0" tIns="0" rIns="0" bIns="0" rtlCol="0" anchor="ctr"/>
+          <a:lstStyle/>
+          <a:p>
+            <a:pPr indent="0" marL="0">
+              <a:lnSpc>
+                <a:spcPts val="1200"/>
+              </a:lnSpc>
+              <a:buNone/>
+            </a:pPr>
+            <a:r>
+              <a:rPr lang="en-US" sz="1000" dirty="0">
+                <a:solidFill>
+                  <a:srgbClr val="2E4258"/>
+                </a:solidFill>
+                <a:latin typeface="Inter" pitchFamily="34" charset="0"/>
+                <a:ea typeface="Inter" pitchFamily="34" charset="-122"/>
+                <a:cs typeface="Inter" pitchFamily="34" charset="-120"/>
+              </a:rPr>
+              <a:t>Los dos colegas y la empresa que representa cada uno.</a:t>
+            </a:r>
+            <a:endParaRPr lang="en-US" sz="1000" dirty="0"/>
+          </a:p>
+        </p:txBody>
+      </p:sp>
+      <p:sp>
+        <p:nvSpPr>
+          <p:cNvPr id="10" name="Text 7"/>
+          <p:cNvSpPr/>
+          <p:nvPr/>
+        </p:nvSpPr>
+        <p:spPr>
+          <a:xfrm>
+            <a:off x="822960" y="1783080"/>
+            <a:ext cx="7626096" cy="219456"/>
+          </a:xfrm>
+          <a:prstGeom prst="rect">
+            <a:avLst/>
+          </a:prstGeom>
+          <a:noFill/>
+          <a:ln/>
+        </p:spPr>
+        <p:txBody>
+          <a:bodyPr wrap="square" lIns="0" tIns="0" rIns="0" bIns="0" rtlCol="0" anchor="ctr"/>
+          <a:lstStyle/>
+          <a:p>
+            <a:pPr indent="0" marL="0">
+              <a:buNone/>
+            </a:pPr>
+            <a:r>
+              <a:rPr lang="en-US" sz="1150" b="1" dirty="0">
+                <a:solidFill>
+                  <a:srgbClr val="08407C"/>
+                </a:solidFill>
+                <a:latin typeface="Inter" pitchFamily="34" charset="0"/>
+                <a:ea typeface="Inter" pitchFamily="34" charset="-122"/>
+                <a:cs typeface="Inter" pitchFamily="34" charset="-120"/>
+              </a:rPr>
+              <a:t>Sobre qué operación</a:t>
+            </a:r>
+            <a:endParaRPr lang="en-US" sz="1150" dirty="0"/>
+          </a:p>
+        </p:txBody>
+      </p:sp>
+      <p:sp>
+        <p:nvSpPr>
+          <p:cNvPr id="11" name="Text 8"/>
+          <p:cNvSpPr/>
+          <p:nvPr/>
+        </p:nvSpPr>
+        <p:spPr>
+          <a:xfrm>
+            <a:off x="822960" y="1993392"/>
+            <a:ext cx="7626096" cy="256032"/>
+          </a:xfrm>
+          <a:prstGeom prst="rect">
+            <a:avLst/>
+          </a:prstGeom>
+          <a:noFill/>
+          <a:ln/>
+        </p:spPr>
+        <p:txBody>
+          <a:bodyPr wrap="square" lIns="0" tIns="0" rIns="0" bIns="0" rtlCol="0" anchor="ctr"/>
+          <a:lstStyle/>
+          <a:p>
+            <a:pPr indent="0" marL="0">
+              <a:lnSpc>
+                <a:spcPts val="1200"/>
+              </a:lnSpc>
+              <a:buNone/>
+            </a:pPr>
+            <a:r>
+              <a:rPr lang="en-US" sz="1000" dirty="0">
+                <a:solidFill>
+                  <a:srgbClr val="2E4258"/>
+                </a:solidFill>
+                <a:latin typeface="Inter" pitchFamily="34" charset="0"/>
+                <a:ea typeface="Inter" pitchFamily="34" charset="-122"/>
+                <a:cs typeface="Inter" pitchFamily="34" charset="-120"/>
+              </a:rPr>
+              <a:t>La propiedad o el producto y, si ya existe, el cliente o la reserva.</a:t>
+            </a:r>
+            <a:endParaRPr lang="en-US" sz="1000" dirty="0"/>
+          </a:p>
+        </p:txBody>
+      </p:sp>
+      <p:sp>
+        <p:nvSpPr>
+          <p:cNvPr id="12" name="Shape 9"/>
+          <p:cNvSpPr/>
+          <p:nvPr/>
+        </p:nvSpPr>
+        <p:spPr>
+          <a:xfrm>
+            <a:off x="603504" y="2322576"/>
+            <a:ext cx="8083296" cy="512064"/>
           </a:xfrm>
           <a:prstGeom prst="roundRect">
             <a:avLst>
-              <a:gd name="adj" fmla="val 18000"/>
-            </a:avLst>
-          </a:prstGeom>
-          <a:solidFill>
-            <a:srgbClr val="08407C"/>
-          </a:solidFill>
-          <a:ln w="12700">
-            <a:solidFill>
-              <a:srgbClr val="08407C"/>
-            </a:solidFill>
-            <a:prstDash val="solid"/>
-          </a:ln>
-        </p:spPr>
-      </p:sp>
-      <p:sp>
-        <p:nvSpPr>
-          <p:cNvPr id="9" name="Text 6"/>
-          <p:cNvSpPr/>
-          <p:nvPr/>
-        </p:nvSpPr>
-        <p:spPr>
-          <a:xfrm>
-            <a:off x="822960" y="1188720"/>
-            <a:ext cx="2103120" cy="457200"/>
-          </a:xfrm>
-          <a:prstGeom prst="rect">
-            <a:avLst/>
-          </a:prstGeom>
-          <a:noFill/>
-          <a:ln/>
-        </p:spPr>
-        <p:txBody>
-          <a:bodyPr wrap="square" lIns="0" tIns="0" rIns="0" bIns="0" rtlCol="0" anchor="ctr"/>
-          <a:lstStyle/>
-          <a:p>
-            <a:pPr indent="0" marL="0">
-              <a:buNone/>
-            </a:pPr>
-            <a:r>
-              <a:rPr lang="en-US" sz="1100" b="1" spc="120" kern="0" dirty="0">
-                <a:solidFill>
-                  <a:srgbClr val="FFFFFF"/>
-                </a:solidFill>
-                <a:latin typeface="Inter" pitchFamily="34" charset="0"/>
-                <a:ea typeface="Inter" pitchFamily="34" charset="-122"/>
-                <a:cs typeface="Inter" pitchFamily="34" charset="-120"/>
-              </a:rPr>
-              <a:t>CASO 1</a:t>
-            </a:r>
-            <a:endParaRPr lang="en-US" sz="1100" dirty="0"/>
-          </a:p>
-        </p:txBody>
-      </p:sp>
-      <p:sp>
-        <p:nvSpPr>
-          <p:cNvPr id="10" name="Text 7"/>
-          <p:cNvSpPr/>
-          <p:nvPr/>
-        </p:nvSpPr>
-        <p:spPr>
-          <a:xfrm>
-            <a:off x="822960" y="1737360"/>
-            <a:ext cx="2103120" cy="457200"/>
-          </a:xfrm>
-          <a:prstGeom prst="rect">
-            <a:avLst/>
-          </a:prstGeom>
-          <a:noFill/>
-          <a:ln/>
-        </p:spPr>
-        <p:txBody>
-          <a:bodyPr wrap="square" lIns="0" tIns="0" rIns="0" bIns="0" rtlCol="0" anchor="t"/>
-          <a:lstStyle/>
-          <a:p>
-            <a:pPr indent="0" marL="0">
-              <a:lnSpc>
-                <a:spcPts val="1600"/>
-              </a:lnSpc>
-              <a:buNone/>
-            </a:pPr>
-            <a:r>
-              <a:rPr lang="en-US" sz="1300" b="1" dirty="0">
-                <a:solidFill>
-                  <a:srgbClr val="08407C"/>
-                </a:solidFill>
-                <a:latin typeface="Inter" pitchFamily="34" charset="0"/>
-                <a:ea typeface="Inter" pitchFamily="34" charset="-122"/>
-                <a:cs typeface="Inter" pitchFamily="34" charset="-120"/>
-              </a:rPr>
-              <a:t>El dato sin acuerdo</a:t>
-            </a:r>
-            <a:endParaRPr lang="en-US" sz="1300" dirty="0"/>
-          </a:p>
-        </p:txBody>
-      </p:sp>
-      <p:sp>
-        <p:nvSpPr>
-          <p:cNvPr id="11" name="Text 8"/>
-          <p:cNvSpPr/>
-          <p:nvPr/>
-        </p:nvSpPr>
-        <p:spPr>
-          <a:xfrm>
-            <a:off x="822960" y="2240280"/>
-            <a:ext cx="2103120" cy="914400"/>
-          </a:xfrm>
-          <a:prstGeom prst="rect">
-            <a:avLst/>
-          </a:prstGeom>
-          <a:noFill/>
-          <a:ln/>
-        </p:spPr>
-        <p:txBody>
-          <a:bodyPr wrap="square" lIns="0" tIns="0" rIns="0" bIns="0" rtlCol="0" anchor="t"/>
-          <a:lstStyle/>
-          <a:p>
-            <a:pPr indent="0" marL="0">
-              <a:lnSpc>
-                <a:spcPts val="1300"/>
-              </a:lnSpc>
-              <a:buNone/>
-            </a:pPr>
-            <a:r>
-              <a:rPr lang="en-US" sz="1000" dirty="0">
-                <a:solidFill>
-                  <a:srgbClr val="2E4258"/>
-                </a:solidFill>
-                <a:latin typeface="Inter" pitchFamily="34" charset="0"/>
-                <a:ea typeface="Inter" pitchFamily="34" charset="-122"/>
-                <a:cs typeface="Inter" pitchFamily="34" charset="-120"/>
-              </a:rPr>
-              <a:t>Un colega pasa los datos de una propiedad y, después de la visita, el comprador quiere ofertar. Nadie habló de honorarios.</a:t>
-            </a:r>
-            <a:endParaRPr lang="en-US" sz="1000" dirty="0"/>
-          </a:p>
-        </p:txBody>
-      </p:sp>
-      <p:sp>
-        <p:nvSpPr>
-          <p:cNvPr id="12" name="Text 9"/>
-          <p:cNvSpPr/>
-          <p:nvPr/>
-        </p:nvSpPr>
-        <p:spPr>
-          <a:xfrm>
-            <a:off x="822960" y="3200400"/>
-            <a:ext cx="2103120" cy="594360"/>
-          </a:xfrm>
-          <a:prstGeom prst="rect">
-            <a:avLst/>
-          </a:prstGeom>
-          <a:noFill/>
-          <a:ln/>
-        </p:spPr>
-        <p:txBody>
-          <a:bodyPr wrap="square" lIns="0" tIns="0" rIns="0" bIns="0" rtlCol="0" anchor="t"/>
-          <a:lstStyle/>
-          <a:p>
-            <a:pPr indent="0" marL="0">
-              <a:lnSpc>
-                <a:spcPts val="1300"/>
-              </a:lnSpc>
-              <a:buNone/>
-            </a:pPr>
-            <a:r>
-              <a:rPr lang="en-US" sz="1050" b="1" dirty="0">
-                <a:solidFill>
-                  <a:srgbClr val="E74B3C"/>
-                </a:solidFill>
-                <a:latin typeface="Inter" pitchFamily="34" charset="0"/>
-                <a:ea typeface="Inter" pitchFamily="34" charset="-122"/>
-                <a:cs typeface="Inter" pitchFamily="34" charset="-120"/>
-              </a:rPr>
-              <a:t>Se debió preguntar primero.</a:t>
-            </a:r>
-            <a:endParaRPr lang="en-US" sz="1050" dirty="0"/>
-          </a:p>
-        </p:txBody>
-      </p:sp>
-      <p:sp>
-        <p:nvSpPr>
-          <p:cNvPr id="13" name="Shape 10"/>
-          <p:cNvSpPr/>
-          <p:nvPr/>
-        </p:nvSpPr>
-        <p:spPr>
-          <a:xfrm>
-            <a:off x="3374136" y="1188720"/>
-            <a:ext cx="2542032" cy="2697480"/>
-          </a:xfrm>
-          <a:prstGeom prst="roundRect">
-            <a:avLst>
-              <a:gd name="adj" fmla="val 3237"/>
+              <a:gd name="adj" fmla="val 16071"/>
             </a:avLst>
           </a:prstGeom>
           <a:solidFill>
@@ -3407,210 +3430,180 @@
       </p:sp>
       <p:sp>
         <p:nvSpPr>
-          <p:cNvPr id="14" name="Shape 11"/>
-          <p:cNvSpPr/>
-          <p:nvPr/>
-        </p:nvSpPr>
-        <p:spPr>
-          <a:xfrm>
-            <a:off x="3374136" y="1188720"/>
-            <a:ext cx="2542032" cy="457200"/>
+          <p:cNvPr id="13" name="Text 10"/>
+          <p:cNvSpPr/>
+          <p:nvPr/>
+        </p:nvSpPr>
+        <p:spPr>
+          <a:xfrm>
+            <a:off x="822960" y="2350008"/>
+            <a:ext cx="7626096" cy="219456"/>
+          </a:xfrm>
+          <a:prstGeom prst="rect">
+            <a:avLst/>
+          </a:prstGeom>
+          <a:noFill/>
+          <a:ln/>
+        </p:spPr>
+        <p:txBody>
+          <a:bodyPr wrap="square" lIns="0" tIns="0" rIns="0" bIns="0" rtlCol="0" anchor="ctr"/>
+          <a:lstStyle/>
+          <a:p>
+            <a:pPr indent="0" marL="0">
+              <a:buNone/>
+            </a:pPr>
+            <a:r>
+              <a:rPr lang="en-US" sz="1150" b="1" dirty="0">
+                <a:solidFill>
+                  <a:srgbClr val="08407C"/>
+                </a:solidFill>
+                <a:latin typeface="Inter" pitchFamily="34" charset="0"/>
+                <a:ea typeface="Inter" pitchFamily="34" charset="-122"/>
+                <a:cs typeface="Inter" pitchFamily="34" charset="-120"/>
+              </a:rPr>
+              <a:t>Qué esquema se aplica</a:t>
+            </a:r>
+            <a:endParaRPr lang="en-US" sz="1150" dirty="0"/>
+          </a:p>
+        </p:txBody>
+      </p:sp>
+      <p:sp>
+        <p:nvSpPr>
+          <p:cNvPr id="14" name="Text 11"/>
+          <p:cNvSpPr/>
+          <p:nvPr/>
+        </p:nvSpPr>
+        <p:spPr>
+          <a:xfrm>
+            <a:off x="822960" y="2560320"/>
+            <a:ext cx="7626096" cy="256032"/>
+          </a:xfrm>
+          <a:prstGeom prst="rect">
+            <a:avLst/>
+          </a:prstGeom>
+          <a:noFill/>
+          <a:ln/>
+        </p:spPr>
+        <p:txBody>
+          <a:bodyPr wrap="square" lIns="0" tIns="0" rIns="0" bIns="0" rtlCol="0" anchor="ctr"/>
+          <a:lstStyle/>
+          <a:p>
+            <a:pPr indent="0" marL="0">
+              <a:lnSpc>
+                <a:spcPts val="1200"/>
+              </a:lnSpc>
+              <a:buNone/>
+            </a:pPr>
+            <a:r>
+              <a:rPr lang="en-US" sz="1000" dirty="0">
+                <a:solidFill>
+                  <a:srgbClr val="2E4258"/>
+                </a:solidFill>
+                <a:latin typeface="Inter" pitchFamily="34" charset="0"/>
+                <a:ea typeface="Inter" pitchFamily="34" charset="-122"/>
+                <a:cs typeface="Inter" pitchFamily="34" charset="-120"/>
+              </a:rPr>
+              <a:t>La bolsa 50 y 50, la mitad del comprador o un porcentaje fijo.</a:t>
+            </a:r>
+            <a:endParaRPr lang="en-US" sz="1000" dirty="0"/>
+          </a:p>
+        </p:txBody>
+      </p:sp>
+      <p:sp>
+        <p:nvSpPr>
+          <p:cNvPr id="15" name="Text 12"/>
+          <p:cNvSpPr/>
+          <p:nvPr/>
+        </p:nvSpPr>
+        <p:spPr>
+          <a:xfrm>
+            <a:off x="822960" y="2916936"/>
+            <a:ext cx="7626096" cy="219456"/>
+          </a:xfrm>
+          <a:prstGeom prst="rect">
+            <a:avLst/>
+          </a:prstGeom>
+          <a:noFill/>
+          <a:ln/>
+        </p:spPr>
+        <p:txBody>
+          <a:bodyPr wrap="square" lIns="0" tIns="0" rIns="0" bIns="0" rtlCol="0" anchor="ctr"/>
+          <a:lstStyle/>
+          <a:p>
+            <a:pPr indent="0" marL="0">
+              <a:buNone/>
+            </a:pPr>
+            <a:r>
+              <a:rPr lang="en-US" sz="1150" b="1" dirty="0">
+                <a:solidFill>
+                  <a:srgbClr val="08407C"/>
+                </a:solidFill>
+                <a:latin typeface="Inter" pitchFamily="34" charset="0"/>
+                <a:ea typeface="Inter" pitchFamily="34" charset="-122"/>
+                <a:cs typeface="Inter" pitchFamily="34" charset="-120"/>
+              </a:rPr>
+              <a:t>Sobre qué base se calcula</a:t>
+            </a:r>
+            <a:endParaRPr lang="en-US" sz="1150" dirty="0"/>
+          </a:p>
+        </p:txBody>
+      </p:sp>
+      <p:sp>
+        <p:nvSpPr>
+          <p:cNvPr id="16" name="Text 13"/>
+          <p:cNvSpPr/>
+          <p:nvPr/>
+        </p:nvSpPr>
+        <p:spPr>
+          <a:xfrm>
+            <a:off x="822960" y="3127248"/>
+            <a:ext cx="7626096" cy="256032"/>
+          </a:xfrm>
+          <a:prstGeom prst="rect">
+            <a:avLst/>
+          </a:prstGeom>
+          <a:noFill/>
+          <a:ln/>
+        </p:spPr>
+        <p:txBody>
+          <a:bodyPr wrap="square" lIns="0" tIns="0" rIns="0" bIns="0" rtlCol="0" anchor="ctr"/>
+          <a:lstStyle/>
+          <a:p>
+            <a:pPr indent="0" marL="0">
+              <a:lnSpc>
+                <a:spcPts val="1200"/>
+              </a:lnSpc>
+              <a:buNone/>
+            </a:pPr>
+            <a:r>
+              <a:rPr lang="en-US" sz="1000" dirty="0">
+                <a:solidFill>
+                  <a:srgbClr val="2E4258"/>
+                </a:solidFill>
+                <a:latin typeface="Inter" pitchFamily="34" charset="0"/>
+                <a:ea typeface="Inter" pitchFamily="34" charset="-122"/>
+                <a:cs typeface="Inter" pitchFamily="34" charset="-120"/>
+              </a:rPr>
+              <a:t>El total de los honorarios, solo el comprador o el valor de la operación.</a:t>
+            </a:r>
+            <a:endParaRPr lang="en-US" sz="1000" dirty="0"/>
+          </a:p>
+        </p:txBody>
+      </p:sp>
+      <p:sp>
+        <p:nvSpPr>
+          <p:cNvPr id="17" name="Shape 14"/>
+          <p:cNvSpPr/>
+          <p:nvPr/>
+        </p:nvSpPr>
+        <p:spPr>
+          <a:xfrm>
+            <a:off x="603504" y="3456432"/>
+            <a:ext cx="8083296" cy="512064"/>
           </a:xfrm>
           <a:prstGeom prst="roundRect">
             <a:avLst>
-              <a:gd name="adj" fmla="val 18000"/>
-            </a:avLst>
-          </a:prstGeom>
-          <a:solidFill>
-            <a:srgbClr val="7C8594"/>
-          </a:solidFill>
-          <a:ln w="12700">
-            <a:solidFill>
-              <a:srgbClr val="7C8594"/>
-            </a:solidFill>
-            <a:prstDash val="solid"/>
-          </a:ln>
-        </p:spPr>
-      </p:sp>
-      <p:sp>
-        <p:nvSpPr>
-          <p:cNvPr id="15" name="Text 12"/>
-          <p:cNvSpPr/>
-          <p:nvPr/>
-        </p:nvSpPr>
-        <p:spPr>
-          <a:xfrm>
-            <a:off x="3593592" y="1188720"/>
-            <a:ext cx="2103120" cy="457200"/>
-          </a:xfrm>
-          <a:prstGeom prst="rect">
-            <a:avLst/>
-          </a:prstGeom>
-          <a:noFill/>
-          <a:ln/>
-        </p:spPr>
-        <p:txBody>
-          <a:bodyPr wrap="square" lIns="0" tIns="0" rIns="0" bIns="0" rtlCol="0" anchor="ctr"/>
-          <a:lstStyle/>
-          <a:p>
-            <a:pPr indent="0" marL="0">
-              <a:buNone/>
-            </a:pPr>
-            <a:r>
-              <a:rPr lang="en-US" sz="1100" b="1" spc="120" kern="0" dirty="0">
-                <a:solidFill>
-                  <a:srgbClr val="FFFFFF"/>
-                </a:solidFill>
-                <a:latin typeface="Inter" pitchFamily="34" charset="0"/>
-                <a:ea typeface="Inter" pitchFamily="34" charset="-122"/>
-                <a:cs typeface="Inter" pitchFamily="34" charset="-120"/>
-              </a:rPr>
-              <a:t>CASO 2</a:t>
-            </a:r>
-            <a:endParaRPr lang="en-US" sz="1100" dirty="0"/>
-          </a:p>
-        </p:txBody>
-      </p:sp>
-      <p:sp>
-        <p:nvSpPr>
-          <p:cNvPr id="16" name="Text 13"/>
-          <p:cNvSpPr/>
-          <p:nvPr/>
-        </p:nvSpPr>
-        <p:spPr>
-          <a:xfrm>
-            <a:off x="3593592" y="1737360"/>
-            <a:ext cx="2103120" cy="457200"/>
-          </a:xfrm>
-          <a:prstGeom prst="rect">
-            <a:avLst/>
-          </a:prstGeom>
-          <a:noFill/>
-          <a:ln/>
-        </p:spPr>
-        <p:txBody>
-          <a:bodyPr wrap="square" lIns="0" tIns="0" rIns="0" bIns="0" rtlCol="0" anchor="t"/>
-          <a:lstStyle/>
-          <a:p>
-            <a:pPr indent="0" marL="0">
-              <a:lnSpc>
-                <a:spcPts val="1600"/>
-              </a:lnSpc>
-              <a:buNone/>
-            </a:pPr>
-            <a:r>
-              <a:rPr lang="en-US" sz="1300" b="1" dirty="0">
-                <a:solidFill>
-                  <a:srgbClr val="08407C"/>
-                </a:solidFill>
-                <a:latin typeface="Inter" pitchFamily="34" charset="0"/>
-                <a:ea typeface="Inter" pitchFamily="34" charset="-122"/>
-                <a:cs typeface="Inter" pitchFamily="34" charset="-120"/>
-              </a:rPr>
-              <a:t>El acuerdo de palabra</a:t>
-            </a:r>
-            <a:endParaRPr lang="en-US" sz="1300" dirty="0"/>
-          </a:p>
-        </p:txBody>
-      </p:sp>
-      <p:sp>
-        <p:nvSpPr>
-          <p:cNvPr id="17" name="Text 14"/>
-          <p:cNvSpPr/>
-          <p:nvPr/>
-        </p:nvSpPr>
-        <p:spPr>
-          <a:xfrm>
-            <a:off x="3593592" y="2240280"/>
-            <a:ext cx="2103120" cy="914400"/>
-          </a:xfrm>
-          <a:prstGeom prst="rect">
-            <a:avLst/>
-          </a:prstGeom>
-          <a:noFill/>
-          <a:ln/>
-        </p:spPr>
-        <p:txBody>
-          <a:bodyPr wrap="square" lIns="0" tIns="0" rIns="0" bIns="0" rtlCol="0" anchor="t"/>
-          <a:lstStyle/>
-          <a:p>
-            <a:pPr indent="0" marL="0">
-              <a:lnSpc>
-                <a:spcPts val="1300"/>
-              </a:lnSpc>
-              <a:buNone/>
-            </a:pPr>
-            <a:r>
-              <a:rPr lang="en-US" sz="1000" dirty="0">
-                <a:solidFill>
-                  <a:srgbClr val="2E4258"/>
-                </a:solidFill>
-                <a:latin typeface="Inter" pitchFamily="34" charset="0"/>
-                <a:ea typeface="Inter" pitchFamily="34" charset="-122"/>
-                <a:cs typeface="Inter" pitchFamily="34" charset="-120"/>
-              </a:rPr>
-              <a:t>Se acordó la mitad del comprador por teléfono. Al cierre, el colega dice que era la bolsa.</a:t>
-            </a:r>
-            <a:endParaRPr lang="en-US" sz="1000" dirty="0"/>
-          </a:p>
-        </p:txBody>
-      </p:sp>
-      <p:sp>
-        <p:nvSpPr>
-          <p:cNvPr id="18" name="Text 15"/>
-          <p:cNvSpPr/>
-          <p:nvPr/>
-        </p:nvSpPr>
-        <p:spPr>
-          <a:xfrm>
-            <a:off x="3593592" y="3200400"/>
-            <a:ext cx="2103120" cy="594360"/>
-          </a:xfrm>
-          <a:prstGeom prst="rect">
-            <a:avLst/>
-          </a:prstGeom>
-          <a:noFill/>
-          <a:ln/>
-        </p:spPr>
-        <p:txBody>
-          <a:bodyPr wrap="square" lIns="0" tIns="0" rIns="0" bIns="0" rtlCol="0" anchor="t"/>
-          <a:lstStyle/>
-          <a:p>
-            <a:pPr indent="0" marL="0">
-              <a:lnSpc>
-                <a:spcPts val="1300"/>
-              </a:lnSpc>
-              <a:buNone/>
-            </a:pPr>
-            <a:r>
-              <a:rPr lang="en-US" sz="1050" b="1" dirty="0">
-                <a:solidFill>
-                  <a:srgbClr val="E74B3C"/>
-                </a:solidFill>
-                <a:latin typeface="Inter" pitchFamily="34" charset="0"/>
-                <a:ea typeface="Inter" pitchFamily="34" charset="-122"/>
-                <a:cs typeface="Inter" pitchFamily="34" charset="-120"/>
-              </a:rPr>
-              <a:t>Se debió dejar escrito.</a:t>
-            </a:r>
-            <a:endParaRPr lang="en-US" sz="1050" dirty="0"/>
-          </a:p>
-        </p:txBody>
-      </p:sp>
-      <p:sp>
-        <p:nvSpPr>
-          <p:cNvPr id="19" name="Shape 16"/>
-          <p:cNvSpPr/>
-          <p:nvPr/>
-        </p:nvSpPr>
-        <p:spPr>
-          <a:xfrm>
-            <a:off x="6144768" y="1188720"/>
-            <a:ext cx="2542032" cy="2697480"/>
-          </a:xfrm>
-          <a:prstGeom prst="roundRect">
-            <a:avLst>
-              <a:gd name="adj" fmla="val 3237"/>
+              <a:gd name="adj" fmla="val 16071"/>
             </a:avLst>
           </a:prstGeom>
           <a:solidFill>
@@ -3626,199 +3619,88 @@
       </p:sp>
       <p:sp>
         <p:nvSpPr>
+          <p:cNvPr id="18" name="Text 15"/>
+          <p:cNvSpPr/>
+          <p:nvPr/>
+        </p:nvSpPr>
+        <p:spPr>
+          <a:xfrm>
+            <a:off x="822960" y="3483864"/>
+            <a:ext cx="7626096" cy="219456"/>
+          </a:xfrm>
+          <a:prstGeom prst="rect">
+            <a:avLst/>
+          </a:prstGeom>
+          <a:noFill/>
+          <a:ln/>
+        </p:spPr>
+        <p:txBody>
+          <a:bodyPr wrap="square" lIns="0" tIns="0" rIns="0" bIns="0" rtlCol="0" anchor="ctr"/>
+          <a:lstStyle/>
+          <a:p>
+            <a:pPr indent="0" marL="0">
+              <a:buNone/>
+            </a:pPr>
+            <a:r>
+              <a:rPr lang="en-US" sz="1150" b="1" dirty="0">
+                <a:solidFill>
+                  <a:srgbClr val="08407C"/>
+                </a:solidFill>
+                <a:latin typeface="Inter" pitchFamily="34" charset="0"/>
+                <a:ea typeface="Inter" pitchFamily="34" charset="-122"/>
+                <a:cs typeface="Inter" pitchFamily="34" charset="-120"/>
+              </a:rPr>
+              <a:t>Cuándo y cómo se paga</a:t>
+            </a:r>
+            <a:endParaRPr lang="en-US" sz="1150" dirty="0"/>
+          </a:p>
+        </p:txBody>
+      </p:sp>
+      <p:sp>
+        <p:nvSpPr>
+          <p:cNvPr id="19" name="Text 16"/>
+          <p:cNvSpPr/>
+          <p:nvPr/>
+        </p:nvSpPr>
+        <p:spPr>
+          <a:xfrm>
+            <a:off x="822960" y="3694176"/>
+            <a:ext cx="7626096" cy="256032"/>
+          </a:xfrm>
+          <a:prstGeom prst="rect">
+            <a:avLst/>
+          </a:prstGeom>
+          <a:noFill/>
+          <a:ln/>
+        </p:spPr>
+        <p:txBody>
+          <a:bodyPr wrap="square" lIns="0" tIns="0" rIns="0" bIns="0" rtlCol="0" anchor="ctr"/>
+          <a:lstStyle/>
+          <a:p>
+            <a:pPr indent="0" marL="0">
+              <a:lnSpc>
+                <a:spcPts val="1200"/>
+              </a:lnSpc>
+              <a:buNone/>
+            </a:pPr>
+            <a:r>
+              <a:rPr lang="en-US" sz="1000" dirty="0">
+                <a:solidFill>
+                  <a:srgbClr val="2E4258"/>
+                </a:solidFill>
+                <a:latin typeface="Inter" pitchFamily="34" charset="0"/>
+                <a:ea typeface="Inter" pitchFamily="34" charset="-122"/>
+                <a:cs typeface="Inter" pitchFamily="34" charset="-120"/>
+              </a:rPr>
+              <a:t>Lo define cada pareja de colegas; lo importante es que no quede abierto.</a:t>
+            </a:r>
+            <a:endParaRPr lang="en-US" sz="1000" dirty="0"/>
+          </a:p>
+        </p:txBody>
+      </p:sp>
+      <p:sp>
+        <p:nvSpPr>
           <p:cNvPr id="20" name="Shape 17"/>
-          <p:cNvSpPr/>
-          <p:nvPr/>
-        </p:nvSpPr>
-        <p:spPr>
-          <a:xfrm>
-            <a:off x="6144768" y="1188720"/>
-            <a:ext cx="2542032" cy="457200"/>
-          </a:xfrm>
-          <a:prstGeom prst="roundRect">
-            <a:avLst>
-              <a:gd name="adj" fmla="val 18000"/>
-            </a:avLst>
-          </a:prstGeom>
-          <a:solidFill>
-            <a:srgbClr val="08407C"/>
-          </a:solidFill>
-          <a:ln w="12700">
-            <a:solidFill>
-              <a:srgbClr val="08407C"/>
-            </a:solidFill>
-            <a:prstDash val="solid"/>
-          </a:ln>
-        </p:spPr>
-      </p:sp>
-      <p:sp>
-        <p:nvSpPr>
-          <p:cNvPr id="21" name="Text 18"/>
-          <p:cNvSpPr/>
-          <p:nvPr/>
-        </p:nvSpPr>
-        <p:spPr>
-          <a:xfrm>
-            <a:off x="6364224" y="1188720"/>
-            <a:ext cx="2103120" cy="457200"/>
-          </a:xfrm>
-          <a:prstGeom prst="rect">
-            <a:avLst/>
-          </a:prstGeom>
-          <a:noFill/>
-          <a:ln/>
-        </p:spPr>
-        <p:txBody>
-          <a:bodyPr wrap="square" lIns="0" tIns="0" rIns="0" bIns="0" rtlCol="0" anchor="ctr"/>
-          <a:lstStyle/>
-          <a:p>
-            <a:pPr indent="0" marL="0">
-              <a:buNone/>
-            </a:pPr>
-            <a:r>
-              <a:rPr lang="en-US" sz="1100" b="1" spc="120" kern="0" dirty="0">
-                <a:solidFill>
-                  <a:srgbClr val="FFFFFF"/>
-                </a:solidFill>
-                <a:latin typeface="Inter" pitchFamily="34" charset="0"/>
-                <a:ea typeface="Inter" pitchFamily="34" charset="-122"/>
-                <a:cs typeface="Inter" pitchFamily="34" charset="-120"/>
-              </a:rPr>
-              <a:t>CASO 3</a:t>
-            </a:r>
-            <a:endParaRPr lang="en-US" sz="1100" dirty="0"/>
-          </a:p>
-        </p:txBody>
-      </p:sp>
-      <p:sp>
-        <p:nvSpPr>
-          <p:cNvPr id="22" name="Text 19"/>
-          <p:cNvSpPr/>
-          <p:nvPr/>
-        </p:nvSpPr>
-        <p:spPr>
-          <a:xfrm>
-            <a:off x="6364224" y="1737360"/>
-            <a:ext cx="2103120" cy="457200"/>
-          </a:xfrm>
-          <a:prstGeom prst="rect">
-            <a:avLst/>
-          </a:prstGeom>
-          <a:noFill/>
-          <a:ln/>
-        </p:spPr>
-        <p:txBody>
-          <a:bodyPr wrap="square" lIns="0" tIns="0" rIns="0" bIns="0" rtlCol="0" anchor="t"/>
-          <a:lstStyle/>
-          <a:p>
-            <a:pPr indent="0" marL="0">
-              <a:lnSpc>
-                <a:spcPts val="1600"/>
-              </a:lnSpc>
-              <a:buNone/>
-            </a:pPr>
-            <a:r>
-              <a:rPr lang="en-US" sz="1300" b="1" dirty="0">
-                <a:solidFill>
-                  <a:srgbClr val="08407C"/>
-                </a:solidFill>
-                <a:latin typeface="Inter" pitchFamily="34" charset="0"/>
-                <a:ea typeface="Inter" pitchFamily="34" charset="-122"/>
-                <a:cs typeface="Inter" pitchFamily="34" charset="-120"/>
-              </a:rPr>
-              <a:t>Dos colegas, un comprador</a:t>
-            </a:r>
-            <a:endParaRPr lang="en-US" sz="1300" dirty="0"/>
-          </a:p>
-        </p:txBody>
-      </p:sp>
-      <p:sp>
-        <p:nvSpPr>
-          <p:cNvPr id="23" name="Text 20"/>
-          <p:cNvSpPr/>
-          <p:nvPr/>
-        </p:nvSpPr>
-        <p:spPr>
-          <a:xfrm>
-            <a:off x="6364224" y="2240280"/>
-            <a:ext cx="2103120" cy="914400"/>
-          </a:xfrm>
-          <a:prstGeom prst="rect">
-            <a:avLst/>
-          </a:prstGeom>
-          <a:noFill/>
-          <a:ln/>
-        </p:spPr>
-        <p:txBody>
-          <a:bodyPr wrap="square" lIns="0" tIns="0" rIns="0" bIns="0" rtlCol="0" anchor="t"/>
-          <a:lstStyle/>
-          <a:p>
-            <a:pPr indent="0" marL="0">
-              <a:lnSpc>
-                <a:spcPts val="1300"/>
-              </a:lnSpc>
-              <a:buNone/>
-            </a:pPr>
-            <a:r>
-              <a:rPr lang="en-US" sz="1000" dirty="0">
-                <a:solidFill>
-                  <a:srgbClr val="2E4258"/>
-                </a:solidFill>
-                <a:latin typeface="Inter" pitchFamily="34" charset="0"/>
-                <a:ea typeface="Inter" pitchFamily="34" charset="-122"/>
-                <a:cs typeface="Inter" pitchFamily="34" charset="-120"/>
-              </a:rPr>
-              <a:t>Dos colegas dicen haber traído al mismo comprador a la misma propiedad.</a:t>
-            </a:r>
-            <a:endParaRPr lang="en-US" sz="1000" dirty="0"/>
-          </a:p>
-        </p:txBody>
-      </p:sp>
-      <p:sp>
-        <p:nvSpPr>
-          <p:cNvPr id="24" name="Text 21"/>
-          <p:cNvSpPr/>
-          <p:nvPr/>
-        </p:nvSpPr>
-        <p:spPr>
-          <a:xfrm>
-            <a:off x="6364224" y="3200400"/>
-            <a:ext cx="2103120" cy="594360"/>
-          </a:xfrm>
-          <a:prstGeom prst="rect">
-            <a:avLst/>
-          </a:prstGeom>
-          <a:noFill/>
-          <a:ln/>
-        </p:spPr>
-        <p:txBody>
-          <a:bodyPr wrap="square" lIns="0" tIns="0" rIns="0" bIns="0" rtlCol="0" anchor="t"/>
-          <a:lstStyle/>
-          <a:p>
-            <a:pPr indent="0" marL="0">
-              <a:lnSpc>
-                <a:spcPts val="1300"/>
-              </a:lnSpc>
-              <a:buNone/>
-            </a:pPr>
-            <a:r>
-              <a:rPr lang="en-US" sz="1050" b="1" dirty="0">
-                <a:solidFill>
-                  <a:srgbClr val="E74B3C"/>
-                </a:solidFill>
-                <a:latin typeface="Inter" pitchFamily="34" charset="0"/>
-                <a:ea typeface="Inter" pitchFamily="34" charset="-122"/>
-                <a:cs typeface="Inter" pitchFamily="34" charset="-120"/>
-              </a:rPr>
-              <a:t>Lo que quedó escrito antes de la visita define quién cobra.</a:t>
-            </a:r>
-            <a:endParaRPr lang="en-US" sz="1050" dirty="0"/>
-          </a:p>
-        </p:txBody>
-      </p:sp>
-      <p:sp>
-        <p:nvSpPr>
-          <p:cNvPr id="25" name="Shape 22"/>
           <p:cNvSpPr/>
           <p:nvPr/>
         </p:nvSpPr>
@@ -3833,11 +3715,11 @@
             </a:avLst>
           </a:prstGeom>
           <a:solidFill>
-            <a:srgbClr val="08407C"/>
+            <a:srgbClr val="4E586E"/>
           </a:solidFill>
           <a:ln w="12700">
             <a:solidFill>
-              <a:srgbClr val="08407C"/>
+              <a:srgbClr val="4E586E"/>
             </a:solidFill>
             <a:prstDash val="solid"/>
           </a:ln>
@@ -3845,7 +3727,7 @@
       </p:sp>
       <p:sp>
         <p:nvSpPr>
-          <p:cNvPr id="26" name="Text 23"/>
+          <p:cNvPr id="21" name="Text 18"/>
           <p:cNvSpPr/>
           <p:nvPr/>
         </p:nvSpPr>
@@ -3876,7 +3758,7 @@
                 <a:ea typeface="Inter" pitchFamily="34" charset="-122"/>
                 <a:cs typeface="Inter" pitchFamily="34" charset="-120"/>
               </a:rPr>
-              <a:t>PATRÓN</a:t>
+              <a:t>REGLA</a:t>
             </a:r>
             <a:endParaRPr lang="en-US" sz="900" dirty="0"/>
           </a:p>
@@ -3884,7 +3766,7 @@
       </p:sp>
       <p:sp>
         <p:nvSpPr>
-          <p:cNvPr id="27" name="Text 24"/>
+          <p:cNvPr id="22" name="Text 19"/>
           <p:cNvSpPr/>
           <p:nvPr/>
         </p:nvSpPr>
@@ -3918,7 +3800,7 @@
                 <a:ea typeface="Inter" pitchFamily="34" charset="-122"/>
                 <a:cs typeface="Inter" pitchFamily="34" charset="-120"/>
               </a:rPr>
-              <a:t>En los tres casos el conflicto se evitaba con una pregunta y una línea escrita.</a:t>
+              <a:t>Si algo del acuerdo se puede interpretar de dos maneras, se escribe de una sola.</a:t>
             </a:r>
             <a:endParaRPr lang="en-US" sz="1100" dirty="0"/>
           </a:p>
@@ -4070,7 +3952,7 @@
                 <a:ea typeface="Inter" pitchFamily="34" charset="-122"/>
                 <a:cs typeface="Inter" pitchFamily="34" charset="-120"/>
               </a:rPr>
-              <a:t>Taller: sus casos</a:t>
+              <a:t>Tres casos para pensar</a:t>
             </a:r>
             <a:endParaRPr lang="en-US" sz="2600" dirty="0"/>
           </a:p>
@@ -4109,7 +3991,7 @@
                 <a:ea typeface="Inter" pitchFamily="34" charset="-122"/>
                 <a:cs typeface="Inter" pitchFamily="34" charset="-120"/>
               </a:rPr>
-              <a:t>Cada uno cuenta una operación con un colega, sin nombres.</a:t>
+              <a:t>Hipotéticos. En el taller los reemplazamos por los del equipo.</a:t>
             </a:r>
             <a:endParaRPr lang="en-US" sz="1200" dirty="0"/>
           </a:p>
@@ -4124,11 +4006,11 @@
         <p:spPr>
           <a:xfrm>
             <a:off x="603504" y="1188720"/>
-            <a:ext cx="8083296" cy="585216"/>
+            <a:ext cx="2542032" cy="2697480"/>
           </a:xfrm>
           <a:prstGeom prst="roundRect">
             <a:avLst>
-              <a:gd name="adj" fmla="val 14063"/>
+              <a:gd name="adj" fmla="val 3237"/>
             </a:avLst>
           </a:prstGeom>
           <a:solidFill>
@@ -4144,180 +4026,210 @@
       </p:sp>
       <p:sp>
         <p:nvSpPr>
-          <p:cNvPr id="8" name="Text 5"/>
-          <p:cNvSpPr/>
-          <p:nvPr/>
-        </p:nvSpPr>
-        <p:spPr>
-          <a:xfrm>
-            <a:off x="822960" y="1216152"/>
-            <a:ext cx="7626096" cy="219456"/>
-          </a:xfrm>
-          <a:prstGeom prst="rect">
-            <a:avLst/>
-          </a:prstGeom>
-          <a:noFill/>
-          <a:ln/>
-        </p:spPr>
-        <p:txBody>
-          <a:bodyPr wrap="square" lIns="0" tIns="0" rIns="0" bIns="0" rtlCol="0" anchor="ctr"/>
-          <a:lstStyle/>
-          <a:p>
-            <a:pPr indent="0" marL="0">
-              <a:buNone/>
-            </a:pPr>
-            <a:r>
-              <a:rPr lang="en-US" sz="1150" b="1" dirty="0">
-                <a:solidFill>
-                  <a:srgbClr val="08407C"/>
-                </a:solidFill>
-                <a:latin typeface="Inter" pitchFamily="34" charset="0"/>
-                <a:ea typeface="Inter" pitchFamily="34" charset="-122"/>
-                <a:cs typeface="Inter" pitchFamily="34" charset="-120"/>
-              </a:rPr>
-              <a:t>¿Qué esquema se usó?</a:t>
-            </a:r>
-            <a:endParaRPr lang="en-US" sz="1150" dirty="0"/>
-          </a:p>
-        </p:txBody>
-      </p:sp>
-      <p:sp>
-        <p:nvSpPr>
-          <p:cNvPr id="9" name="Text 6"/>
-          <p:cNvSpPr/>
-          <p:nvPr/>
-        </p:nvSpPr>
-        <p:spPr>
-          <a:xfrm>
-            <a:off x="822960" y="1426464"/>
-            <a:ext cx="7626096" cy="329184"/>
-          </a:xfrm>
-          <a:prstGeom prst="rect">
-            <a:avLst/>
-          </a:prstGeom>
-          <a:noFill/>
-          <a:ln/>
-        </p:spPr>
-        <p:txBody>
-          <a:bodyPr wrap="square" lIns="0" tIns="0" rIns="0" bIns="0" rtlCol="0" anchor="ctr"/>
-          <a:lstStyle/>
-          <a:p>
-            <a:pPr indent="0" marL="0">
-              <a:lnSpc>
-                <a:spcPts val="1200"/>
-              </a:lnSpc>
-              <a:buNone/>
-            </a:pPr>
-            <a:r>
-              <a:rPr lang="en-US" sz="1000" dirty="0">
-                <a:solidFill>
-                  <a:srgbClr val="2E4258"/>
-                </a:solidFill>
-                <a:latin typeface="Inter" pitchFamily="34" charset="0"/>
-                <a:ea typeface="Inter" pitchFamily="34" charset="-122"/>
-                <a:cs typeface="Inter" pitchFamily="34" charset="-120"/>
-              </a:rPr>
-              <a:t>Bolsa 50 y 50, mitad del comprador, porcentaje fijo o ninguno definido.</a:t>
-            </a:r>
-            <a:endParaRPr lang="en-US" sz="1000" dirty="0"/>
-          </a:p>
-        </p:txBody>
-      </p:sp>
-      <p:sp>
-        <p:nvSpPr>
-          <p:cNvPr id="10" name="Text 7"/>
-          <p:cNvSpPr/>
-          <p:nvPr/>
-        </p:nvSpPr>
-        <p:spPr>
-          <a:xfrm>
-            <a:off x="822960" y="1856232"/>
-            <a:ext cx="7626096" cy="219456"/>
-          </a:xfrm>
-          <a:prstGeom prst="rect">
-            <a:avLst/>
-          </a:prstGeom>
-          <a:noFill/>
-          <a:ln/>
-        </p:spPr>
-        <p:txBody>
-          <a:bodyPr wrap="square" lIns="0" tIns="0" rIns="0" bIns="0" rtlCol="0" anchor="ctr"/>
-          <a:lstStyle/>
-          <a:p>
-            <a:pPr indent="0" marL="0">
-              <a:buNone/>
-            </a:pPr>
-            <a:r>
-              <a:rPr lang="en-US" sz="1150" b="1" dirty="0">
-                <a:solidFill>
-                  <a:srgbClr val="08407C"/>
-                </a:solidFill>
-                <a:latin typeface="Inter" pitchFamily="34" charset="0"/>
-                <a:ea typeface="Inter" pitchFamily="34" charset="-122"/>
-                <a:cs typeface="Inter" pitchFamily="34" charset="-120"/>
-              </a:rPr>
-              <a:t>¿Qué quedó por escrito?</a:t>
-            </a:r>
-            <a:endParaRPr lang="en-US" sz="1150" dirty="0"/>
-          </a:p>
-        </p:txBody>
-      </p:sp>
-      <p:sp>
-        <p:nvSpPr>
-          <p:cNvPr id="11" name="Text 8"/>
-          <p:cNvSpPr/>
-          <p:nvPr/>
-        </p:nvSpPr>
-        <p:spPr>
-          <a:xfrm>
-            <a:off x="822960" y="2066544"/>
-            <a:ext cx="7626096" cy="329184"/>
-          </a:xfrm>
-          <a:prstGeom prst="rect">
-            <a:avLst/>
-          </a:prstGeom>
-          <a:noFill/>
-          <a:ln/>
-        </p:spPr>
-        <p:txBody>
-          <a:bodyPr wrap="square" lIns="0" tIns="0" rIns="0" bIns="0" rtlCol="0" anchor="ctr"/>
-          <a:lstStyle/>
-          <a:p>
-            <a:pPr indent="0" marL="0">
-              <a:lnSpc>
-                <a:spcPts val="1200"/>
-              </a:lnSpc>
-              <a:buNone/>
-            </a:pPr>
-            <a:r>
-              <a:rPr lang="en-US" sz="1000" dirty="0">
-                <a:solidFill>
-                  <a:srgbClr val="2E4258"/>
-                </a:solidFill>
-                <a:latin typeface="Inter" pitchFamily="34" charset="0"/>
-                <a:ea typeface="Inter" pitchFamily="34" charset="-122"/>
-                <a:cs typeface="Inter" pitchFamily="34" charset="-120"/>
-              </a:rPr>
-              <a:t>Reserva, convenio, mensaje o nada.</a:t>
-            </a:r>
-            <a:endParaRPr lang="en-US" sz="1000" dirty="0"/>
-          </a:p>
-        </p:txBody>
-      </p:sp>
-      <p:sp>
-        <p:nvSpPr>
-          <p:cNvPr id="12" name="Shape 9"/>
-          <p:cNvSpPr/>
-          <p:nvPr/>
-        </p:nvSpPr>
-        <p:spPr>
-          <a:xfrm>
-            <a:off x="603504" y="2468880"/>
-            <a:ext cx="8083296" cy="585216"/>
+          <p:cNvPr id="8" name="Shape 5"/>
+          <p:cNvSpPr/>
+          <p:nvPr/>
+        </p:nvSpPr>
+        <p:spPr>
+          <a:xfrm>
+            <a:off x="603504" y="1188720"/>
+            <a:ext cx="2542032" cy="457200"/>
           </a:xfrm>
           <a:prstGeom prst="roundRect">
             <a:avLst>
-              <a:gd name="adj" fmla="val 14063"/>
+              <a:gd name="adj" fmla="val 18000"/>
+            </a:avLst>
+          </a:prstGeom>
+          <a:solidFill>
+            <a:srgbClr val="08407C"/>
+          </a:solidFill>
+          <a:ln w="12700">
+            <a:solidFill>
+              <a:srgbClr val="08407C"/>
+            </a:solidFill>
+            <a:prstDash val="solid"/>
+          </a:ln>
+        </p:spPr>
+      </p:sp>
+      <p:sp>
+        <p:nvSpPr>
+          <p:cNvPr id="9" name="Text 6"/>
+          <p:cNvSpPr/>
+          <p:nvPr/>
+        </p:nvSpPr>
+        <p:spPr>
+          <a:xfrm>
+            <a:off x="822960" y="1188720"/>
+            <a:ext cx="2103120" cy="457200"/>
+          </a:xfrm>
+          <a:prstGeom prst="rect">
+            <a:avLst/>
+          </a:prstGeom>
+          <a:noFill/>
+          <a:ln/>
+        </p:spPr>
+        <p:txBody>
+          <a:bodyPr wrap="square" lIns="0" tIns="0" rIns="0" bIns="0" rtlCol="0" anchor="ctr"/>
+          <a:lstStyle/>
+          <a:p>
+            <a:pPr indent="0" marL="0">
+              <a:buNone/>
+            </a:pPr>
+            <a:r>
+              <a:rPr lang="en-US" sz="1100" b="1" spc="120" kern="0" dirty="0">
+                <a:solidFill>
+                  <a:srgbClr val="FFFFFF"/>
+                </a:solidFill>
+                <a:latin typeface="Inter" pitchFamily="34" charset="0"/>
+                <a:ea typeface="Inter" pitchFamily="34" charset="-122"/>
+                <a:cs typeface="Inter" pitchFamily="34" charset="-120"/>
+              </a:rPr>
+              <a:t>CASO 1</a:t>
+            </a:r>
+            <a:endParaRPr lang="en-US" sz="1100" dirty="0"/>
+          </a:p>
+        </p:txBody>
+      </p:sp>
+      <p:sp>
+        <p:nvSpPr>
+          <p:cNvPr id="10" name="Text 7"/>
+          <p:cNvSpPr/>
+          <p:nvPr/>
+        </p:nvSpPr>
+        <p:spPr>
+          <a:xfrm>
+            <a:off x="822960" y="1737360"/>
+            <a:ext cx="2103120" cy="457200"/>
+          </a:xfrm>
+          <a:prstGeom prst="rect">
+            <a:avLst/>
+          </a:prstGeom>
+          <a:noFill/>
+          <a:ln/>
+        </p:spPr>
+        <p:txBody>
+          <a:bodyPr wrap="square" lIns="0" tIns="0" rIns="0" bIns="0" rtlCol="0" anchor="t"/>
+          <a:lstStyle/>
+          <a:p>
+            <a:pPr indent="0" marL="0">
+              <a:lnSpc>
+                <a:spcPts val="1600"/>
+              </a:lnSpc>
+              <a:buNone/>
+            </a:pPr>
+            <a:r>
+              <a:rPr lang="en-US" sz="1300" b="1" dirty="0">
+                <a:solidFill>
+                  <a:srgbClr val="08407C"/>
+                </a:solidFill>
+                <a:latin typeface="Inter" pitchFamily="34" charset="0"/>
+                <a:ea typeface="Inter" pitchFamily="34" charset="-122"/>
+                <a:cs typeface="Inter" pitchFamily="34" charset="-120"/>
+              </a:rPr>
+              <a:t>El dato sin acuerdo</a:t>
+            </a:r>
+            <a:endParaRPr lang="en-US" sz="1300" dirty="0"/>
+          </a:p>
+        </p:txBody>
+      </p:sp>
+      <p:sp>
+        <p:nvSpPr>
+          <p:cNvPr id="11" name="Text 8"/>
+          <p:cNvSpPr/>
+          <p:nvPr/>
+        </p:nvSpPr>
+        <p:spPr>
+          <a:xfrm>
+            <a:off x="822960" y="2240280"/>
+            <a:ext cx="2103120" cy="914400"/>
+          </a:xfrm>
+          <a:prstGeom prst="rect">
+            <a:avLst/>
+          </a:prstGeom>
+          <a:noFill/>
+          <a:ln/>
+        </p:spPr>
+        <p:txBody>
+          <a:bodyPr wrap="square" lIns="0" tIns="0" rIns="0" bIns="0" rtlCol="0" anchor="t"/>
+          <a:lstStyle/>
+          <a:p>
+            <a:pPr indent="0" marL="0">
+              <a:lnSpc>
+                <a:spcPts val="1300"/>
+              </a:lnSpc>
+              <a:buNone/>
+            </a:pPr>
+            <a:r>
+              <a:rPr lang="en-US" sz="1000" dirty="0">
+                <a:solidFill>
+                  <a:srgbClr val="2E4258"/>
+                </a:solidFill>
+                <a:latin typeface="Inter" pitchFamily="34" charset="0"/>
+                <a:ea typeface="Inter" pitchFamily="34" charset="-122"/>
+                <a:cs typeface="Inter" pitchFamily="34" charset="-120"/>
+              </a:rPr>
+              <a:t>Un colega pasa los datos de una propiedad y, después de la visita, el comprador quiere ofertar. Nadie habló de honorarios.</a:t>
+            </a:r>
+            <a:endParaRPr lang="en-US" sz="1000" dirty="0"/>
+          </a:p>
+        </p:txBody>
+      </p:sp>
+      <p:sp>
+        <p:nvSpPr>
+          <p:cNvPr id="12" name="Text 9"/>
+          <p:cNvSpPr/>
+          <p:nvPr/>
+        </p:nvSpPr>
+        <p:spPr>
+          <a:xfrm>
+            <a:off x="822960" y="3200400"/>
+            <a:ext cx="2103120" cy="594360"/>
+          </a:xfrm>
+          <a:prstGeom prst="rect">
+            <a:avLst/>
+          </a:prstGeom>
+          <a:noFill/>
+          <a:ln/>
+        </p:spPr>
+        <p:txBody>
+          <a:bodyPr wrap="square" lIns="0" tIns="0" rIns="0" bIns="0" rtlCol="0" anchor="t"/>
+          <a:lstStyle/>
+          <a:p>
+            <a:pPr indent="0" marL="0">
+              <a:lnSpc>
+                <a:spcPts val="1300"/>
+              </a:lnSpc>
+              <a:buNone/>
+            </a:pPr>
+            <a:r>
+              <a:rPr lang="en-US" sz="1050" b="1" dirty="0">
+                <a:solidFill>
+                  <a:srgbClr val="E74B3C"/>
+                </a:solidFill>
+                <a:latin typeface="Inter" pitchFamily="34" charset="0"/>
+                <a:ea typeface="Inter" pitchFamily="34" charset="-122"/>
+                <a:cs typeface="Inter" pitchFamily="34" charset="-120"/>
+              </a:rPr>
+              <a:t>Se debió preguntar primero.</a:t>
+            </a:r>
+            <a:endParaRPr lang="en-US" sz="1050" dirty="0"/>
+          </a:p>
+        </p:txBody>
+      </p:sp>
+      <p:sp>
+        <p:nvSpPr>
+          <p:cNvPr id="13" name="Shape 10"/>
+          <p:cNvSpPr/>
+          <p:nvPr/>
+        </p:nvSpPr>
+        <p:spPr>
+          <a:xfrm>
+            <a:off x="3374136" y="1188720"/>
+            <a:ext cx="2542032" cy="2697480"/>
+          </a:xfrm>
+          <a:prstGeom prst="roundRect">
+            <a:avLst>
+              <a:gd name="adj" fmla="val 3237"/>
             </a:avLst>
           </a:prstGeom>
           <a:solidFill>
@@ -4333,30 +4245,99 @@
       </p:sp>
       <p:sp>
         <p:nvSpPr>
-          <p:cNvPr id="13" name="Text 10"/>
-          <p:cNvSpPr/>
-          <p:nvPr/>
-        </p:nvSpPr>
-        <p:spPr>
-          <a:xfrm>
-            <a:off x="822960" y="2496312"/>
-            <a:ext cx="7626096" cy="219456"/>
-          </a:xfrm>
-          <a:prstGeom prst="rect">
-            <a:avLst/>
-          </a:prstGeom>
-          <a:noFill/>
-          <a:ln/>
-        </p:spPr>
-        <p:txBody>
-          <a:bodyPr wrap="square" lIns="0" tIns="0" rIns="0" bIns="0" rtlCol="0" anchor="ctr"/>
-          <a:lstStyle/>
-          <a:p>
-            <a:pPr indent="0" marL="0">
-              <a:buNone/>
-            </a:pPr>
-            <a:r>
-              <a:rPr lang="en-US" sz="1150" b="1" dirty="0">
+          <p:cNvPr id="14" name="Shape 11"/>
+          <p:cNvSpPr/>
+          <p:nvPr/>
+        </p:nvSpPr>
+        <p:spPr>
+          <a:xfrm>
+            <a:off x="3374136" y="1188720"/>
+            <a:ext cx="2542032" cy="457200"/>
+          </a:xfrm>
+          <a:prstGeom prst="roundRect">
+            <a:avLst>
+              <a:gd name="adj" fmla="val 18000"/>
+            </a:avLst>
+          </a:prstGeom>
+          <a:solidFill>
+            <a:srgbClr val="7C8594"/>
+          </a:solidFill>
+          <a:ln w="12700">
+            <a:solidFill>
+              <a:srgbClr val="7C8594"/>
+            </a:solidFill>
+            <a:prstDash val="solid"/>
+          </a:ln>
+        </p:spPr>
+      </p:sp>
+      <p:sp>
+        <p:nvSpPr>
+          <p:cNvPr id="15" name="Text 12"/>
+          <p:cNvSpPr/>
+          <p:nvPr/>
+        </p:nvSpPr>
+        <p:spPr>
+          <a:xfrm>
+            <a:off x="3593592" y="1188720"/>
+            <a:ext cx="2103120" cy="457200"/>
+          </a:xfrm>
+          <a:prstGeom prst="rect">
+            <a:avLst/>
+          </a:prstGeom>
+          <a:noFill/>
+          <a:ln/>
+        </p:spPr>
+        <p:txBody>
+          <a:bodyPr wrap="square" lIns="0" tIns="0" rIns="0" bIns="0" rtlCol="0" anchor="ctr"/>
+          <a:lstStyle/>
+          <a:p>
+            <a:pPr indent="0" marL="0">
+              <a:buNone/>
+            </a:pPr>
+            <a:r>
+              <a:rPr lang="en-US" sz="1100" b="1" spc="120" kern="0" dirty="0">
+                <a:solidFill>
+                  <a:srgbClr val="FFFFFF"/>
+                </a:solidFill>
+                <a:latin typeface="Inter" pitchFamily="34" charset="0"/>
+                <a:ea typeface="Inter" pitchFamily="34" charset="-122"/>
+                <a:cs typeface="Inter" pitchFamily="34" charset="-120"/>
+              </a:rPr>
+              <a:t>CASO 2</a:t>
+            </a:r>
+            <a:endParaRPr lang="en-US" sz="1100" dirty="0"/>
+          </a:p>
+        </p:txBody>
+      </p:sp>
+      <p:sp>
+        <p:nvSpPr>
+          <p:cNvPr id="16" name="Text 13"/>
+          <p:cNvSpPr/>
+          <p:nvPr/>
+        </p:nvSpPr>
+        <p:spPr>
+          <a:xfrm>
+            <a:off x="3593592" y="1737360"/>
+            <a:ext cx="2103120" cy="457200"/>
+          </a:xfrm>
+          <a:prstGeom prst="rect">
+            <a:avLst/>
+          </a:prstGeom>
+          <a:noFill/>
+          <a:ln/>
+        </p:spPr>
+        <p:txBody>
+          <a:bodyPr wrap="square" lIns="0" tIns="0" rIns="0" bIns="0" rtlCol="0" anchor="t"/>
+          <a:lstStyle/>
+          <a:p>
+            <a:pPr indent="0" marL="0">
+              <a:lnSpc>
+                <a:spcPts val="1600"/>
+              </a:lnSpc>
+              <a:buNone/>
+            </a:pPr>
+            <a:r>
+              <a:rPr lang="en-US" sz="1300" b="1" dirty="0">
                 <a:solidFill>
                   <a:srgbClr val="08407C"/>
                 </a:solidFill>
@@ -4364,36 +4345,36 @@
                 <a:ea typeface="Inter" pitchFamily="34" charset="-122"/>
                 <a:cs typeface="Inter" pitchFamily="34" charset="-120"/>
               </a:rPr>
-              <a:t>¿Hubo un malentendido?</a:t>
-            </a:r>
-            <a:endParaRPr lang="en-US" sz="1150" dirty="0"/>
-          </a:p>
-        </p:txBody>
-      </p:sp>
-      <p:sp>
-        <p:nvSpPr>
-          <p:cNvPr id="14" name="Text 11"/>
-          <p:cNvSpPr/>
-          <p:nvPr/>
-        </p:nvSpPr>
-        <p:spPr>
-          <a:xfrm>
-            <a:off x="822960" y="2706624"/>
-            <a:ext cx="7626096" cy="329184"/>
-          </a:xfrm>
-          <a:prstGeom prst="rect">
-            <a:avLst/>
-          </a:prstGeom>
-          <a:noFill/>
-          <a:ln/>
-        </p:spPr>
-        <p:txBody>
-          <a:bodyPr wrap="square" lIns="0" tIns="0" rIns="0" bIns="0" rtlCol="0" anchor="ctr"/>
+              <a:t>El acuerdo de palabra</a:t>
+            </a:r>
+            <a:endParaRPr lang="en-US" sz="1300" dirty="0"/>
+          </a:p>
+        </p:txBody>
+      </p:sp>
+      <p:sp>
+        <p:nvSpPr>
+          <p:cNvPr id="17" name="Text 14"/>
+          <p:cNvSpPr/>
+          <p:nvPr/>
+        </p:nvSpPr>
+        <p:spPr>
+          <a:xfrm>
+            <a:off x="3593592" y="2240280"/>
+            <a:ext cx="2103120" cy="914400"/>
+          </a:xfrm>
+          <a:prstGeom prst="rect">
+            <a:avLst/>
+          </a:prstGeom>
+          <a:noFill/>
+          <a:ln/>
+        </p:spPr>
+        <p:txBody>
+          <a:bodyPr wrap="square" lIns="0" tIns="0" rIns="0" bIns="0" rtlCol="0" anchor="t"/>
           <a:lstStyle/>
           <a:p>
             <a:pPr indent="0" marL="0">
               <a:lnSpc>
-                <a:spcPts val="1200"/>
+                <a:spcPts val="1300"/>
               </a:lnSpc>
               <a:buNone/>
             </a:pPr>
@@ -4406,7 +4387,7 @@
                 <a:ea typeface="Inter" pitchFamily="34" charset="-122"/>
                 <a:cs typeface="Inter" pitchFamily="34" charset="-120"/>
               </a:rPr>
-              <a:t>Qué se entendió distinto y en qué momento apareció.</a:t>
+              <a:t>Se acordó la mitad del comprador por teléfono. Al cierre, el colega dice que era la bolsa.</a:t>
             </a:r>
             <a:endParaRPr lang="en-US" sz="1000" dirty="0"/>
           </a:p>
@@ -4414,30 +4395,168 @@
       </p:sp>
       <p:sp>
         <p:nvSpPr>
-          <p:cNvPr id="15" name="Text 12"/>
-          <p:cNvSpPr/>
-          <p:nvPr/>
-        </p:nvSpPr>
-        <p:spPr>
-          <a:xfrm>
-            <a:off x="822960" y="3136392"/>
-            <a:ext cx="7626096" cy="219456"/>
-          </a:xfrm>
-          <a:prstGeom prst="rect">
-            <a:avLst/>
-          </a:prstGeom>
-          <a:noFill/>
-          <a:ln/>
-        </p:spPr>
-        <p:txBody>
-          <a:bodyPr wrap="square" lIns="0" tIns="0" rIns="0" bIns="0" rtlCol="0" anchor="ctr"/>
-          <a:lstStyle/>
-          <a:p>
-            <a:pPr indent="0" marL="0">
-              <a:buNone/>
-            </a:pPr>
-            <a:r>
-              <a:rPr lang="en-US" sz="1150" b="1" dirty="0">
+          <p:cNvPr id="18" name="Text 15"/>
+          <p:cNvSpPr/>
+          <p:nvPr/>
+        </p:nvSpPr>
+        <p:spPr>
+          <a:xfrm>
+            <a:off x="3593592" y="3200400"/>
+            <a:ext cx="2103120" cy="594360"/>
+          </a:xfrm>
+          <a:prstGeom prst="rect">
+            <a:avLst/>
+          </a:prstGeom>
+          <a:noFill/>
+          <a:ln/>
+        </p:spPr>
+        <p:txBody>
+          <a:bodyPr wrap="square" lIns="0" tIns="0" rIns="0" bIns="0" rtlCol="0" anchor="t"/>
+          <a:lstStyle/>
+          <a:p>
+            <a:pPr indent="0" marL="0">
+              <a:lnSpc>
+                <a:spcPts val="1300"/>
+              </a:lnSpc>
+              <a:buNone/>
+            </a:pPr>
+            <a:r>
+              <a:rPr lang="en-US" sz="1050" b="1" dirty="0">
+                <a:solidFill>
+                  <a:srgbClr val="E74B3C"/>
+                </a:solidFill>
+                <a:latin typeface="Inter" pitchFamily="34" charset="0"/>
+                <a:ea typeface="Inter" pitchFamily="34" charset="-122"/>
+                <a:cs typeface="Inter" pitchFamily="34" charset="-120"/>
+              </a:rPr>
+              <a:t>Se debió dejar escrito.</a:t>
+            </a:r>
+            <a:endParaRPr lang="en-US" sz="1050" dirty="0"/>
+          </a:p>
+        </p:txBody>
+      </p:sp>
+      <p:sp>
+        <p:nvSpPr>
+          <p:cNvPr id="19" name="Shape 16"/>
+          <p:cNvSpPr/>
+          <p:nvPr/>
+        </p:nvSpPr>
+        <p:spPr>
+          <a:xfrm>
+            <a:off x="6144768" y="1188720"/>
+            <a:ext cx="2542032" cy="2697480"/>
+          </a:xfrm>
+          <a:prstGeom prst="roundRect">
+            <a:avLst>
+              <a:gd name="adj" fmla="val 3237"/>
+            </a:avLst>
+          </a:prstGeom>
+          <a:solidFill>
+            <a:srgbClr val="F3F3F3"/>
+          </a:solidFill>
+          <a:ln w="12700">
+            <a:solidFill>
+              <a:srgbClr val="F3F3F3"/>
+            </a:solidFill>
+            <a:prstDash val="solid"/>
+          </a:ln>
+        </p:spPr>
+      </p:sp>
+      <p:sp>
+        <p:nvSpPr>
+          <p:cNvPr id="20" name="Shape 17"/>
+          <p:cNvSpPr/>
+          <p:nvPr/>
+        </p:nvSpPr>
+        <p:spPr>
+          <a:xfrm>
+            <a:off x="6144768" y="1188720"/>
+            <a:ext cx="2542032" cy="457200"/>
+          </a:xfrm>
+          <a:prstGeom prst="roundRect">
+            <a:avLst>
+              <a:gd name="adj" fmla="val 18000"/>
+            </a:avLst>
+          </a:prstGeom>
+          <a:solidFill>
+            <a:srgbClr val="08407C"/>
+          </a:solidFill>
+          <a:ln w="12700">
+            <a:solidFill>
+              <a:srgbClr val="08407C"/>
+            </a:solidFill>
+            <a:prstDash val="solid"/>
+          </a:ln>
+        </p:spPr>
+      </p:sp>
+      <p:sp>
+        <p:nvSpPr>
+          <p:cNvPr id="21" name="Text 18"/>
+          <p:cNvSpPr/>
+          <p:nvPr/>
+        </p:nvSpPr>
+        <p:spPr>
+          <a:xfrm>
+            <a:off x="6364224" y="1188720"/>
+            <a:ext cx="2103120" cy="457200"/>
+          </a:xfrm>
+          <a:prstGeom prst="rect">
+            <a:avLst/>
+          </a:prstGeom>
+          <a:noFill/>
+          <a:ln/>
+        </p:spPr>
+        <p:txBody>
+          <a:bodyPr wrap="square" lIns="0" tIns="0" rIns="0" bIns="0" rtlCol="0" anchor="ctr"/>
+          <a:lstStyle/>
+          <a:p>
+            <a:pPr indent="0" marL="0">
+              <a:buNone/>
+            </a:pPr>
+            <a:r>
+              <a:rPr lang="en-US" sz="1100" b="1" spc="120" kern="0" dirty="0">
+                <a:solidFill>
+                  <a:srgbClr val="FFFFFF"/>
+                </a:solidFill>
+                <a:latin typeface="Inter" pitchFamily="34" charset="0"/>
+                <a:ea typeface="Inter" pitchFamily="34" charset="-122"/>
+                <a:cs typeface="Inter" pitchFamily="34" charset="-120"/>
+              </a:rPr>
+              <a:t>CASO 3</a:t>
+            </a:r>
+            <a:endParaRPr lang="en-US" sz="1100" dirty="0"/>
+          </a:p>
+        </p:txBody>
+      </p:sp>
+      <p:sp>
+        <p:nvSpPr>
+          <p:cNvPr id="22" name="Text 19"/>
+          <p:cNvSpPr/>
+          <p:nvPr/>
+        </p:nvSpPr>
+        <p:spPr>
+          <a:xfrm>
+            <a:off x="6364224" y="1737360"/>
+            <a:ext cx="2103120" cy="457200"/>
+          </a:xfrm>
+          <a:prstGeom prst="rect">
+            <a:avLst/>
+          </a:prstGeom>
+          <a:noFill/>
+          <a:ln/>
+        </p:spPr>
+        <p:txBody>
+          <a:bodyPr wrap="square" lIns="0" tIns="0" rIns="0" bIns="0" rtlCol="0" anchor="t"/>
+          <a:lstStyle/>
+          <a:p>
+            <a:pPr indent="0" marL="0">
+              <a:lnSpc>
+                <a:spcPts val="1600"/>
+              </a:lnSpc>
+              <a:buNone/>
+            </a:pPr>
+            <a:r>
+              <a:rPr lang="en-US" sz="1300" b="1" dirty="0">
                 <a:solidFill>
                   <a:srgbClr val="08407C"/>
                 </a:solidFill>
@@ -4445,36 +4564,36 @@
                 <a:ea typeface="Inter" pitchFamily="34" charset="-122"/>
                 <a:cs typeface="Inter" pitchFamily="34" charset="-120"/>
               </a:rPr>
-              <a:t>¿Qué lo habría evitado?</a:t>
-            </a:r>
-            <a:endParaRPr lang="en-US" sz="1150" dirty="0"/>
-          </a:p>
-        </p:txBody>
-      </p:sp>
-      <p:sp>
-        <p:nvSpPr>
-          <p:cNvPr id="16" name="Text 13"/>
-          <p:cNvSpPr/>
-          <p:nvPr/>
-        </p:nvSpPr>
-        <p:spPr>
-          <a:xfrm>
-            <a:off x="822960" y="3346704"/>
-            <a:ext cx="7626096" cy="329184"/>
-          </a:xfrm>
-          <a:prstGeom prst="rect">
-            <a:avLst/>
-          </a:prstGeom>
-          <a:noFill/>
-          <a:ln/>
-        </p:spPr>
-        <p:txBody>
-          <a:bodyPr wrap="square" lIns="0" tIns="0" rIns="0" bIns="0" rtlCol="0" anchor="ctr"/>
+              <a:t>Dos colegas, un comprador</a:t>
+            </a:r>
+            <a:endParaRPr lang="en-US" sz="1300" dirty="0"/>
+          </a:p>
+        </p:txBody>
+      </p:sp>
+      <p:sp>
+        <p:nvSpPr>
+          <p:cNvPr id="23" name="Text 20"/>
+          <p:cNvSpPr/>
+          <p:nvPr/>
+        </p:nvSpPr>
+        <p:spPr>
+          <a:xfrm>
+            <a:off x="6364224" y="2240280"/>
+            <a:ext cx="2103120" cy="914400"/>
+          </a:xfrm>
+          <a:prstGeom prst="rect">
+            <a:avLst/>
+          </a:prstGeom>
+          <a:noFill/>
+          <a:ln/>
+        </p:spPr>
+        <p:txBody>
+          <a:bodyPr wrap="square" lIns="0" tIns="0" rIns="0" bIns="0" rtlCol="0" anchor="t"/>
           <a:lstStyle/>
           <a:p>
             <a:pPr indent="0" marL="0">
               <a:lnSpc>
-                <a:spcPts val="1200"/>
+                <a:spcPts val="1300"/>
               </a:lnSpc>
               <a:buNone/>
             </a:pPr>
@@ -4487,7 +4606,7 @@
                 <a:ea typeface="Inter" pitchFamily="34" charset="-122"/>
                 <a:cs typeface="Inter" pitchFamily="34" charset="-120"/>
               </a:rPr>
-              <a:t>Una pregunta antes, una línea escrita o un convenio.</a:t>
+              <a:t>Dos colegas dicen haber traído al mismo comprador a la misma propiedad.</a:t>
             </a:r>
             <a:endParaRPr lang="en-US" sz="1000" dirty="0"/>
           </a:p>
@@ -4495,13 +4614,55 @@
       </p:sp>
       <p:sp>
         <p:nvSpPr>
-          <p:cNvPr id="17" name="Shape 14"/>
-          <p:cNvSpPr/>
-          <p:nvPr/>
-        </p:nvSpPr>
-        <p:spPr>
-          <a:xfrm>
-            <a:off x="603504" y="3886200"/>
+          <p:cNvPr id="24" name="Text 21"/>
+          <p:cNvSpPr/>
+          <p:nvPr/>
+        </p:nvSpPr>
+        <p:spPr>
+          <a:xfrm>
+            <a:off x="6364224" y="3200400"/>
+            <a:ext cx="2103120" cy="594360"/>
+          </a:xfrm>
+          <a:prstGeom prst="rect">
+            <a:avLst/>
+          </a:prstGeom>
+          <a:noFill/>
+          <a:ln/>
+        </p:spPr>
+        <p:txBody>
+          <a:bodyPr wrap="square" lIns="0" tIns="0" rIns="0" bIns="0" rtlCol="0" anchor="t"/>
+          <a:lstStyle/>
+          <a:p>
+            <a:pPr indent="0" marL="0">
+              <a:lnSpc>
+                <a:spcPts val="1300"/>
+              </a:lnSpc>
+              <a:buNone/>
+            </a:pPr>
+            <a:r>
+              <a:rPr lang="en-US" sz="1050" b="1" dirty="0">
+                <a:solidFill>
+                  <a:srgbClr val="E74B3C"/>
+                </a:solidFill>
+                <a:latin typeface="Inter" pitchFamily="34" charset="0"/>
+                <a:ea typeface="Inter" pitchFamily="34" charset="-122"/>
+                <a:cs typeface="Inter" pitchFamily="34" charset="-120"/>
+              </a:rPr>
+              <a:t>Lo que quedó escrito antes de la visita define quién cobra.</a:t>
+            </a:r>
+            <a:endParaRPr lang="en-US" sz="1050" dirty="0"/>
+          </a:p>
+        </p:txBody>
+      </p:sp>
+      <p:sp>
+        <p:nvSpPr>
+          <p:cNvPr id="25" name="Shape 22"/>
+          <p:cNvSpPr/>
+          <p:nvPr/>
+        </p:nvSpPr>
+        <p:spPr>
+          <a:xfrm>
+            <a:off x="603504" y="4114800"/>
             <a:ext cx="8083296" cy="658368"/>
           </a:xfrm>
           <a:prstGeom prst="roundRect">
@@ -4510,11 +4671,11 @@
             </a:avLst>
           </a:prstGeom>
           <a:solidFill>
-            <a:srgbClr val="4E586E"/>
+            <a:srgbClr val="08407C"/>
           </a:solidFill>
           <a:ln w="12700">
             <a:solidFill>
-              <a:srgbClr val="4E586E"/>
+              <a:srgbClr val="08407C"/>
             </a:solidFill>
             <a:prstDash val="solid"/>
           </a:ln>
@@ -4522,13 +4683,13 @@
       </p:sp>
       <p:sp>
         <p:nvSpPr>
-          <p:cNvPr id="18" name="Text 15"/>
-          <p:cNvSpPr/>
-          <p:nvPr/>
-        </p:nvSpPr>
-        <p:spPr>
-          <a:xfrm>
-            <a:off x="841248" y="3931920"/>
+          <p:cNvPr id="26" name="Text 23"/>
+          <p:cNvSpPr/>
+          <p:nvPr/>
+        </p:nvSpPr>
+        <p:spPr>
+          <a:xfrm>
+            <a:off x="841248" y="4160520"/>
             <a:ext cx="7626096" cy="201168"/>
           </a:xfrm>
           <a:prstGeom prst="rect">
@@ -4553,7 +4714,7 @@
                 <a:ea typeface="Inter" pitchFamily="34" charset="-122"/>
                 <a:cs typeface="Inter" pitchFamily="34" charset="-120"/>
               </a:rPr>
-              <a:t>SALIDA DEL TALLER</a:t>
+              <a:t>PATRÓN</a:t>
             </a:r>
             <a:endParaRPr lang="en-US" sz="900" dirty="0"/>
           </a:p>
@@ -4561,13 +4722,13 @@
       </p:sp>
       <p:sp>
         <p:nvSpPr>
-          <p:cNvPr id="19" name="Text 16"/>
-          <p:cNvSpPr/>
-          <p:nvPr/>
-        </p:nvSpPr>
-        <p:spPr>
-          <a:xfrm>
-            <a:off x="841248" y="4133088"/>
+          <p:cNvPr id="27" name="Text 24"/>
+          <p:cNvSpPr/>
+          <p:nvPr/>
+        </p:nvSpPr>
+        <p:spPr>
+          <a:xfrm>
+            <a:off x="841248" y="4361688"/>
             <a:ext cx="7607808" cy="347472"/>
           </a:xfrm>
           <a:prstGeom prst="rect">
@@ -4595,7 +4756,7 @@
                 <a:ea typeface="Inter" pitchFamily="34" charset="-122"/>
                 <a:cs typeface="Inter" pitchFamily="34" charset="-120"/>
               </a:rPr>
-              <a:t>Los casos reales que salgan se anotan sin nombres y se suman a la próxima versión de esta capacitación.</a:t>
+              <a:t>En los tres casos el conflicto se evitaba con una pregunta y una línea escrita.</a:t>
             </a:r>
             <a:endParaRPr lang="en-US" sz="1100" dirty="0"/>
           </a:p>
@@ -4747,7 +4908,7 @@
                 <a:ea typeface="Inter" pitchFamily="34" charset="-122"/>
                 <a:cs typeface="Inter" pitchFamily="34" charset="-120"/>
               </a:rPr>
-              <a:t>Antes de co-operar: cinco puntos</a:t>
+              <a:t>Taller: sus casos</a:t>
             </a:r>
             <a:endParaRPr lang="en-US" sz="2600" dirty="0"/>
           </a:p>
@@ -4786,7 +4947,7 @@
                 <a:ea typeface="Inter" pitchFamily="34" charset="-122"/>
                 <a:cs typeface="Inter" pitchFamily="34" charset="-120"/>
               </a:rPr>
-              <a:t>Un repaso para tener a mano cada vez que hay un colega en la operación.</a:t>
+              <a:t>Cada uno cuenta una operación con un colega, sin nombres.</a:t>
             </a:r>
             <a:endParaRPr lang="en-US" sz="1200" dirty="0"/>
           </a:p>
@@ -4801,11 +4962,11 @@
         <p:spPr>
           <a:xfrm>
             <a:off x="603504" y="1188720"/>
-            <a:ext cx="8083296" cy="512064"/>
+            <a:ext cx="8083296" cy="585216"/>
           </a:xfrm>
           <a:prstGeom prst="roundRect">
             <a:avLst>
-              <a:gd name="adj" fmla="val 16071"/>
+              <a:gd name="adj" fmla="val 14063"/>
             </a:avLst>
           </a:prstGeom>
           <a:solidFill>
@@ -4821,333 +4982,180 @@
       </p:sp>
       <p:sp>
         <p:nvSpPr>
-          <p:cNvPr id="8" name="Shape 5"/>
-          <p:cNvSpPr/>
-          <p:nvPr/>
-        </p:nvSpPr>
-        <p:spPr>
-          <a:xfrm>
-            <a:off x="786384" y="1261872"/>
-            <a:ext cx="365760" cy="365760"/>
+          <p:cNvPr id="8" name="Text 5"/>
+          <p:cNvSpPr/>
+          <p:nvPr/>
+        </p:nvSpPr>
+        <p:spPr>
+          <a:xfrm>
+            <a:off x="822960" y="1216152"/>
+            <a:ext cx="7626096" cy="219456"/>
+          </a:xfrm>
+          <a:prstGeom prst="rect">
+            <a:avLst/>
+          </a:prstGeom>
+          <a:noFill/>
+          <a:ln/>
+        </p:spPr>
+        <p:txBody>
+          <a:bodyPr wrap="square" lIns="0" tIns="0" rIns="0" bIns="0" rtlCol="0" anchor="ctr"/>
+          <a:lstStyle/>
+          <a:p>
+            <a:pPr indent="0" marL="0">
+              <a:buNone/>
+            </a:pPr>
+            <a:r>
+              <a:rPr lang="en-US" sz="1150" b="1" dirty="0">
+                <a:solidFill>
+                  <a:srgbClr val="08407C"/>
+                </a:solidFill>
+                <a:latin typeface="Inter" pitchFamily="34" charset="0"/>
+                <a:ea typeface="Inter" pitchFamily="34" charset="-122"/>
+                <a:cs typeface="Inter" pitchFamily="34" charset="-120"/>
+              </a:rPr>
+              <a:t>¿Qué esquema se usó?</a:t>
+            </a:r>
+            <a:endParaRPr lang="en-US" sz="1150" dirty="0"/>
+          </a:p>
+        </p:txBody>
+      </p:sp>
+      <p:sp>
+        <p:nvSpPr>
+          <p:cNvPr id="9" name="Text 6"/>
+          <p:cNvSpPr/>
+          <p:nvPr/>
+        </p:nvSpPr>
+        <p:spPr>
+          <a:xfrm>
+            <a:off x="822960" y="1426464"/>
+            <a:ext cx="7626096" cy="329184"/>
+          </a:xfrm>
+          <a:prstGeom prst="rect">
+            <a:avLst/>
+          </a:prstGeom>
+          <a:noFill/>
+          <a:ln/>
+        </p:spPr>
+        <p:txBody>
+          <a:bodyPr wrap="square" lIns="0" tIns="0" rIns="0" bIns="0" rtlCol="0" anchor="ctr"/>
+          <a:lstStyle/>
+          <a:p>
+            <a:pPr indent="0" marL="0">
+              <a:lnSpc>
+                <a:spcPts val="1200"/>
+              </a:lnSpc>
+              <a:buNone/>
+            </a:pPr>
+            <a:r>
+              <a:rPr lang="en-US" sz="1000" dirty="0">
+                <a:solidFill>
+                  <a:srgbClr val="2E4258"/>
+                </a:solidFill>
+                <a:latin typeface="Inter" pitchFamily="34" charset="0"/>
+                <a:ea typeface="Inter" pitchFamily="34" charset="-122"/>
+                <a:cs typeface="Inter" pitchFamily="34" charset="-120"/>
+              </a:rPr>
+              <a:t>Bolsa 50 y 50, mitad del comprador, porcentaje fijo o ninguno definido.</a:t>
+            </a:r>
+            <a:endParaRPr lang="en-US" sz="1000" dirty="0"/>
+          </a:p>
+        </p:txBody>
+      </p:sp>
+      <p:sp>
+        <p:nvSpPr>
+          <p:cNvPr id="10" name="Text 7"/>
+          <p:cNvSpPr/>
+          <p:nvPr/>
+        </p:nvSpPr>
+        <p:spPr>
+          <a:xfrm>
+            <a:off x="822960" y="1856232"/>
+            <a:ext cx="7626096" cy="219456"/>
+          </a:xfrm>
+          <a:prstGeom prst="rect">
+            <a:avLst/>
+          </a:prstGeom>
+          <a:noFill/>
+          <a:ln/>
+        </p:spPr>
+        <p:txBody>
+          <a:bodyPr wrap="square" lIns="0" tIns="0" rIns="0" bIns="0" rtlCol="0" anchor="ctr"/>
+          <a:lstStyle/>
+          <a:p>
+            <a:pPr indent="0" marL="0">
+              <a:buNone/>
+            </a:pPr>
+            <a:r>
+              <a:rPr lang="en-US" sz="1150" b="1" dirty="0">
+                <a:solidFill>
+                  <a:srgbClr val="08407C"/>
+                </a:solidFill>
+                <a:latin typeface="Inter" pitchFamily="34" charset="0"/>
+                <a:ea typeface="Inter" pitchFamily="34" charset="-122"/>
+                <a:cs typeface="Inter" pitchFamily="34" charset="-120"/>
+              </a:rPr>
+              <a:t>¿Qué quedó por escrito?</a:t>
+            </a:r>
+            <a:endParaRPr lang="en-US" sz="1150" dirty="0"/>
+          </a:p>
+        </p:txBody>
+      </p:sp>
+      <p:sp>
+        <p:nvSpPr>
+          <p:cNvPr id="11" name="Text 8"/>
+          <p:cNvSpPr/>
+          <p:nvPr/>
+        </p:nvSpPr>
+        <p:spPr>
+          <a:xfrm>
+            <a:off x="822960" y="2066544"/>
+            <a:ext cx="7626096" cy="329184"/>
+          </a:xfrm>
+          <a:prstGeom prst="rect">
+            <a:avLst/>
+          </a:prstGeom>
+          <a:noFill/>
+          <a:ln/>
+        </p:spPr>
+        <p:txBody>
+          <a:bodyPr wrap="square" lIns="0" tIns="0" rIns="0" bIns="0" rtlCol="0" anchor="ctr"/>
+          <a:lstStyle/>
+          <a:p>
+            <a:pPr indent="0" marL="0">
+              <a:lnSpc>
+                <a:spcPts val="1200"/>
+              </a:lnSpc>
+              <a:buNone/>
+            </a:pPr>
+            <a:r>
+              <a:rPr lang="en-US" sz="1000" dirty="0">
+                <a:solidFill>
+                  <a:srgbClr val="2E4258"/>
+                </a:solidFill>
+                <a:latin typeface="Inter" pitchFamily="34" charset="0"/>
+                <a:ea typeface="Inter" pitchFamily="34" charset="-122"/>
+                <a:cs typeface="Inter" pitchFamily="34" charset="-120"/>
+              </a:rPr>
+              <a:t>Reserva, convenio, mensaje o nada.</a:t>
+            </a:r>
+            <a:endParaRPr lang="en-US" sz="1000" dirty="0"/>
+          </a:p>
+        </p:txBody>
+      </p:sp>
+      <p:sp>
+        <p:nvSpPr>
+          <p:cNvPr id="12" name="Shape 9"/>
+          <p:cNvSpPr/>
+          <p:nvPr/>
+        </p:nvSpPr>
+        <p:spPr>
+          <a:xfrm>
+            <a:off x="603504" y="2468880"/>
+            <a:ext cx="8083296" cy="585216"/>
           </a:xfrm>
           <a:prstGeom prst="roundRect">
             <a:avLst>
-              <a:gd name="adj" fmla="val 125000"/>
-            </a:avLst>
-          </a:prstGeom>
-          <a:solidFill>
-            <a:srgbClr val="08407C"/>
-          </a:solidFill>
-          <a:ln w="12700">
-            <a:solidFill>
-              <a:srgbClr val="08407C"/>
-            </a:solidFill>
-            <a:prstDash val="solid"/>
-          </a:ln>
-        </p:spPr>
-      </p:sp>
-      <p:sp>
-        <p:nvSpPr>
-          <p:cNvPr id="9" name="Text 6"/>
-          <p:cNvSpPr/>
-          <p:nvPr/>
-        </p:nvSpPr>
-        <p:spPr>
-          <a:xfrm>
-            <a:off x="786384" y="1261872"/>
-            <a:ext cx="365760" cy="365760"/>
-          </a:xfrm>
-          <a:prstGeom prst="rect">
-            <a:avLst/>
-          </a:prstGeom>
-          <a:noFill/>
-          <a:ln/>
-        </p:spPr>
-        <p:txBody>
-          <a:bodyPr wrap="square" lIns="0" tIns="0" rIns="0" bIns="0" rtlCol="0" anchor="ctr"/>
-          <a:lstStyle/>
-          <a:p>
-            <a:pPr algn="ctr" indent="0" marL="0">
-              <a:buNone/>
-            </a:pPr>
-            <a:r>
-              <a:rPr lang="en-US" sz="1200" b="1" dirty="0">
-                <a:solidFill>
-                  <a:srgbClr val="FFFFFF"/>
-                </a:solidFill>
-                <a:latin typeface="Inter" pitchFamily="34" charset="0"/>
-                <a:ea typeface="Inter" pitchFamily="34" charset="-122"/>
-                <a:cs typeface="Inter" pitchFamily="34" charset="-120"/>
-              </a:rPr>
-              <a:t>1</a:t>
-            </a:r>
-            <a:endParaRPr lang="en-US" sz="1200" dirty="0"/>
-          </a:p>
-        </p:txBody>
-      </p:sp>
-      <p:sp>
-        <p:nvSpPr>
-          <p:cNvPr id="10" name="Text 7"/>
-          <p:cNvSpPr/>
-          <p:nvPr/>
-        </p:nvSpPr>
-        <p:spPr>
-          <a:xfrm>
-            <a:off x="1353312" y="1188720"/>
-            <a:ext cx="2377440" cy="512064"/>
-          </a:xfrm>
-          <a:prstGeom prst="rect">
-            <a:avLst/>
-          </a:prstGeom>
-          <a:noFill/>
-          <a:ln/>
-        </p:spPr>
-        <p:txBody>
-          <a:bodyPr wrap="square" lIns="0" tIns="0" rIns="0" bIns="0" rtlCol="0" anchor="ctr"/>
-          <a:lstStyle/>
-          <a:p>
-            <a:pPr indent="0" marL="0">
-              <a:buNone/>
-            </a:pPr>
-            <a:r>
-              <a:rPr lang="en-US" sz="1250" b="1" dirty="0">
-                <a:solidFill>
-                  <a:srgbClr val="08407C"/>
-                </a:solidFill>
-                <a:latin typeface="Inter" pitchFamily="34" charset="0"/>
-                <a:ea typeface="Inter" pitchFamily="34" charset="-122"/>
-                <a:cs typeface="Inter" pitchFamily="34" charset="-120"/>
-              </a:rPr>
-              <a:t>Preguntar</a:t>
-            </a:r>
-            <a:endParaRPr lang="en-US" sz="1250" dirty="0"/>
-          </a:p>
-        </p:txBody>
-      </p:sp>
-      <p:sp>
-        <p:nvSpPr>
-          <p:cNvPr id="11" name="Text 8"/>
-          <p:cNvSpPr/>
-          <p:nvPr/>
-        </p:nvSpPr>
-        <p:spPr>
-          <a:xfrm>
-            <a:off x="3803904" y="1188720"/>
-            <a:ext cx="4754880" cy="512064"/>
-          </a:xfrm>
-          <a:prstGeom prst="rect">
-            <a:avLst/>
-          </a:prstGeom>
-          <a:noFill/>
-          <a:ln/>
-        </p:spPr>
-        <p:txBody>
-          <a:bodyPr wrap="square" lIns="0" tIns="0" rIns="0" bIns="0" rtlCol="0" anchor="ctr"/>
-          <a:lstStyle/>
-          <a:p>
-            <a:pPr indent="0" marL="0">
-              <a:buNone/>
-            </a:pPr>
-            <a:r>
-              <a:rPr lang="en-US" sz="1100" dirty="0">
-                <a:solidFill>
-                  <a:srgbClr val="2E4258"/>
-                </a:solidFill>
-                <a:latin typeface="Inter" pitchFamily="34" charset="0"/>
-                <a:ea typeface="Inter" pitchFamily="34" charset="-122"/>
-                <a:cs typeface="Inter" pitchFamily="34" charset="-120"/>
-              </a:rPr>
-              <a:t>Si se comparten honorarios y cuánto.</a:t>
-            </a:r>
-            <a:endParaRPr lang="en-US" sz="1100" dirty="0"/>
-          </a:p>
-        </p:txBody>
-      </p:sp>
-      <p:sp>
-        <p:nvSpPr>
-          <p:cNvPr id="12" name="Shape 9"/>
-          <p:cNvSpPr/>
-          <p:nvPr/>
-        </p:nvSpPr>
-        <p:spPr>
-          <a:xfrm>
-            <a:off x="603504" y="1773936"/>
-            <a:ext cx="8083296" cy="512064"/>
-          </a:xfrm>
-          <a:prstGeom prst="roundRect">
-            <a:avLst>
-              <a:gd name="adj" fmla="val 16071"/>
-            </a:avLst>
-          </a:prstGeom>
-          <a:solidFill>
-            <a:srgbClr val="FFFFFF"/>
-          </a:solidFill>
-          <a:ln w="12700">
-            <a:solidFill>
-              <a:srgbClr val="FFFFFF"/>
-            </a:solidFill>
-            <a:prstDash val="solid"/>
-          </a:ln>
-        </p:spPr>
-      </p:sp>
-      <p:sp>
-        <p:nvSpPr>
-          <p:cNvPr id="13" name="Shape 10"/>
-          <p:cNvSpPr/>
-          <p:nvPr/>
-        </p:nvSpPr>
-        <p:spPr>
-          <a:xfrm>
-            <a:off x="786384" y="1847088"/>
-            <a:ext cx="365760" cy="365760"/>
-          </a:xfrm>
-          <a:prstGeom prst="roundRect">
-            <a:avLst>
-              <a:gd name="adj" fmla="val 125000"/>
-            </a:avLst>
-          </a:prstGeom>
-          <a:solidFill>
-            <a:srgbClr val="08407C"/>
-          </a:solidFill>
-          <a:ln w="12700">
-            <a:solidFill>
-              <a:srgbClr val="08407C"/>
-            </a:solidFill>
-            <a:prstDash val="solid"/>
-          </a:ln>
-        </p:spPr>
-      </p:sp>
-      <p:sp>
-        <p:nvSpPr>
-          <p:cNvPr id="14" name="Text 11"/>
-          <p:cNvSpPr/>
-          <p:nvPr/>
-        </p:nvSpPr>
-        <p:spPr>
-          <a:xfrm>
-            <a:off x="786384" y="1847088"/>
-            <a:ext cx="365760" cy="365760"/>
-          </a:xfrm>
-          <a:prstGeom prst="rect">
-            <a:avLst/>
-          </a:prstGeom>
-          <a:noFill/>
-          <a:ln/>
-        </p:spPr>
-        <p:txBody>
-          <a:bodyPr wrap="square" lIns="0" tIns="0" rIns="0" bIns="0" rtlCol="0" anchor="ctr"/>
-          <a:lstStyle/>
-          <a:p>
-            <a:pPr algn="ctr" indent="0" marL="0">
-              <a:buNone/>
-            </a:pPr>
-            <a:r>
-              <a:rPr lang="en-US" sz="1200" b="1" dirty="0">
-                <a:solidFill>
-                  <a:srgbClr val="FFFFFF"/>
-                </a:solidFill>
-                <a:latin typeface="Inter" pitchFamily="34" charset="0"/>
-                <a:ea typeface="Inter" pitchFamily="34" charset="-122"/>
-                <a:cs typeface="Inter" pitchFamily="34" charset="-120"/>
-              </a:rPr>
-              <a:t>2</a:t>
-            </a:r>
-            <a:endParaRPr lang="en-US" sz="1200" dirty="0"/>
-          </a:p>
-        </p:txBody>
-      </p:sp>
-      <p:sp>
-        <p:nvSpPr>
-          <p:cNvPr id="15" name="Text 12"/>
-          <p:cNvSpPr/>
-          <p:nvPr/>
-        </p:nvSpPr>
-        <p:spPr>
-          <a:xfrm>
-            <a:off x="1353312" y="1773936"/>
-            <a:ext cx="2377440" cy="512064"/>
-          </a:xfrm>
-          <a:prstGeom prst="rect">
-            <a:avLst/>
-          </a:prstGeom>
-          <a:noFill/>
-          <a:ln/>
-        </p:spPr>
-        <p:txBody>
-          <a:bodyPr wrap="square" lIns="0" tIns="0" rIns="0" bIns="0" rtlCol="0" anchor="ctr"/>
-          <a:lstStyle/>
-          <a:p>
-            <a:pPr indent="0" marL="0">
-              <a:buNone/>
-            </a:pPr>
-            <a:r>
-              <a:rPr lang="en-US" sz="1250" b="1" dirty="0">
-                <a:solidFill>
-                  <a:srgbClr val="08407C"/>
-                </a:solidFill>
-                <a:latin typeface="Inter" pitchFamily="34" charset="0"/>
-                <a:ea typeface="Inter" pitchFamily="34" charset="-122"/>
-                <a:cs typeface="Inter" pitchFamily="34" charset="-120"/>
-              </a:rPr>
-              <a:t>Confirmar la base</a:t>
-            </a:r>
-            <a:endParaRPr lang="en-US" sz="1250" dirty="0"/>
-          </a:p>
-        </p:txBody>
-      </p:sp>
-      <p:sp>
-        <p:nvSpPr>
-          <p:cNvPr id="16" name="Text 13"/>
-          <p:cNvSpPr/>
-          <p:nvPr/>
-        </p:nvSpPr>
-        <p:spPr>
-          <a:xfrm>
-            <a:off x="3803904" y="1773936"/>
-            <a:ext cx="4754880" cy="512064"/>
-          </a:xfrm>
-          <a:prstGeom prst="rect">
-            <a:avLst/>
-          </a:prstGeom>
-          <a:noFill/>
-          <a:ln/>
-        </p:spPr>
-        <p:txBody>
-          <a:bodyPr wrap="square" lIns="0" tIns="0" rIns="0" bIns="0" rtlCol="0" anchor="ctr"/>
-          <a:lstStyle/>
-          <a:p>
-            <a:pPr indent="0" marL="0">
-              <a:buNone/>
-            </a:pPr>
-            <a:r>
-              <a:rPr lang="en-US" sz="1100" dirty="0">
-                <a:solidFill>
-                  <a:srgbClr val="2E4258"/>
-                </a:solidFill>
-                <a:latin typeface="Inter" pitchFamily="34" charset="0"/>
-                <a:ea typeface="Inter" pitchFamily="34" charset="-122"/>
-                <a:cs typeface="Inter" pitchFamily="34" charset="-120"/>
-              </a:rPr>
-              <a:t>Sobre el total de los honorarios o solo sobre el comprador.</a:t>
-            </a:r>
-            <a:endParaRPr lang="en-US" sz="1100" dirty="0"/>
-          </a:p>
-        </p:txBody>
-      </p:sp>
-      <p:sp>
-        <p:nvSpPr>
-          <p:cNvPr id="17" name="Shape 14"/>
-          <p:cNvSpPr/>
-          <p:nvPr/>
-        </p:nvSpPr>
-        <p:spPr>
-          <a:xfrm>
-            <a:off x="603504" y="2359152"/>
-            <a:ext cx="8083296" cy="512064"/>
-          </a:xfrm>
-          <a:prstGeom prst="roundRect">
-            <a:avLst>
-              <a:gd name="adj" fmla="val 16071"/>
+              <a:gd name="adj" fmla="val 14063"/>
             </a:avLst>
           </a:prstGeom>
           <a:solidFill>
@@ -5163,96 +5171,30 @@
       </p:sp>
       <p:sp>
         <p:nvSpPr>
-          <p:cNvPr id="18" name="Shape 15"/>
-          <p:cNvSpPr/>
-          <p:nvPr/>
-        </p:nvSpPr>
-        <p:spPr>
-          <a:xfrm>
-            <a:off x="786384" y="2432304"/>
-            <a:ext cx="365760" cy="365760"/>
-          </a:xfrm>
-          <a:prstGeom prst="roundRect">
-            <a:avLst>
-              <a:gd name="adj" fmla="val 125000"/>
-            </a:avLst>
-          </a:prstGeom>
-          <a:solidFill>
-            <a:srgbClr val="08407C"/>
-          </a:solidFill>
-          <a:ln w="12700">
-            <a:solidFill>
-              <a:srgbClr val="08407C"/>
-            </a:solidFill>
-            <a:prstDash val="solid"/>
-          </a:ln>
-        </p:spPr>
-      </p:sp>
-      <p:sp>
-        <p:nvSpPr>
-          <p:cNvPr id="19" name="Text 16"/>
-          <p:cNvSpPr/>
-          <p:nvPr/>
-        </p:nvSpPr>
-        <p:spPr>
-          <a:xfrm>
-            <a:off x="786384" y="2432304"/>
-            <a:ext cx="365760" cy="365760"/>
-          </a:xfrm>
-          <a:prstGeom prst="rect">
-            <a:avLst/>
-          </a:prstGeom>
-          <a:noFill/>
-          <a:ln/>
-        </p:spPr>
-        <p:txBody>
-          <a:bodyPr wrap="square" lIns="0" tIns="0" rIns="0" bIns="0" rtlCol="0" anchor="ctr"/>
-          <a:lstStyle/>
-          <a:p>
-            <a:pPr algn="ctr" indent="0" marL="0">
-              <a:buNone/>
-            </a:pPr>
-            <a:r>
-              <a:rPr lang="en-US" sz="1200" b="1" dirty="0">
-                <a:solidFill>
-                  <a:srgbClr val="FFFFFF"/>
-                </a:solidFill>
-                <a:latin typeface="Inter" pitchFamily="34" charset="0"/>
-                <a:ea typeface="Inter" pitchFamily="34" charset="-122"/>
-                <a:cs typeface="Inter" pitchFamily="34" charset="-120"/>
-              </a:rPr>
-              <a:t>3</a:t>
-            </a:r>
-            <a:endParaRPr lang="en-US" sz="1200" dirty="0"/>
-          </a:p>
-        </p:txBody>
-      </p:sp>
-      <p:sp>
-        <p:nvSpPr>
-          <p:cNvPr id="20" name="Text 17"/>
-          <p:cNvSpPr/>
-          <p:nvPr/>
-        </p:nvSpPr>
-        <p:spPr>
-          <a:xfrm>
-            <a:off x="1353312" y="2359152"/>
-            <a:ext cx="2377440" cy="512064"/>
-          </a:xfrm>
-          <a:prstGeom prst="rect">
-            <a:avLst/>
-          </a:prstGeom>
-          <a:noFill/>
-          <a:ln/>
-        </p:spPr>
-        <p:txBody>
-          <a:bodyPr wrap="square" lIns="0" tIns="0" rIns="0" bIns="0" rtlCol="0" anchor="ctr"/>
-          <a:lstStyle/>
-          <a:p>
-            <a:pPr indent="0" marL="0">
-              <a:buNone/>
-            </a:pPr>
-            <a:r>
-              <a:rPr lang="en-US" sz="1250" b="1" dirty="0">
+          <p:cNvPr id="13" name="Text 10"/>
+          <p:cNvSpPr/>
+          <p:nvPr/>
+        </p:nvSpPr>
+        <p:spPr>
+          <a:xfrm>
+            <a:off x="822960" y="2496312"/>
+            <a:ext cx="7626096" cy="219456"/>
+          </a:xfrm>
+          <a:prstGeom prst="rect">
+            <a:avLst/>
+          </a:prstGeom>
+          <a:noFill/>
+          <a:ln/>
+        </p:spPr>
+        <p:txBody>
+          <a:bodyPr wrap="square" lIns="0" tIns="0" rIns="0" bIns="0" rtlCol="0" anchor="ctr"/>
+          <a:lstStyle/>
+          <a:p>
+            <a:pPr indent="0" marL="0">
+              <a:buNone/>
+            </a:pPr>
+            <a:r>
+              <a:rPr lang="en-US" sz="1150" b="1" dirty="0">
                 <a:solidFill>
                   <a:srgbClr val="08407C"/>
                 </a:solidFill>
@@ -5260,38 +5202,41 @@
                 <a:ea typeface="Inter" pitchFamily="34" charset="-122"/>
                 <a:cs typeface="Inter" pitchFamily="34" charset="-120"/>
               </a:rPr>
-              <a:t>Escribirlo</a:t>
-            </a:r>
-            <a:endParaRPr lang="en-US" sz="1250" dirty="0"/>
-          </a:p>
-        </p:txBody>
-      </p:sp>
-      <p:sp>
-        <p:nvSpPr>
-          <p:cNvPr id="21" name="Text 18"/>
-          <p:cNvSpPr/>
-          <p:nvPr/>
-        </p:nvSpPr>
-        <p:spPr>
-          <a:xfrm>
-            <a:off x="3803904" y="2359152"/>
-            <a:ext cx="4754880" cy="512064"/>
-          </a:xfrm>
-          <a:prstGeom prst="rect">
-            <a:avLst/>
-          </a:prstGeom>
-          <a:noFill/>
-          <a:ln/>
-        </p:spPr>
-        <p:txBody>
-          <a:bodyPr wrap="square" lIns="0" tIns="0" rIns="0" bIns="0" rtlCol="0" anchor="ctr"/>
-          <a:lstStyle/>
-          <a:p>
-            <a:pPr indent="0" marL="0">
-              <a:buNone/>
-            </a:pPr>
-            <a:r>
-              <a:rPr lang="en-US" sz="1100" dirty="0">
+              <a:t>¿Hubo un malentendido?</a:t>
+            </a:r>
+            <a:endParaRPr lang="en-US" sz="1150" dirty="0"/>
+          </a:p>
+        </p:txBody>
+      </p:sp>
+      <p:sp>
+        <p:nvSpPr>
+          <p:cNvPr id="14" name="Text 11"/>
+          <p:cNvSpPr/>
+          <p:nvPr/>
+        </p:nvSpPr>
+        <p:spPr>
+          <a:xfrm>
+            <a:off x="822960" y="2706624"/>
+            <a:ext cx="7626096" cy="329184"/>
+          </a:xfrm>
+          <a:prstGeom prst="rect">
+            <a:avLst/>
+          </a:prstGeom>
+          <a:noFill/>
+          <a:ln/>
+        </p:spPr>
+        <p:txBody>
+          <a:bodyPr wrap="square" lIns="0" tIns="0" rIns="0" bIns="0" rtlCol="0" anchor="ctr"/>
+          <a:lstStyle/>
+          <a:p>
+            <a:pPr indent="0" marL="0">
+              <a:lnSpc>
+                <a:spcPts val="1200"/>
+              </a:lnSpc>
+              <a:buNone/>
+            </a:pPr>
+            <a:r>
+              <a:rPr lang="en-US" sz="1000" dirty="0">
                 <a:solidFill>
                   <a:srgbClr val="2E4258"/>
                 </a:solidFill>
@@ -5299,131 +5244,38 @@
                 <a:ea typeface="Inter" pitchFamily="34" charset="-122"/>
                 <a:cs typeface="Inter" pitchFamily="34" charset="-120"/>
               </a:rPr>
-              <a:t>En la reserva o en un convenio de honorarios.</a:t>
-            </a:r>
-            <a:endParaRPr lang="en-US" sz="1100" dirty="0"/>
-          </a:p>
-        </p:txBody>
-      </p:sp>
-      <p:sp>
-        <p:nvSpPr>
-          <p:cNvPr id="22" name="Shape 19"/>
-          <p:cNvSpPr/>
-          <p:nvPr/>
-        </p:nvSpPr>
-        <p:spPr>
-          <a:xfrm>
-            <a:off x="603504" y="2944368"/>
-            <a:ext cx="8083296" cy="512064"/>
-          </a:xfrm>
-          <a:prstGeom prst="roundRect">
-            <a:avLst>
-              <a:gd name="adj" fmla="val 16071"/>
-            </a:avLst>
-          </a:prstGeom>
-          <a:solidFill>
-            <a:srgbClr val="FFFFFF"/>
-          </a:solidFill>
-          <a:ln w="12700">
-            <a:solidFill>
-              <a:srgbClr val="FFFFFF"/>
-            </a:solidFill>
-            <a:prstDash val="solid"/>
-          </a:ln>
-        </p:spPr>
-      </p:sp>
-      <p:sp>
-        <p:nvSpPr>
-          <p:cNvPr id="23" name="Shape 20"/>
-          <p:cNvSpPr/>
-          <p:nvPr/>
-        </p:nvSpPr>
-        <p:spPr>
-          <a:xfrm>
-            <a:off x="786384" y="3017520"/>
-            <a:ext cx="365760" cy="365760"/>
-          </a:xfrm>
-          <a:prstGeom prst="roundRect">
-            <a:avLst>
-              <a:gd name="adj" fmla="val 125000"/>
-            </a:avLst>
-          </a:prstGeom>
-          <a:solidFill>
-            <a:srgbClr val="08407C"/>
-          </a:solidFill>
-          <a:ln w="12700">
-            <a:solidFill>
-              <a:srgbClr val="08407C"/>
-            </a:solidFill>
-            <a:prstDash val="solid"/>
-          </a:ln>
-        </p:spPr>
-      </p:sp>
-      <p:sp>
-        <p:nvSpPr>
-          <p:cNvPr id="24" name="Text 21"/>
-          <p:cNvSpPr/>
-          <p:nvPr/>
-        </p:nvSpPr>
-        <p:spPr>
-          <a:xfrm>
-            <a:off x="786384" y="3017520"/>
-            <a:ext cx="365760" cy="365760"/>
-          </a:xfrm>
-          <a:prstGeom prst="rect">
-            <a:avLst/>
-          </a:prstGeom>
-          <a:noFill/>
-          <a:ln/>
-        </p:spPr>
-        <p:txBody>
-          <a:bodyPr wrap="square" lIns="0" tIns="0" rIns="0" bIns="0" rtlCol="0" anchor="ctr"/>
-          <a:lstStyle/>
-          <a:p>
-            <a:pPr algn="ctr" indent="0" marL="0">
-              <a:buNone/>
-            </a:pPr>
-            <a:r>
-              <a:rPr lang="en-US" sz="1200" b="1" dirty="0">
-                <a:solidFill>
-                  <a:srgbClr val="FFFFFF"/>
-                </a:solidFill>
-                <a:latin typeface="Inter" pitchFamily="34" charset="0"/>
-                <a:ea typeface="Inter" pitchFamily="34" charset="-122"/>
-                <a:cs typeface="Inter" pitchFamily="34" charset="-120"/>
-              </a:rPr>
-              <a:t>4</a:t>
-            </a:r>
-            <a:endParaRPr lang="en-US" sz="1200" dirty="0"/>
-          </a:p>
-        </p:txBody>
-      </p:sp>
-      <p:sp>
-        <p:nvSpPr>
-          <p:cNvPr id="25" name="Text 22"/>
-          <p:cNvSpPr/>
-          <p:nvPr/>
-        </p:nvSpPr>
-        <p:spPr>
-          <a:xfrm>
-            <a:off x="1353312" y="2944368"/>
-            <a:ext cx="2377440" cy="512064"/>
-          </a:xfrm>
-          <a:prstGeom prst="rect">
-            <a:avLst/>
-          </a:prstGeom>
-          <a:noFill/>
-          <a:ln/>
-        </p:spPr>
-        <p:txBody>
-          <a:bodyPr wrap="square" lIns="0" tIns="0" rIns="0" bIns="0" rtlCol="0" anchor="ctr"/>
-          <a:lstStyle/>
-          <a:p>
-            <a:pPr indent="0" marL="0">
-              <a:buNone/>
-            </a:pPr>
-            <a:r>
-              <a:rPr lang="en-US" sz="1250" b="1" dirty="0">
+              <a:t>Qué se entendió distinto y en qué momento apareció.</a:t>
+            </a:r>
+            <a:endParaRPr lang="en-US" sz="1000" dirty="0"/>
+          </a:p>
+        </p:txBody>
+      </p:sp>
+      <p:sp>
+        <p:nvSpPr>
+          <p:cNvPr id="15" name="Text 12"/>
+          <p:cNvSpPr/>
+          <p:nvPr/>
+        </p:nvSpPr>
+        <p:spPr>
+          <a:xfrm>
+            <a:off x="822960" y="3136392"/>
+            <a:ext cx="7626096" cy="219456"/>
+          </a:xfrm>
+          <a:prstGeom prst="rect">
+            <a:avLst/>
+          </a:prstGeom>
+          <a:noFill/>
+          <a:ln/>
+        </p:spPr>
+        <p:txBody>
+          <a:bodyPr wrap="square" lIns="0" tIns="0" rIns="0" bIns="0" rtlCol="0" anchor="ctr"/>
+          <a:lstStyle/>
+          <a:p>
+            <a:pPr indent="0" marL="0">
+              <a:buNone/>
+            </a:pPr>
+            <a:r>
+              <a:rPr lang="en-US" sz="1150" b="1" dirty="0">
                 <a:solidFill>
                   <a:srgbClr val="08407C"/>
                 </a:solidFill>
@@ -5431,38 +5283,41 @@
                 <a:ea typeface="Inter" pitchFamily="34" charset="-122"/>
                 <a:cs typeface="Inter" pitchFamily="34" charset="-120"/>
               </a:rPr>
-              <a:t>Evaluar la identidad</a:t>
-            </a:r>
-            <a:endParaRPr lang="en-US" sz="1250" dirty="0"/>
-          </a:p>
-        </p:txBody>
-      </p:sp>
-      <p:sp>
-        <p:nvSpPr>
-          <p:cNvPr id="26" name="Text 23"/>
-          <p:cNvSpPr/>
-          <p:nvPr/>
-        </p:nvSpPr>
-        <p:spPr>
-          <a:xfrm>
-            <a:off x="3803904" y="2944368"/>
-            <a:ext cx="4754880" cy="512064"/>
-          </a:xfrm>
-          <a:prstGeom prst="rect">
-            <a:avLst/>
-          </a:prstGeom>
-          <a:noFill/>
-          <a:ln/>
-        </p:spPr>
-        <p:txBody>
-          <a:bodyPr wrap="square" lIns="0" tIns="0" rIns="0" bIns="0" rtlCol="0" anchor="ctr"/>
-          <a:lstStyle/>
-          <a:p>
-            <a:pPr indent="0" marL="0">
-              <a:buNone/>
-            </a:pPr>
-            <a:r>
-              <a:rPr lang="en-US" sz="1100" dirty="0">
+              <a:t>¿Qué lo habría evitado?</a:t>
+            </a:r>
+            <a:endParaRPr lang="en-US" sz="1150" dirty="0"/>
+          </a:p>
+        </p:txBody>
+      </p:sp>
+      <p:sp>
+        <p:nvSpPr>
+          <p:cNvPr id="16" name="Text 13"/>
+          <p:cNvSpPr/>
+          <p:nvPr/>
+        </p:nvSpPr>
+        <p:spPr>
+          <a:xfrm>
+            <a:off x="822960" y="3346704"/>
+            <a:ext cx="7626096" cy="329184"/>
+          </a:xfrm>
+          <a:prstGeom prst="rect">
+            <a:avLst/>
+          </a:prstGeom>
+          <a:noFill/>
+          <a:ln/>
+        </p:spPr>
+        <p:txBody>
+          <a:bodyPr wrap="square" lIns="0" tIns="0" rIns="0" bIns="0" rtlCol="0" anchor="ctr"/>
+          <a:lstStyle/>
+          <a:p>
+            <a:pPr indent="0" marL="0">
+              <a:lnSpc>
+                <a:spcPts val="1200"/>
+              </a:lnSpc>
+              <a:buNone/>
+            </a:pPr>
+            <a:r>
+              <a:rPr lang="en-US" sz="1000" dirty="0">
                 <a:solidFill>
                   <a:srgbClr val="2E4258"/>
                 </a:solidFill>
@@ -5470,192 +5325,21 @@
                 <a:ea typeface="Inter" pitchFamily="34" charset="-122"/>
                 <a:cs typeface="Inter" pitchFamily="34" charset="-120"/>
               </a:rPr>
-              <a:t>Si hay que proteger a alguien, convenio privado.</a:t>
-            </a:r>
-            <a:endParaRPr lang="en-US" sz="1100" dirty="0"/>
-          </a:p>
-        </p:txBody>
-      </p:sp>
-      <p:sp>
-        <p:nvSpPr>
-          <p:cNvPr id="27" name="Shape 24"/>
-          <p:cNvSpPr/>
-          <p:nvPr/>
-        </p:nvSpPr>
-        <p:spPr>
-          <a:xfrm>
-            <a:off x="603504" y="3529584"/>
-            <a:ext cx="8083296" cy="512064"/>
-          </a:xfrm>
-          <a:prstGeom prst="roundRect">
-            <a:avLst>
-              <a:gd name="adj" fmla="val 16071"/>
-            </a:avLst>
-          </a:prstGeom>
-          <a:solidFill>
-            <a:srgbClr val="F3F3F3"/>
-          </a:solidFill>
-          <a:ln w="12700">
-            <a:solidFill>
-              <a:srgbClr val="F3F3F3"/>
-            </a:solidFill>
-            <a:prstDash val="solid"/>
-          </a:ln>
-        </p:spPr>
-      </p:sp>
-      <p:sp>
-        <p:nvSpPr>
-          <p:cNvPr id="28" name="Shape 25"/>
-          <p:cNvSpPr/>
-          <p:nvPr/>
-        </p:nvSpPr>
-        <p:spPr>
-          <a:xfrm>
-            <a:off x="786384" y="3602736"/>
-            <a:ext cx="365760" cy="365760"/>
-          </a:xfrm>
-          <a:prstGeom prst="roundRect">
-            <a:avLst>
-              <a:gd name="adj" fmla="val 125000"/>
-            </a:avLst>
-          </a:prstGeom>
-          <a:solidFill>
-            <a:srgbClr val="08407C"/>
-          </a:solidFill>
-          <a:ln w="12700">
-            <a:solidFill>
-              <a:srgbClr val="08407C"/>
-            </a:solidFill>
-            <a:prstDash val="solid"/>
-          </a:ln>
-        </p:spPr>
-      </p:sp>
-      <p:sp>
-        <p:nvSpPr>
-          <p:cNvPr id="29" name="Text 26"/>
-          <p:cNvSpPr/>
-          <p:nvPr/>
-        </p:nvSpPr>
-        <p:spPr>
-          <a:xfrm>
-            <a:off x="786384" y="3602736"/>
-            <a:ext cx="365760" cy="365760"/>
-          </a:xfrm>
-          <a:prstGeom prst="rect">
-            <a:avLst/>
-          </a:prstGeom>
-          <a:noFill/>
-          <a:ln/>
-        </p:spPr>
-        <p:txBody>
-          <a:bodyPr wrap="square" lIns="0" tIns="0" rIns="0" bIns="0" rtlCol="0" anchor="ctr"/>
-          <a:lstStyle/>
-          <a:p>
-            <a:pPr algn="ctr" indent="0" marL="0">
-              <a:buNone/>
-            </a:pPr>
-            <a:r>
-              <a:rPr lang="en-US" sz="1200" b="1" dirty="0">
-                <a:solidFill>
-                  <a:srgbClr val="FFFFFF"/>
-                </a:solidFill>
-                <a:latin typeface="Inter" pitchFamily="34" charset="0"/>
-                <a:ea typeface="Inter" pitchFamily="34" charset="-122"/>
-                <a:cs typeface="Inter" pitchFamily="34" charset="-120"/>
-              </a:rPr>
-              <a:t>5</a:t>
-            </a:r>
-            <a:endParaRPr lang="en-US" sz="1200" dirty="0"/>
-          </a:p>
-        </p:txBody>
-      </p:sp>
-      <p:sp>
-        <p:nvSpPr>
-          <p:cNvPr id="30" name="Text 27"/>
-          <p:cNvSpPr/>
-          <p:nvPr/>
-        </p:nvSpPr>
-        <p:spPr>
-          <a:xfrm>
-            <a:off x="1353312" y="3529584"/>
-            <a:ext cx="2377440" cy="512064"/>
-          </a:xfrm>
-          <a:prstGeom prst="rect">
-            <a:avLst/>
-          </a:prstGeom>
-          <a:noFill/>
-          <a:ln/>
-        </p:spPr>
-        <p:txBody>
-          <a:bodyPr wrap="square" lIns="0" tIns="0" rIns="0" bIns="0" rtlCol="0" anchor="ctr"/>
-          <a:lstStyle/>
-          <a:p>
-            <a:pPr indent="0" marL="0">
-              <a:buNone/>
-            </a:pPr>
-            <a:r>
-              <a:rPr lang="en-US" sz="1250" b="1" dirty="0">
-                <a:solidFill>
-                  <a:srgbClr val="08407C"/>
-                </a:solidFill>
-                <a:latin typeface="Inter" pitchFamily="34" charset="0"/>
-                <a:ea typeface="Inter" pitchFamily="34" charset="-122"/>
-                <a:cs typeface="Inter" pitchFamily="34" charset="-120"/>
-              </a:rPr>
-              <a:t>Guardar el respaldo</a:t>
-            </a:r>
-            <a:endParaRPr lang="en-US" sz="1250" dirty="0"/>
-          </a:p>
-        </p:txBody>
-      </p:sp>
-      <p:sp>
-        <p:nvSpPr>
-          <p:cNvPr id="31" name="Text 28"/>
-          <p:cNvSpPr/>
-          <p:nvPr/>
-        </p:nvSpPr>
-        <p:spPr>
-          <a:xfrm>
-            <a:off x="3803904" y="3529584"/>
-            <a:ext cx="4754880" cy="512064"/>
-          </a:xfrm>
-          <a:prstGeom prst="rect">
-            <a:avLst/>
-          </a:prstGeom>
-          <a:noFill/>
-          <a:ln/>
-        </p:spPr>
-        <p:txBody>
-          <a:bodyPr wrap="square" lIns="0" tIns="0" rIns="0" bIns="0" rtlCol="0" anchor="ctr"/>
-          <a:lstStyle/>
-          <a:p>
-            <a:pPr indent="0" marL="0">
-              <a:buNone/>
-            </a:pPr>
-            <a:r>
-              <a:rPr lang="en-US" sz="1100" dirty="0">
-                <a:solidFill>
-                  <a:srgbClr val="2E4258"/>
-                </a:solidFill>
-                <a:latin typeface="Inter" pitchFamily="34" charset="0"/>
-                <a:ea typeface="Inter" pitchFamily="34" charset="-122"/>
-                <a:cs typeface="Inter" pitchFamily="34" charset="-120"/>
-              </a:rPr>
-              <a:t>Mails y mensajes que confirman lo acordado.</a:t>
-            </a:r>
-            <a:endParaRPr lang="en-US" sz="1100" dirty="0"/>
-          </a:p>
-        </p:txBody>
-      </p:sp>
-      <p:sp>
-        <p:nvSpPr>
-          <p:cNvPr id="32" name="Shape 29"/>
-          <p:cNvSpPr/>
-          <p:nvPr/>
-        </p:nvSpPr>
-        <p:spPr>
-          <a:xfrm>
-            <a:off x="603504" y="4206240"/>
+              <a:t>Una pregunta antes, una línea escrita o un convenio.</a:t>
+            </a:r>
+            <a:endParaRPr lang="en-US" sz="1000" dirty="0"/>
+          </a:p>
+        </p:txBody>
+      </p:sp>
+      <p:sp>
+        <p:nvSpPr>
+          <p:cNvPr id="17" name="Shape 14"/>
+          <p:cNvSpPr/>
+          <p:nvPr/>
+        </p:nvSpPr>
+        <p:spPr>
+          <a:xfrm>
+            <a:off x="603504" y="3886200"/>
             <a:ext cx="8083296" cy="658368"/>
           </a:xfrm>
           <a:prstGeom prst="roundRect">
@@ -5664,11 +5348,11 @@
             </a:avLst>
           </a:prstGeom>
           <a:solidFill>
-            <a:srgbClr val="08407C"/>
+            <a:srgbClr val="4E586E"/>
           </a:solidFill>
           <a:ln w="12700">
             <a:solidFill>
-              <a:srgbClr val="08407C"/>
+              <a:srgbClr val="4E586E"/>
             </a:solidFill>
             <a:prstDash val="solid"/>
           </a:ln>
@@ -5676,13 +5360,13 @@
       </p:sp>
       <p:sp>
         <p:nvSpPr>
-          <p:cNvPr id="33" name="Text 30"/>
-          <p:cNvSpPr/>
-          <p:nvPr/>
-        </p:nvSpPr>
-        <p:spPr>
-          <a:xfrm>
-            <a:off x="841248" y="4251960"/>
+          <p:cNvPr id="18" name="Text 15"/>
+          <p:cNvSpPr/>
+          <p:nvPr/>
+        </p:nvSpPr>
+        <p:spPr>
+          <a:xfrm>
+            <a:off x="841248" y="3931920"/>
             <a:ext cx="7626096" cy="201168"/>
           </a:xfrm>
           <a:prstGeom prst="rect">
@@ -5707,7 +5391,7 @@
                 <a:ea typeface="Inter" pitchFamily="34" charset="-122"/>
                 <a:cs typeface="Inter" pitchFamily="34" charset="-120"/>
               </a:rPr>
-              <a:t>SI SOLO SE RECUERDA UNA COSA</a:t>
+              <a:t>SALIDA DEL TALLER</a:t>
             </a:r>
             <a:endParaRPr lang="en-US" sz="900" dirty="0"/>
           </a:p>
@@ -5715,13 +5399,13 @@
       </p:sp>
       <p:sp>
         <p:nvSpPr>
-          <p:cNvPr id="34" name="Text 31"/>
-          <p:cNvSpPr/>
-          <p:nvPr/>
-        </p:nvSpPr>
-        <p:spPr>
-          <a:xfrm>
-            <a:off x="841248" y="4453128"/>
+          <p:cNvPr id="19" name="Text 16"/>
+          <p:cNvSpPr/>
+          <p:nvPr/>
+        </p:nvSpPr>
+        <p:spPr>
+          <a:xfrm>
+            <a:off x="841248" y="4133088"/>
             <a:ext cx="7607808" cy="347472"/>
           </a:xfrm>
           <a:prstGeom prst="rect">
@@ -5749,7 +5433,7 @@
                 <a:ea typeface="Inter" pitchFamily="34" charset="-122"/>
                 <a:cs typeface="Inter" pitchFamily="34" charset="-120"/>
               </a:rPr>
-              <a:t>Preguntar primero y dejarlo por escrito.</a:t>
+              <a:t>Los casos reales que salgan se anotan sin nombres y se suman a la próxima versión de esta capacitación.</a:t>
             </a:r>
             <a:endParaRPr lang="en-US" sz="1100" dirty="0"/>
           </a:p>
@@ -5794,6 +5478,1160 @@
           <a:chExt cx="0" cy="0"/>
         </a:xfrm>
       </p:grpSpPr>
+      <p:sp>
+        <p:nvSpPr>
+          <p:cNvPr id="2" name="Shape 0"/>
+          <p:cNvSpPr/>
+          <p:nvPr/>
+        </p:nvSpPr>
+        <p:spPr>
+          <a:xfrm>
+            <a:off x="0" y="0"/>
+            <a:ext cx="411480" cy="5143500"/>
+          </a:xfrm>
+          <a:prstGeom prst="rect">
+            <a:avLst/>
+          </a:prstGeom>
+          <a:solidFill>
+            <a:srgbClr val="4E586E"/>
+          </a:solidFill>
+          <a:ln w="12700">
+            <a:solidFill>
+              <a:srgbClr val="4E586E"/>
+            </a:solidFill>
+            <a:prstDash val="solid"/>
+          </a:ln>
+        </p:spPr>
+      </p:sp>
+      <p:sp>
+        <p:nvSpPr>
+          <p:cNvPr id="3" name="Shape 1"/>
+          <p:cNvSpPr/>
+          <p:nvPr/>
+        </p:nvSpPr>
+        <p:spPr>
+          <a:xfrm>
+            <a:off x="0" y="0"/>
+            <a:ext cx="411480" cy="402336"/>
+          </a:xfrm>
+          <a:prstGeom prst="rect">
+            <a:avLst/>
+          </a:prstGeom>
+          <a:solidFill>
+            <a:srgbClr val="08407C"/>
+          </a:solidFill>
+          <a:ln w="12700">
+            <a:solidFill>
+              <a:srgbClr val="08407C"/>
+            </a:solidFill>
+            <a:prstDash val="solid"/>
+          </a:ln>
+        </p:spPr>
+      </p:sp>
+      <p:pic>
+        <p:nvPicPr>
+          <p:cNvPr id="4" name="Image 0" descr="/home/user/KrakRealEstate/capacitaciones/co-broking/brand/iso_white.png">    </p:cNvPr>
+          <p:cNvPicPr>
+            <a:picLocks noChangeAspect="1"/>
+          </p:cNvPicPr>
+          <p:nvPr/>
+        </p:nvPicPr>
+        <p:blipFill>
+          <a:blip r:embed="rId2"/>
+          <a:stretch>
+            <a:fillRect/>
+          </a:stretch>
+        </p:blipFill>
+        <p:spPr>
+          <a:xfrm>
+            <a:off x="123444" y="68580"/>
+            <a:ext cx="164592" cy="217627"/>
+          </a:xfrm>
+          <a:prstGeom prst="rect">
+            <a:avLst/>
+          </a:prstGeom>
+        </p:spPr>
+      </p:pic>
+      <p:sp>
+        <p:nvSpPr>
+          <p:cNvPr id="5" name="Text 2"/>
+          <p:cNvSpPr/>
+          <p:nvPr/>
+        </p:nvSpPr>
+        <p:spPr>
+          <a:xfrm>
+            <a:off x="603504" y="256032"/>
+            <a:ext cx="8083296" cy="475488"/>
+          </a:xfrm>
+          <a:prstGeom prst="rect">
+            <a:avLst/>
+          </a:prstGeom>
+          <a:noFill/>
+          <a:ln/>
+        </p:spPr>
+        <p:txBody>
+          <a:bodyPr wrap="square" lIns="0" tIns="0" rIns="0" bIns="0" rtlCol="0" anchor="ctr"/>
+          <a:lstStyle/>
+          <a:p>
+            <a:pPr indent="0" marL="0">
+              <a:buNone/>
+            </a:pPr>
+            <a:r>
+              <a:rPr lang="en-US" sz="2600" b="1" dirty="0">
+                <a:solidFill>
+                  <a:srgbClr val="08407C"/>
+                </a:solidFill>
+                <a:latin typeface="Inter" pitchFamily="34" charset="0"/>
+                <a:ea typeface="Inter" pitchFamily="34" charset="-122"/>
+                <a:cs typeface="Inter" pitchFamily="34" charset="-120"/>
+              </a:rPr>
+              <a:t>Antes de co-operar: cinco puntos</a:t>
+            </a:r>
+            <a:endParaRPr lang="en-US" sz="2600" dirty="0"/>
+          </a:p>
+        </p:txBody>
+      </p:sp>
+      <p:sp>
+        <p:nvSpPr>
+          <p:cNvPr id="6" name="Text 3"/>
+          <p:cNvSpPr/>
+          <p:nvPr/>
+        </p:nvSpPr>
+        <p:spPr>
+          <a:xfrm>
+            <a:off x="603504" y="749808"/>
+            <a:ext cx="8083296" cy="274320"/>
+          </a:xfrm>
+          <a:prstGeom prst="rect">
+            <a:avLst/>
+          </a:prstGeom>
+          <a:noFill/>
+          <a:ln/>
+        </p:spPr>
+        <p:txBody>
+          <a:bodyPr wrap="square" lIns="0" tIns="0" rIns="0" bIns="0" rtlCol="0" anchor="ctr"/>
+          <a:lstStyle/>
+          <a:p>
+            <a:pPr indent="0" marL="0">
+              <a:buNone/>
+            </a:pPr>
+            <a:r>
+              <a:rPr lang="en-US" sz="1200" i="1" dirty="0">
+                <a:solidFill>
+                  <a:srgbClr val="6A7686"/>
+                </a:solidFill>
+                <a:latin typeface="Inter" pitchFamily="34" charset="0"/>
+                <a:ea typeface="Inter" pitchFamily="34" charset="-122"/>
+                <a:cs typeface="Inter" pitchFamily="34" charset="-120"/>
+              </a:rPr>
+              <a:t>Un repaso para tener a mano cada vez que hay un colega en la operación.</a:t>
+            </a:r>
+            <a:endParaRPr lang="en-US" sz="1200" dirty="0"/>
+          </a:p>
+        </p:txBody>
+      </p:sp>
+      <p:sp>
+        <p:nvSpPr>
+          <p:cNvPr id="7" name="Shape 4"/>
+          <p:cNvSpPr/>
+          <p:nvPr/>
+        </p:nvSpPr>
+        <p:spPr>
+          <a:xfrm>
+            <a:off x="603504" y="1188720"/>
+            <a:ext cx="8083296" cy="512064"/>
+          </a:xfrm>
+          <a:prstGeom prst="roundRect">
+            <a:avLst>
+              <a:gd name="adj" fmla="val 16071"/>
+            </a:avLst>
+          </a:prstGeom>
+          <a:solidFill>
+            <a:srgbClr val="F3F3F3"/>
+          </a:solidFill>
+          <a:ln w="12700">
+            <a:solidFill>
+              <a:srgbClr val="F3F3F3"/>
+            </a:solidFill>
+            <a:prstDash val="solid"/>
+          </a:ln>
+        </p:spPr>
+      </p:sp>
+      <p:sp>
+        <p:nvSpPr>
+          <p:cNvPr id="8" name="Shape 5"/>
+          <p:cNvSpPr/>
+          <p:nvPr/>
+        </p:nvSpPr>
+        <p:spPr>
+          <a:xfrm>
+            <a:off x="786384" y="1261872"/>
+            <a:ext cx="365760" cy="365760"/>
+          </a:xfrm>
+          <a:prstGeom prst="roundRect">
+            <a:avLst>
+              <a:gd name="adj" fmla="val 125000"/>
+            </a:avLst>
+          </a:prstGeom>
+          <a:solidFill>
+            <a:srgbClr val="08407C"/>
+          </a:solidFill>
+          <a:ln w="12700">
+            <a:solidFill>
+              <a:srgbClr val="08407C"/>
+            </a:solidFill>
+            <a:prstDash val="solid"/>
+          </a:ln>
+        </p:spPr>
+      </p:sp>
+      <p:sp>
+        <p:nvSpPr>
+          <p:cNvPr id="9" name="Text 6"/>
+          <p:cNvSpPr/>
+          <p:nvPr/>
+        </p:nvSpPr>
+        <p:spPr>
+          <a:xfrm>
+            <a:off x="786384" y="1261872"/>
+            <a:ext cx="365760" cy="365760"/>
+          </a:xfrm>
+          <a:prstGeom prst="rect">
+            <a:avLst/>
+          </a:prstGeom>
+          <a:noFill/>
+          <a:ln/>
+        </p:spPr>
+        <p:txBody>
+          <a:bodyPr wrap="square" lIns="0" tIns="0" rIns="0" bIns="0" rtlCol="0" anchor="ctr"/>
+          <a:lstStyle/>
+          <a:p>
+            <a:pPr algn="ctr" indent="0" marL="0">
+              <a:buNone/>
+            </a:pPr>
+            <a:r>
+              <a:rPr lang="en-US" sz="1200" b="1" dirty="0">
+                <a:solidFill>
+                  <a:srgbClr val="FFFFFF"/>
+                </a:solidFill>
+                <a:latin typeface="Inter" pitchFamily="34" charset="0"/>
+                <a:ea typeface="Inter" pitchFamily="34" charset="-122"/>
+                <a:cs typeface="Inter" pitchFamily="34" charset="-120"/>
+              </a:rPr>
+              <a:t>1</a:t>
+            </a:r>
+            <a:endParaRPr lang="en-US" sz="1200" dirty="0"/>
+          </a:p>
+        </p:txBody>
+      </p:sp>
+      <p:sp>
+        <p:nvSpPr>
+          <p:cNvPr id="10" name="Text 7"/>
+          <p:cNvSpPr/>
+          <p:nvPr/>
+        </p:nvSpPr>
+        <p:spPr>
+          <a:xfrm>
+            <a:off x="1353312" y="1188720"/>
+            <a:ext cx="2377440" cy="512064"/>
+          </a:xfrm>
+          <a:prstGeom prst="rect">
+            <a:avLst/>
+          </a:prstGeom>
+          <a:noFill/>
+          <a:ln/>
+        </p:spPr>
+        <p:txBody>
+          <a:bodyPr wrap="square" lIns="0" tIns="0" rIns="0" bIns="0" rtlCol="0" anchor="ctr"/>
+          <a:lstStyle/>
+          <a:p>
+            <a:pPr indent="0" marL="0">
+              <a:buNone/>
+            </a:pPr>
+            <a:r>
+              <a:rPr lang="en-US" sz="1250" b="1" dirty="0">
+                <a:solidFill>
+                  <a:srgbClr val="08407C"/>
+                </a:solidFill>
+                <a:latin typeface="Inter" pitchFamily="34" charset="0"/>
+                <a:ea typeface="Inter" pitchFamily="34" charset="-122"/>
+                <a:cs typeface="Inter" pitchFamily="34" charset="-120"/>
+              </a:rPr>
+              <a:t>Preguntar</a:t>
+            </a:r>
+            <a:endParaRPr lang="en-US" sz="1250" dirty="0"/>
+          </a:p>
+        </p:txBody>
+      </p:sp>
+      <p:sp>
+        <p:nvSpPr>
+          <p:cNvPr id="11" name="Text 8"/>
+          <p:cNvSpPr/>
+          <p:nvPr/>
+        </p:nvSpPr>
+        <p:spPr>
+          <a:xfrm>
+            <a:off x="3803904" y="1188720"/>
+            <a:ext cx="4754880" cy="512064"/>
+          </a:xfrm>
+          <a:prstGeom prst="rect">
+            <a:avLst/>
+          </a:prstGeom>
+          <a:noFill/>
+          <a:ln/>
+        </p:spPr>
+        <p:txBody>
+          <a:bodyPr wrap="square" lIns="0" tIns="0" rIns="0" bIns="0" rtlCol="0" anchor="ctr"/>
+          <a:lstStyle/>
+          <a:p>
+            <a:pPr indent="0" marL="0">
+              <a:buNone/>
+            </a:pPr>
+            <a:r>
+              <a:rPr lang="en-US" sz="1100" dirty="0">
+                <a:solidFill>
+                  <a:srgbClr val="2E4258"/>
+                </a:solidFill>
+                <a:latin typeface="Inter" pitchFamily="34" charset="0"/>
+                <a:ea typeface="Inter" pitchFamily="34" charset="-122"/>
+                <a:cs typeface="Inter" pitchFamily="34" charset="-120"/>
+              </a:rPr>
+              <a:t>Si se comparten honorarios y cuánto.</a:t>
+            </a:r>
+            <a:endParaRPr lang="en-US" sz="1100" dirty="0"/>
+          </a:p>
+        </p:txBody>
+      </p:sp>
+      <p:sp>
+        <p:nvSpPr>
+          <p:cNvPr id="12" name="Shape 9"/>
+          <p:cNvSpPr/>
+          <p:nvPr/>
+        </p:nvSpPr>
+        <p:spPr>
+          <a:xfrm>
+            <a:off x="603504" y="1773936"/>
+            <a:ext cx="8083296" cy="512064"/>
+          </a:xfrm>
+          <a:prstGeom prst="roundRect">
+            <a:avLst>
+              <a:gd name="adj" fmla="val 16071"/>
+            </a:avLst>
+          </a:prstGeom>
+          <a:solidFill>
+            <a:srgbClr val="FFFFFF"/>
+          </a:solidFill>
+          <a:ln w="12700">
+            <a:solidFill>
+              <a:srgbClr val="FFFFFF"/>
+            </a:solidFill>
+            <a:prstDash val="solid"/>
+          </a:ln>
+        </p:spPr>
+      </p:sp>
+      <p:sp>
+        <p:nvSpPr>
+          <p:cNvPr id="13" name="Shape 10"/>
+          <p:cNvSpPr/>
+          <p:nvPr/>
+        </p:nvSpPr>
+        <p:spPr>
+          <a:xfrm>
+            <a:off x="786384" y="1847088"/>
+            <a:ext cx="365760" cy="365760"/>
+          </a:xfrm>
+          <a:prstGeom prst="roundRect">
+            <a:avLst>
+              <a:gd name="adj" fmla="val 125000"/>
+            </a:avLst>
+          </a:prstGeom>
+          <a:solidFill>
+            <a:srgbClr val="08407C"/>
+          </a:solidFill>
+          <a:ln w="12700">
+            <a:solidFill>
+              <a:srgbClr val="08407C"/>
+            </a:solidFill>
+            <a:prstDash val="solid"/>
+          </a:ln>
+        </p:spPr>
+      </p:sp>
+      <p:sp>
+        <p:nvSpPr>
+          <p:cNvPr id="14" name="Text 11"/>
+          <p:cNvSpPr/>
+          <p:nvPr/>
+        </p:nvSpPr>
+        <p:spPr>
+          <a:xfrm>
+            <a:off x="786384" y="1847088"/>
+            <a:ext cx="365760" cy="365760"/>
+          </a:xfrm>
+          <a:prstGeom prst="rect">
+            <a:avLst/>
+          </a:prstGeom>
+          <a:noFill/>
+          <a:ln/>
+        </p:spPr>
+        <p:txBody>
+          <a:bodyPr wrap="square" lIns="0" tIns="0" rIns="0" bIns="0" rtlCol="0" anchor="ctr"/>
+          <a:lstStyle/>
+          <a:p>
+            <a:pPr algn="ctr" indent="0" marL="0">
+              <a:buNone/>
+            </a:pPr>
+            <a:r>
+              <a:rPr lang="en-US" sz="1200" b="1" dirty="0">
+                <a:solidFill>
+                  <a:srgbClr val="FFFFFF"/>
+                </a:solidFill>
+                <a:latin typeface="Inter" pitchFamily="34" charset="0"/>
+                <a:ea typeface="Inter" pitchFamily="34" charset="-122"/>
+                <a:cs typeface="Inter" pitchFamily="34" charset="-120"/>
+              </a:rPr>
+              <a:t>2</a:t>
+            </a:r>
+            <a:endParaRPr lang="en-US" sz="1200" dirty="0"/>
+          </a:p>
+        </p:txBody>
+      </p:sp>
+      <p:sp>
+        <p:nvSpPr>
+          <p:cNvPr id="15" name="Text 12"/>
+          <p:cNvSpPr/>
+          <p:nvPr/>
+        </p:nvSpPr>
+        <p:spPr>
+          <a:xfrm>
+            <a:off x="1353312" y="1773936"/>
+            <a:ext cx="2377440" cy="512064"/>
+          </a:xfrm>
+          <a:prstGeom prst="rect">
+            <a:avLst/>
+          </a:prstGeom>
+          <a:noFill/>
+          <a:ln/>
+        </p:spPr>
+        <p:txBody>
+          <a:bodyPr wrap="square" lIns="0" tIns="0" rIns="0" bIns="0" rtlCol="0" anchor="ctr"/>
+          <a:lstStyle/>
+          <a:p>
+            <a:pPr indent="0" marL="0">
+              <a:buNone/>
+            </a:pPr>
+            <a:r>
+              <a:rPr lang="en-US" sz="1250" b="1" dirty="0">
+                <a:solidFill>
+                  <a:srgbClr val="08407C"/>
+                </a:solidFill>
+                <a:latin typeface="Inter" pitchFamily="34" charset="0"/>
+                <a:ea typeface="Inter" pitchFamily="34" charset="-122"/>
+                <a:cs typeface="Inter" pitchFamily="34" charset="-120"/>
+              </a:rPr>
+              <a:t>Confirmar la base</a:t>
+            </a:r>
+            <a:endParaRPr lang="en-US" sz="1250" dirty="0"/>
+          </a:p>
+        </p:txBody>
+      </p:sp>
+      <p:sp>
+        <p:nvSpPr>
+          <p:cNvPr id="16" name="Text 13"/>
+          <p:cNvSpPr/>
+          <p:nvPr/>
+        </p:nvSpPr>
+        <p:spPr>
+          <a:xfrm>
+            <a:off x="3803904" y="1773936"/>
+            <a:ext cx="4754880" cy="512064"/>
+          </a:xfrm>
+          <a:prstGeom prst="rect">
+            <a:avLst/>
+          </a:prstGeom>
+          <a:noFill/>
+          <a:ln/>
+        </p:spPr>
+        <p:txBody>
+          <a:bodyPr wrap="square" lIns="0" tIns="0" rIns="0" bIns="0" rtlCol="0" anchor="ctr"/>
+          <a:lstStyle/>
+          <a:p>
+            <a:pPr indent="0" marL="0">
+              <a:buNone/>
+            </a:pPr>
+            <a:r>
+              <a:rPr lang="en-US" sz="1100" dirty="0">
+                <a:solidFill>
+                  <a:srgbClr val="2E4258"/>
+                </a:solidFill>
+                <a:latin typeface="Inter" pitchFamily="34" charset="0"/>
+                <a:ea typeface="Inter" pitchFamily="34" charset="-122"/>
+                <a:cs typeface="Inter" pitchFamily="34" charset="-120"/>
+              </a:rPr>
+              <a:t>Sobre el total de los honorarios o solo sobre el comprador.</a:t>
+            </a:r>
+            <a:endParaRPr lang="en-US" sz="1100" dirty="0"/>
+          </a:p>
+        </p:txBody>
+      </p:sp>
+      <p:sp>
+        <p:nvSpPr>
+          <p:cNvPr id="17" name="Shape 14"/>
+          <p:cNvSpPr/>
+          <p:nvPr/>
+        </p:nvSpPr>
+        <p:spPr>
+          <a:xfrm>
+            <a:off x="603504" y="2359152"/>
+            <a:ext cx="8083296" cy="512064"/>
+          </a:xfrm>
+          <a:prstGeom prst="roundRect">
+            <a:avLst>
+              <a:gd name="adj" fmla="val 16071"/>
+            </a:avLst>
+          </a:prstGeom>
+          <a:solidFill>
+            <a:srgbClr val="F3F3F3"/>
+          </a:solidFill>
+          <a:ln w="12700">
+            <a:solidFill>
+              <a:srgbClr val="F3F3F3"/>
+            </a:solidFill>
+            <a:prstDash val="solid"/>
+          </a:ln>
+        </p:spPr>
+      </p:sp>
+      <p:sp>
+        <p:nvSpPr>
+          <p:cNvPr id="18" name="Shape 15"/>
+          <p:cNvSpPr/>
+          <p:nvPr/>
+        </p:nvSpPr>
+        <p:spPr>
+          <a:xfrm>
+            <a:off x="786384" y="2432304"/>
+            <a:ext cx="365760" cy="365760"/>
+          </a:xfrm>
+          <a:prstGeom prst="roundRect">
+            <a:avLst>
+              <a:gd name="adj" fmla="val 125000"/>
+            </a:avLst>
+          </a:prstGeom>
+          <a:solidFill>
+            <a:srgbClr val="08407C"/>
+          </a:solidFill>
+          <a:ln w="12700">
+            <a:solidFill>
+              <a:srgbClr val="08407C"/>
+            </a:solidFill>
+            <a:prstDash val="solid"/>
+          </a:ln>
+        </p:spPr>
+      </p:sp>
+      <p:sp>
+        <p:nvSpPr>
+          <p:cNvPr id="19" name="Text 16"/>
+          <p:cNvSpPr/>
+          <p:nvPr/>
+        </p:nvSpPr>
+        <p:spPr>
+          <a:xfrm>
+            <a:off x="786384" y="2432304"/>
+            <a:ext cx="365760" cy="365760"/>
+          </a:xfrm>
+          <a:prstGeom prst="rect">
+            <a:avLst/>
+          </a:prstGeom>
+          <a:noFill/>
+          <a:ln/>
+        </p:spPr>
+        <p:txBody>
+          <a:bodyPr wrap="square" lIns="0" tIns="0" rIns="0" bIns="0" rtlCol="0" anchor="ctr"/>
+          <a:lstStyle/>
+          <a:p>
+            <a:pPr algn="ctr" indent="0" marL="0">
+              <a:buNone/>
+            </a:pPr>
+            <a:r>
+              <a:rPr lang="en-US" sz="1200" b="1" dirty="0">
+                <a:solidFill>
+                  <a:srgbClr val="FFFFFF"/>
+                </a:solidFill>
+                <a:latin typeface="Inter" pitchFamily="34" charset="0"/>
+                <a:ea typeface="Inter" pitchFamily="34" charset="-122"/>
+                <a:cs typeface="Inter" pitchFamily="34" charset="-120"/>
+              </a:rPr>
+              <a:t>3</a:t>
+            </a:r>
+            <a:endParaRPr lang="en-US" sz="1200" dirty="0"/>
+          </a:p>
+        </p:txBody>
+      </p:sp>
+      <p:sp>
+        <p:nvSpPr>
+          <p:cNvPr id="20" name="Text 17"/>
+          <p:cNvSpPr/>
+          <p:nvPr/>
+        </p:nvSpPr>
+        <p:spPr>
+          <a:xfrm>
+            <a:off x="1353312" y="2359152"/>
+            <a:ext cx="2377440" cy="512064"/>
+          </a:xfrm>
+          <a:prstGeom prst="rect">
+            <a:avLst/>
+          </a:prstGeom>
+          <a:noFill/>
+          <a:ln/>
+        </p:spPr>
+        <p:txBody>
+          <a:bodyPr wrap="square" lIns="0" tIns="0" rIns="0" bIns="0" rtlCol="0" anchor="ctr"/>
+          <a:lstStyle/>
+          <a:p>
+            <a:pPr indent="0" marL="0">
+              <a:buNone/>
+            </a:pPr>
+            <a:r>
+              <a:rPr lang="en-US" sz="1250" b="1" dirty="0">
+                <a:solidFill>
+                  <a:srgbClr val="08407C"/>
+                </a:solidFill>
+                <a:latin typeface="Inter" pitchFamily="34" charset="0"/>
+                <a:ea typeface="Inter" pitchFamily="34" charset="-122"/>
+                <a:cs typeface="Inter" pitchFamily="34" charset="-120"/>
+              </a:rPr>
+              <a:t>Escribirlo</a:t>
+            </a:r>
+            <a:endParaRPr lang="en-US" sz="1250" dirty="0"/>
+          </a:p>
+        </p:txBody>
+      </p:sp>
+      <p:sp>
+        <p:nvSpPr>
+          <p:cNvPr id="21" name="Text 18"/>
+          <p:cNvSpPr/>
+          <p:nvPr/>
+        </p:nvSpPr>
+        <p:spPr>
+          <a:xfrm>
+            <a:off x="3803904" y="2359152"/>
+            <a:ext cx="4754880" cy="512064"/>
+          </a:xfrm>
+          <a:prstGeom prst="rect">
+            <a:avLst/>
+          </a:prstGeom>
+          <a:noFill/>
+          <a:ln/>
+        </p:spPr>
+        <p:txBody>
+          <a:bodyPr wrap="square" lIns="0" tIns="0" rIns="0" bIns="0" rtlCol="0" anchor="ctr"/>
+          <a:lstStyle/>
+          <a:p>
+            <a:pPr indent="0" marL="0">
+              <a:buNone/>
+            </a:pPr>
+            <a:r>
+              <a:rPr lang="en-US" sz="1100" dirty="0">
+                <a:solidFill>
+                  <a:srgbClr val="2E4258"/>
+                </a:solidFill>
+                <a:latin typeface="Inter" pitchFamily="34" charset="0"/>
+                <a:ea typeface="Inter" pitchFamily="34" charset="-122"/>
+                <a:cs typeface="Inter" pitchFamily="34" charset="-120"/>
+              </a:rPr>
+              <a:t>En la reserva o en un convenio de honorarios.</a:t>
+            </a:r>
+            <a:endParaRPr lang="en-US" sz="1100" dirty="0"/>
+          </a:p>
+        </p:txBody>
+      </p:sp>
+      <p:sp>
+        <p:nvSpPr>
+          <p:cNvPr id="22" name="Shape 19"/>
+          <p:cNvSpPr/>
+          <p:nvPr/>
+        </p:nvSpPr>
+        <p:spPr>
+          <a:xfrm>
+            <a:off x="603504" y="2944368"/>
+            <a:ext cx="8083296" cy="512064"/>
+          </a:xfrm>
+          <a:prstGeom prst="roundRect">
+            <a:avLst>
+              <a:gd name="adj" fmla="val 16071"/>
+            </a:avLst>
+          </a:prstGeom>
+          <a:solidFill>
+            <a:srgbClr val="FFFFFF"/>
+          </a:solidFill>
+          <a:ln w="12700">
+            <a:solidFill>
+              <a:srgbClr val="FFFFFF"/>
+            </a:solidFill>
+            <a:prstDash val="solid"/>
+          </a:ln>
+        </p:spPr>
+      </p:sp>
+      <p:sp>
+        <p:nvSpPr>
+          <p:cNvPr id="23" name="Shape 20"/>
+          <p:cNvSpPr/>
+          <p:nvPr/>
+        </p:nvSpPr>
+        <p:spPr>
+          <a:xfrm>
+            <a:off x="786384" y="3017520"/>
+            <a:ext cx="365760" cy="365760"/>
+          </a:xfrm>
+          <a:prstGeom prst="roundRect">
+            <a:avLst>
+              <a:gd name="adj" fmla="val 125000"/>
+            </a:avLst>
+          </a:prstGeom>
+          <a:solidFill>
+            <a:srgbClr val="08407C"/>
+          </a:solidFill>
+          <a:ln w="12700">
+            <a:solidFill>
+              <a:srgbClr val="08407C"/>
+            </a:solidFill>
+            <a:prstDash val="solid"/>
+          </a:ln>
+        </p:spPr>
+      </p:sp>
+      <p:sp>
+        <p:nvSpPr>
+          <p:cNvPr id="24" name="Text 21"/>
+          <p:cNvSpPr/>
+          <p:nvPr/>
+        </p:nvSpPr>
+        <p:spPr>
+          <a:xfrm>
+            <a:off x="786384" y="3017520"/>
+            <a:ext cx="365760" cy="365760"/>
+          </a:xfrm>
+          <a:prstGeom prst="rect">
+            <a:avLst/>
+          </a:prstGeom>
+          <a:noFill/>
+          <a:ln/>
+        </p:spPr>
+        <p:txBody>
+          <a:bodyPr wrap="square" lIns="0" tIns="0" rIns="0" bIns="0" rtlCol="0" anchor="ctr"/>
+          <a:lstStyle/>
+          <a:p>
+            <a:pPr algn="ctr" indent="0" marL="0">
+              <a:buNone/>
+            </a:pPr>
+            <a:r>
+              <a:rPr lang="en-US" sz="1200" b="1" dirty="0">
+                <a:solidFill>
+                  <a:srgbClr val="FFFFFF"/>
+                </a:solidFill>
+                <a:latin typeface="Inter" pitchFamily="34" charset="0"/>
+                <a:ea typeface="Inter" pitchFamily="34" charset="-122"/>
+                <a:cs typeface="Inter" pitchFamily="34" charset="-120"/>
+              </a:rPr>
+              <a:t>4</a:t>
+            </a:r>
+            <a:endParaRPr lang="en-US" sz="1200" dirty="0"/>
+          </a:p>
+        </p:txBody>
+      </p:sp>
+      <p:sp>
+        <p:nvSpPr>
+          <p:cNvPr id="25" name="Text 22"/>
+          <p:cNvSpPr/>
+          <p:nvPr/>
+        </p:nvSpPr>
+        <p:spPr>
+          <a:xfrm>
+            <a:off x="1353312" y="2944368"/>
+            <a:ext cx="2377440" cy="512064"/>
+          </a:xfrm>
+          <a:prstGeom prst="rect">
+            <a:avLst/>
+          </a:prstGeom>
+          <a:noFill/>
+          <a:ln/>
+        </p:spPr>
+        <p:txBody>
+          <a:bodyPr wrap="square" lIns="0" tIns="0" rIns="0" bIns="0" rtlCol="0" anchor="ctr"/>
+          <a:lstStyle/>
+          <a:p>
+            <a:pPr indent="0" marL="0">
+              <a:buNone/>
+            </a:pPr>
+            <a:r>
+              <a:rPr lang="en-US" sz="1250" b="1" dirty="0">
+                <a:solidFill>
+                  <a:srgbClr val="08407C"/>
+                </a:solidFill>
+                <a:latin typeface="Inter" pitchFamily="34" charset="0"/>
+                <a:ea typeface="Inter" pitchFamily="34" charset="-122"/>
+                <a:cs typeface="Inter" pitchFamily="34" charset="-120"/>
+              </a:rPr>
+              <a:t>Evaluar la identidad</a:t>
+            </a:r>
+            <a:endParaRPr lang="en-US" sz="1250" dirty="0"/>
+          </a:p>
+        </p:txBody>
+      </p:sp>
+      <p:sp>
+        <p:nvSpPr>
+          <p:cNvPr id="26" name="Text 23"/>
+          <p:cNvSpPr/>
+          <p:nvPr/>
+        </p:nvSpPr>
+        <p:spPr>
+          <a:xfrm>
+            <a:off x="3803904" y="2944368"/>
+            <a:ext cx="4754880" cy="512064"/>
+          </a:xfrm>
+          <a:prstGeom prst="rect">
+            <a:avLst/>
+          </a:prstGeom>
+          <a:noFill/>
+          <a:ln/>
+        </p:spPr>
+        <p:txBody>
+          <a:bodyPr wrap="square" lIns="0" tIns="0" rIns="0" bIns="0" rtlCol="0" anchor="ctr"/>
+          <a:lstStyle/>
+          <a:p>
+            <a:pPr indent="0" marL="0">
+              <a:buNone/>
+            </a:pPr>
+            <a:r>
+              <a:rPr lang="en-US" sz="1100" dirty="0">
+                <a:solidFill>
+                  <a:srgbClr val="2E4258"/>
+                </a:solidFill>
+                <a:latin typeface="Inter" pitchFamily="34" charset="0"/>
+                <a:ea typeface="Inter" pitchFamily="34" charset="-122"/>
+                <a:cs typeface="Inter" pitchFamily="34" charset="-120"/>
+              </a:rPr>
+              <a:t>Si hay que proteger a alguien, convenio privado.</a:t>
+            </a:r>
+            <a:endParaRPr lang="en-US" sz="1100" dirty="0"/>
+          </a:p>
+        </p:txBody>
+      </p:sp>
+      <p:sp>
+        <p:nvSpPr>
+          <p:cNvPr id="27" name="Shape 24"/>
+          <p:cNvSpPr/>
+          <p:nvPr/>
+        </p:nvSpPr>
+        <p:spPr>
+          <a:xfrm>
+            <a:off x="603504" y="3529584"/>
+            <a:ext cx="8083296" cy="512064"/>
+          </a:xfrm>
+          <a:prstGeom prst="roundRect">
+            <a:avLst>
+              <a:gd name="adj" fmla="val 16071"/>
+            </a:avLst>
+          </a:prstGeom>
+          <a:solidFill>
+            <a:srgbClr val="F3F3F3"/>
+          </a:solidFill>
+          <a:ln w="12700">
+            <a:solidFill>
+              <a:srgbClr val="F3F3F3"/>
+            </a:solidFill>
+            <a:prstDash val="solid"/>
+          </a:ln>
+        </p:spPr>
+      </p:sp>
+      <p:sp>
+        <p:nvSpPr>
+          <p:cNvPr id="28" name="Shape 25"/>
+          <p:cNvSpPr/>
+          <p:nvPr/>
+        </p:nvSpPr>
+        <p:spPr>
+          <a:xfrm>
+            <a:off x="786384" y="3602736"/>
+            <a:ext cx="365760" cy="365760"/>
+          </a:xfrm>
+          <a:prstGeom prst="roundRect">
+            <a:avLst>
+              <a:gd name="adj" fmla="val 125000"/>
+            </a:avLst>
+          </a:prstGeom>
+          <a:solidFill>
+            <a:srgbClr val="08407C"/>
+          </a:solidFill>
+          <a:ln w="12700">
+            <a:solidFill>
+              <a:srgbClr val="08407C"/>
+            </a:solidFill>
+            <a:prstDash val="solid"/>
+          </a:ln>
+        </p:spPr>
+      </p:sp>
+      <p:sp>
+        <p:nvSpPr>
+          <p:cNvPr id="29" name="Text 26"/>
+          <p:cNvSpPr/>
+          <p:nvPr/>
+        </p:nvSpPr>
+        <p:spPr>
+          <a:xfrm>
+            <a:off x="786384" y="3602736"/>
+            <a:ext cx="365760" cy="365760"/>
+          </a:xfrm>
+          <a:prstGeom prst="rect">
+            <a:avLst/>
+          </a:prstGeom>
+          <a:noFill/>
+          <a:ln/>
+        </p:spPr>
+        <p:txBody>
+          <a:bodyPr wrap="square" lIns="0" tIns="0" rIns="0" bIns="0" rtlCol="0" anchor="ctr"/>
+          <a:lstStyle/>
+          <a:p>
+            <a:pPr algn="ctr" indent="0" marL="0">
+              <a:buNone/>
+            </a:pPr>
+            <a:r>
+              <a:rPr lang="en-US" sz="1200" b="1" dirty="0">
+                <a:solidFill>
+                  <a:srgbClr val="FFFFFF"/>
+                </a:solidFill>
+                <a:latin typeface="Inter" pitchFamily="34" charset="0"/>
+                <a:ea typeface="Inter" pitchFamily="34" charset="-122"/>
+                <a:cs typeface="Inter" pitchFamily="34" charset="-120"/>
+              </a:rPr>
+              <a:t>5</a:t>
+            </a:r>
+            <a:endParaRPr lang="en-US" sz="1200" dirty="0"/>
+          </a:p>
+        </p:txBody>
+      </p:sp>
+      <p:sp>
+        <p:nvSpPr>
+          <p:cNvPr id="30" name="Text 27"/>
+          <p:cNvSpPr/>
+          <p:nvPr/>
+        </p:nvSpPr>
+        <p:spPr>
+          <a:xfrm>
+            <a:off x="1353312" y="3529584"/>
+            <a:ext cx="2377440" cy="512064"/>
+          </a:xfrm>
+          <a:prstGeom prst="rect">
+            <a:avLst/>
+          </a:prstGeom>
+          <a:noFill/>
+          <a:ln/>
+        </p:spPr>
+        <p:txBody>
+          <a:bodyPr wrap="square" lIns="0" tIns="0" rIns="0" bIns="0" rtlCol="0" anchor="ctr"/>
+          <a:lstStyle/>
+          <a:p>
+            <a:pPr indent="0" marL="0">
+              <a:buNone/>
+            </a:pPr>
+            <a:r>
+              <a:rPr lang="en-US" sz="1250" b="1" dirty="0">
+                <a:solidFill>
+                  <a:srgbClr val="08407C"/>
+                </a:solidFill>
+                <a:latin typeface="Inter" pitchFamily="34" charset="0"/>
+                <a:ea typeface="Inter" pitchFamily="34" charset="-122"/>
+                <a:cs typeface="Inter" pitchFamily="34" charset="-120"/>
+              </a:rPr>
+              <a:t>Guardar el respaldo</a:t>
+            </a:r>
+            <a:endParaRPr lang="en-US" sz="1250" dirty="0"/>
+          </a:p>
+        </p:txBody>
+      </p:sp>
+      <p:sp>
+        <p:nvSpPr>
+          <p:cNvPr id="31" name="Text 28"/>
+          <p:cNvSpPr/>
+          <p:nvPr/>
+        </p:nvSpPr>
+        <p:spPr>
+          <a:xfrm>
+            <a:off x="3803904" y="3529584"/>
+            <a:ext cx="4754880" cy="512064"/>
+          </a:xfrm>
+          <a:prstGeom prst="rect">
+            <a:avLst/>
+          </a:prstGeom>
+          <a:noFill/>
+          <a:ln/>
+        </p:spPr>
+        <p:txBody>
+          <a:bodyPr wrap="square" lIns="0" tIns="0" rIns="0" bIns="0" rtlCol="0" anchor="ctr"/>
+          <a:lstStyle/>
+          <a:p>
+            <a:pPr indent="0" marL="0">
+              <a:buNone/>
+            </a:pPr>
+            <a:r>
+              <a:rPr lang="en-US" sz="1100" dirty="0">
+                <a:solidFill>
+                  <a:srgbClr val="2E4258"/>
+                </a:solidFill>
+                <a:latin typeface="Inter" pitchFamily="34" charset="0"/>
+                <a:ea typeface="Inter" pitchFamily="34" charset="-122"/>
+                <a:cs typeface="Inter" pitchFamily="34" charset="-120"/>
+              </a:rPr>
+              <a:t>Mails y mensajes que confirman lo acordado.</a:t>
+            </a:r>
+            <a:endParaRPr lang="en-US" sz="1100" dirty="0"/>
+          </a:p>
+        </p:txBody>
+      </p:sp>
+      <p:sp>
+        <p:nvSpPr>
+          <p:cNvPr id="32" name="Shape 29"/>
+          <p:cNvSpPr/>
+          <p:nvPr/>
+        </p:nvSpPr>
+        <p:spPr>
+          <a:xfrm>
+            <a:off x="603504" y="4206240"/>
+            <a:ext cx="8083296" cy="658368"/>
+          </a:xfrm>
+          <a:prstGeom prst="roundRect">
+            <a:avLst>
+              <a:gd name="adj" fmla="val 12500"/>
+            </a:avLst>
+          </a:prstGeom>
+          <a:solidFill>
+            <a:srgbClr val="08407C"/>
+          </a:solidFill>
+          <a:ln w="12700">
+            <a:solidFill>
+              <a:srgbClr val="08407C"/>
+            </a:solidFill>
+            <a:prstDash val="solid"/>
+          </a:ln>
+        </p:spPr>
+      </p:sp>
+      <p:sp>
+        <p:nvSpPr>
+          <p:cNvPr id="33" name="Text 30"/>
+          <p:cNvSpPr/>
+          <p:nvPr/>
+        </p:nvSpPr>
+        <p:spPr>
+          <a:xfrm>
+            <a:off x="841248" y="4251960"/>
+            <a:ext cx="7626096" cy="201168"/>
+          </a:xfrm>
+          <a:prstGeom prst="rect">
+            <a:avLst/>
+          </a:prstGeom>
+          <a:noFill/>
+          <a:ln/>
+        </p:spPr>
+        <p:txBody>
+          <a:bodyPr wrap="square" lIns="0" tIns="0" rIns="0" bIns="0" rtlCol="0" anchor="ctr"/>
+          <a:lstStyle/>
+          <a:p>
+            <a:pPr indent="0" marL="0">
+              <a:buNone/>
+            </a:pPr>
+            <a:r>
+              <a:rPr lang="en-US" sz="900" b="1" spc="120" kern="0" dirty="0">
+                <a:solidFill>
+                  <a:srgbClr val="FFFFFF"/>
+                </a:solidFill>
+                <a:latin typeface="Inter" pitchFamily="34" charset="0"/>
+                <a:ea typeface="Inter" pitchFamily="34" charset="-122"/>
+                <a:cs typeface="Inter" pitchFamily="34" charset="-120"/>
+              </a:rPr>
+              <a:t>SI SOLO SE RECUERDA UNA COSA</a:t>
+            </a:r>
+            <a:endParaRPr lang="en-US" sz="900" dirty="0"/>
+          </a:p>
+        </p:txBody>
+      </p:sp>
+      <p:sp>
+        <p:nvSpPr>
+          <p:cNvPr id="34" name="Text 31"/>
+          <p:cNvSpPr/>
+          <p:nvPr/>
+        </p:nvSpPr>
+        <p:spPr>
+          <a:xfrm>
+            <a:off x="841248" y="4453128"/>
+            <a:ext cx="7607808" cy="347472"/>
+          </a:xfrm>
+          <a:prstGeom prst="rect">
+            <a:avLst/>
+          </a:prstGeom>
+          <a:noFill/>
+          <a:ln/>
+        </p:spPr>
+        <p:txBody>
+          <a:bodyPr wrap="square" lIns="0" tIns="0" rIns="0" bIns="0" rtlCol="0" anchor="ctr"/>
+          <a:lstStyle/>
+          <a:p>
+            <a:pPr indent="0" marL="0">
+              <a:lnSpc>
+                <a:spcPts val="1400"/>
+              </a:lnSpc>
+              <a:buNone/>
+            </a:pPr>
+            <a:r>
+              <a:rPr lang="en-US" sz="1100" dirty="0">
+                <a:solidFill>
+                  <a:srgbClr val="FFFFFF"/>
+                </a:solidFill>
+                <a:latin typeface="Inter" pitchFamily="34" charset="0"/>
+                <a:ea typeface="Inter" pitchFamily="34" charset="-122"/>
+                <a:cs typeface="Inter" pitchFamily="34" charset="-120"/>
+              </a:rPr>
+              <a:t>Preguntar primero y dejarlo por escrito.</a:t>
+            </a:r>
+            <a:endParaRPr lang="en-US" sz="1100" dirty="0"/>
+          </a:p>
+        </p:txBody>
+      </p:sp>
+    </p:spTree>
+  </p:cSld>
+  <p:clrMapOvr>
+    <a:masterClrMapping/>
+  </p:clrMapOvr>
+</p:sld>
+</file>
+
+<file path=ppt/slides/slide15.xml><?xml version="1.0" encoding="utf-8"?>
+<p:sld xmlns:a="http://schemas.openxmlformats.org/drawingml/2006/main" xmlns:r="http://schemas.openxmlformats.org/officeDocument/2006/relationships" xmlns:p="http://schemas.openxmlformats.org/presentationml/2006/main">
+  <p:cSld name="Slide 15">
+    <p:bg>
+      <p:bgPr>
+        <a:blipFill dpi="0" rotWithShape="1">
+          <a:blip r:embed="rId1">
+            <a:lum/>
+          </a:blip>
+          <a:srcRect/>
+          <a:stretch>
+            <a:fillRect/>
+          </a:stretch>
+        </a:blipFill>
+        <a:effectLst/>
+      </p:bgPr>
+    </p:bg>
+    <p:spTree>
+      <p:nvGrpSpPr>
+        <p:cNvPr id="1" name=""/>
+        <p:cNvGrpSpPr/>
+        <p:nvPr/>
+      </p:nvGrpSpPr>
+      <p:grpSpPr>
+        <a:xfrm>
+          <a:off x="0" y="0"/>
+          <a:ext cx="0" cy="0"/>
+          <a:chOff x="0" y="0"/>
+          <a:chExt cx="0" cy="0"/>
+        </a:xfrm>
+      </p:grpSpPr>
       <p:pic>
         <p:nvPicPr>
           <p:cNvPr id="2" name="Image 0" descr="/home/user/KrakRealEstate/capacitaciones/co-broking/brand/logo_stack.png">    </p:cNvPr>
@@ -10062,7 +10900,7 @@
                 <a:ea typeface="Inter" pitchFamily="34" charset="-122"/>
                 <a:cs typeface="Inter" pitchFamily="34" charset="-120"/>
               </a:rPr>
-              <a:t>Dos formas de asegurar el cobro</a:t>
+              <a:t>Acordar el reparto también da palanca</a:t>
             </a:r>
             <a:endParaRPr lang="en-US" sz="2600" dirty="0"/>
           </a:p>
@@ -10101,7 +10939,7 @@
                 <a:ea typeface="Inter" pitchFamily="34" charset="-122"/>
                 <a:cs typeface="Inter" pitchFamily="34" charset="-120"/>
               </a:rPr>
-              <a:t>El objetivo es prever: que nunca haya que ejecutar un cobro.</a:t>
+              <a:t>Con un número claro sobre la mesa, hay de dónde mover.</a:t>
             </a:r>
             <a:endParaRPr lang="en-US" sz="1200" dirty="0"/>
           </a:p>
@@ -10116,11 +10954,11 @@
         <p:spPr>
           <a:xfrm>
             <a:off x="603504" y="1188720"/>
-            <a:ext cx="3950208" cy="2148840"/>
+            <a:ext cx="3950208" cy="457200"/>
           </a:xfrm>
           <a:prstGeom prst="roundRect">
             <a:avLst>
-              <a:gd name="adj" fmla="val 3830"/>
+              <a:gd name="adj" fmla="val 18000"/>
             </a:avLst>
           </a:prstGeom>
           <a:solidFill>
@@ -10142,24 +10980,24 @@
         </p:nvSpPr>
         <p:spPr>
           <a:xfrm>
-            <a:off x="822960" y="1335024"/>
-            <a:ext cx="3511296" cy="201168"/>
-          </a:xfrm>
-          <a:prstGeom prst="rect">
-            <a:avLst/>
-          </a:prstGeom>
-          <a:noFill/>
-          <a:ln/>
-        </p:spPr>
-        <p:txBody>
-          <a:bodyPr wrap="square" lIns="0" tIns="0" rIns="0" bIns="0" rtlCol="0" anchor="ctr"/>
-          <a:lstStyle/>
-          <a:p>
-            <a:pPr indent="0" marL="0">
-              <a:buNone/>
-            </a:pPr>
-            <a:r>
-              <a:rPr lang="en-US" sz="900" b="1" spc="120" kern="0" dirty="0">
+            <a:off x="822960" y="1188720"/>
+            <a:ext cx="3584448" cy="457200"/>
+          </a:xfrm>
+          <a:prstGeom prst="rect">
+            <a:avLst/>
+          </a:prstGeom>
+          <a:noFill/>
+          <a:ln/>
+        </p:spPr>
+        <p:txBody>
+          <a:bodyPr wrap="square" lIns="0" tIns="0" rIns="0" bIns="0" rtlCol="0" anchor="ctr"/>
+          <a:lstStyle/>
+          <a:p>
+            <a:pPr indent="0" marL="0">
+              <a:buNone/>
+            </a:pPr>
+            <a:r>
+              <a:rPr lang="en-US" sz="1150" b="1" spc="100" kern="0" dirty="0">
                 <a:solidFill>
                   <a:srgbClr val="FFFFFF"/>
                 </a:solidFill>
@@ -10167,110 +11005,156 @@
                 <a:ea typeface="Inter" pitchFamily="34" charset="-122"/>
                 <a:cs typeface="Inter" pitchFamily="34" charset="-120"/>
               </a:rPr>
-              <a:t>FORMA A</a:t>
-            </a:r>
-            <a:endParaRPr lang="en-US" sz="900" dirty="0"/>
-          </a:p>
-        </p:txBody>
-      </p:sp>
-      <p:sp>
-        <p:nvSpPr>
-          <p:cNvPr id="9" name="Text 6"/>
-          <p:cNvSpPr/>
-          <p:nvPr/>
-        </p:nvSpPr>
-        <p:spPr>
-          <a:xfrm>
-            <a:off x="822960" y="1572768"/>
-            <a:ext cx="3511296" cy="457200"/>
-          </a:xfrm>
-          <a:prstGeom prst="rect">
-            <a:avLst/>
-          </a:prstGeom>
-          <a:noFill/>
-          <a:ln/>
-        </p:spPr>
-        <p:txBody>
-          <a:bodyPr wrap="square" lIns="0" tIns="0" rIns="0" bIns="0" rtlCol="0" anchor="t"/>
-          <a:lstStyle/>
-          <a:p>
-            <a:pPr indent="0" marL="0">
-              <a:lnSpc>
-                <a:spcPts val="2100"/>
-              </a:lnSpc>
-              <a:buNone/>
-            </a:pPr>
-            <a:r>
-              <a:rPr lang="en-US" sz="1800" b="1" dirty="0">
-                <a:solidFill>
-                  <a:srgbClr val="FFFFFF"/>
-                </a:solidFill>
-                <a:latin typeface="Inter" pitchFamily="34" charset="0"/>
-                <a:ea typeface="Inter" pitchFamily="34" charset="-122"/>
-                <a:cs typeface="Inter" pitchFamily="34" charset="-120"/>
-              </a:rPr>
-              <a:t>En la reserva</a:t>
-            </a:r>
-            <a:endParaRPr lang="en-US" sz="1800" dirty="0"/>
-          </a:p>
-        </p:txBody>
-      </p:sp>
-      <p:sp>
-        <p:nvSpPr>
-          <p:cNvPr id="10" name="Text 7"/>
-          <p:cNvSpPr/>
-          <p:nvPr/>
-        </p:nvSpPr>
-        <p:spPr>
-          <a:xfrm>
-            <a:off x="822960" y="2103120"/>
-            <a:ext cx="3511296" cy="1106424"/>
-          </a:xfrm>
-          <a:prstGeom prst="rect">
-            <a:avLst/>
-          </a:prstGeom>
-          <a:noFill/>
-          <a:ln/>
-        </p:spPr>
-        <p:txBody>
-          <a:bodyPr wrap="square" lIns="0" tIns="0" rIns="0" bIns="0" rtlCol="0" anchor="t"/>
-          <a:lstStyle/>
-          <a:p>
-            <a:pPr indent="0" marL="0">
-              <a:lnSpc>
-                <a:spcPts val="1400"/>
-              </a:lnSpc>
-              <a:buNone/>
-            </a:pPr>
-            <a:r>
-              <a:rPr lang="en-US" sz="1200" dirty="0">
-                <a:solidFill>
-                  <a:srgbClr val="EAEFF5"/>
-                </a:solidFill>
-                <a:latin typeface="Inter" pitchFamily="34" charset="0"/>
-                <a:ea typeface="Inter" pitchFamily="34" charset="-122"/>
-                <a:cs typeface="Inter" pitchFamily="34" charset="-120"/>
-              </a:rPr>
-              <a:t>La participación de cada colega queda escrita en el documento de la reserva, firmada por las partes.</a:t>
-            </a:r>
-            <a:endParaRPr lang="en-US" sz="1200" dirty="0"/>
-          </a:p>
-        </p:txBody>
-      </p:sp>
-      <p:sp>
-        <p:nvSpPr>
-          <p:cNvPr id="11" name="Shape 8"/>
-          <p:cNvSpPr/>
-          <p:nvPr/>
-        </p:nvSpPr>
-        <p:spPr>
-          <a:xfrm>
-            <a:off x="4736592" y="1188720"/>
-            <a:ext cx="3950208" cy="2148840"/>
+              <a:t>CUANDO HAY QUE CEDER</a:t>
+            </a:r>
+            <a:endParaRPr lang="en-US" sz="1150" dirty="0"/>
+          </a:p>
+        </p:txBody>
+      </p:sp>
+      <p:sp>
+        <p:nvSpPr>
+          <p:cNvPr id="9" name="Shape 6"/>
+          <p:cNvSpPr/>
+          <p:nvPr/>
+        </p:nvSpPr>
+        <p:spPr>
+          <a:xfrm>
+            <a:off x="603504" y="1700784"/>
+            <a:ext cx="3950208" cy="2011680"/>
           </a:xfrm>
           <a:prstGeom prst="roundRect">
             <a:avLst>
-              <a:gd name="adj" fmla="val 3830"/>
+              <a:gd name="adj" fmla="val 4091"/>
+            </a:avLst>
+          </a:prstGeom>
+          <a:solidFill>
+            <a:srgbClr val="F3F3F3"/>
+          </a:solidFill>
+          <a:ln w="12700">
+            <a:solidFill>
+              <a:srgbClr val="F3F3F3"/>
+            </a:solidFill>
+            <a:prstDash val="solid"/>
+          </a:ln>
+        </p:spPr>
+      </p:sp>
+      <p:sp>
+        <p:nvSpPr>
+          <p:cNvPr id="10" name="Text 7"/>
+          <p:cNvSpPr/>
+          <p:nvPr/>
+        </p:nvSpPr>
+        <p:spPr>
+          <a:xfrm>
+            <a:off x="822960" y="1792224"/>
+            <a:ext cx="3566160" cy="274320"/>
+          </a:xfrm>
+          <a:prstGeom prst="rect">
+            <a:avLst/>
+          </a:prstGeom>
+          <a:noFill/>
+          <a:ln/>
+        </p:spPr>
+        <p:txBody>
+          <a:bodyPr wrap="square" lIns="0" tIns="0" rIns="0" bIns="0" rtlCol="0" anchor="ctr"/>
+          <a:lstStyle/>
+          <a:p>
+            <a:pPr indent="0" marL="0">
+              <a:buNone/>
+            </a:pPr>
+            <a:r>
+              <a:rPr lang="en-US" sz="1150" b="1" dirty="0">
+                <a:solidFill>
+                  <a:srgbClr val="08407C"/>
+                </a:solidFill>
+                <a:latin typeface="Inter" pitchFamily="34" charset="0"/>
+                <a:ea typeface="Inter" pitchFamily="34" charset="-122"/>
+                <a:cs typeface="Inter" pitchFamily="34" charset="-120"/>
+              </a:rPr>
+              <a:t>Vos tenés margen para flexibilizar</a:t>
+            </a:r>
+            <a:endParaRPr lang="en-US" sz="1150" dirty="0"/>
+          </a:p>
+        </p:txBody>
+      </p:sp>
+      <p:sp>
+        <p:nvSpPr>
+          <p:cNvPr id="11" name="Text 8"/>
+          <p:cNvSpPr/>
+          <p:nvPr/>
+        </p:nvSpPr>
+        <p:spPr>
+          <a:xfrm>
+            <a:off x="859536" y="2139696"/>
+            <a:ext cx="3511296" cy="1508760"/>
+          </a:xfrm>
+          <a:prstGeom prst="rect">
+            <a:avLst/>
+          </a:prstGeom>
+          <a:noFill/>
+          <a:ln/>
+        </p:spPr>
+        <p:txBody>
+          <a:bodyPr wrap="square" lIns="0" tIns="0" rIns="0" bIns="0" rtlCol="0" anchor="t"/>
+          <a:lstStyle/>
+          <a:p>
+            <a:pPr marL="177800" indent="-177800">
+              <a:spcAft>
+                <a:spcPts val="700"/>
+              </a:spcAft>
+              <a:buSzPct val="100000"/>
+              <a:buChar char="•"/>
+            </a:pPr>
+            <a:r>
+              <a:rPr lang="en-US" sz="1100" dirty="0">
+                <a:solidFill>
+                  <a:srgbClr val="2E4258"/>
+                </a:solidFill>
+                <a:latin typeface="Inter" pitchFamily="34" charset="0"/>
+                <a:ea typeface="Inter" pitchFamily="34" charset="-122"/>
+                <a:cs typeface="Inter" pitchFamily="34" charset="-120"/>
+              </a:rPr>
+              <a:t>El cliente pide un descuento sobre los honorarios para poder cerrar.</a:t>
+            </a:r>
+            <a:endParaRPr lang="en-US" sz="1100" dirty="0"/>
+          </a:p>
+          <a:p>
+            <a:pPr marL="177800" indent="-177800">
+              <a:spcAft>
+                <a:spcPts val="700"/>
+              </a:spcAft>
+              <a:buSzPct val="100000"/>
+              <a:buChar char="•"/>
+            </a:pPr>
+            <a:r>
+              <a:rPr lang="en-US" sz="1100" dirty="0">
+                <a:solidFill>
+                  <a:srgbClr val="2E4258"/>
+                </a:solidFill>
+                <a:latin typeface="Inter" pitchFamily="34" charset="0"/>
+                <a:ea typeface="Inter" pitchFamily="34" charset="-122"/>
+                <a:cs typeface="Inter" pitchFamily="34" charset="-120"/>
+              </a:rPr>
+              <a:t>En un caso extremo, se le cede más al colega para que haga el esfuerzo que la operación necesita.</a:t>
+            </a:r>
+            <a:endParaRPr lang="en-US" sz="1100" dirty="0"/>
+          </a:p>
+        </p:txBody>
+      </p:sp>
+      <p:sp>
+        <p:nvSpPr>
+          <p:cNvPr id="12" name="Shape 9"/>
+          <p:cNvSpPr/>
+          <p:nvPr/>
+        </p:nvSpPr>
+        <p:spPr>
+          <a:xfrm>
+            <a:off x="4736592" y="1188720"/>
+            <a:ext cx="3950208" cy="457200"/>
+          </a:xfrm>
+          <a:prstGeom prst="roundRect">
+            <a:avLst>
+              <a:gd name="adj" fmla="val 18000"/>
             </a:avLst>
           </a:prstGeom>
           <a:solidFill>
@@ -10286,30 +11170,30 @@
       </p:sp>
       <p:sp>
         <p:nvSpPr>
-          <p:cNvPr id="12" name="Text 9"/>
-          <p:cNvSpPr/>
-          <p:nvPr/>
-        </p:nvSpPr>
-        <p:spPr>
-          <a:xfrm>
-            <a:off x="4956048" y="1335024"/>
-            <a:ext cx="3511296" cy="201168"/>
-          </a:xfrm>
-          <a:prstGeom prst="rect">
-            <a:avLst/>
-          </a:prstGeom>
-          <a:noFill/>
-          <a:ln/>
-        </p:spPr>
-        <p:txBody>
-          <a:bodyPr wrap="square" lIns="0" tIns="0" rIns="0" bIns="0" rtlCol="0" anchor="ctr"/>
-          <a:lstStyle/>
-          <a:p>
-            <a:pPr indent="0" marL="0">
-              <a:buNone/>
-            </a:pPr>
-            <a:r>
-              <a:rPr lang="en-US" sz="900" b="1" spc="120" kern="0" dirty="0">
+          <p:cNvPr id="13" name="Text 10"/>
+          <p:cNvSpPr/>
+          <p:nvPr/>
+        </p:nvSpPr>
+        <p:spPr>
+          <a:xfrm>
+            <a:off x="4956048" y="1188720"/>
+            <a:ext cx="3584448" cy="457200"/>
+          </a:xfrm>
+          <a:prstGeom prst="rect">
+            <a:avLst/>
+          </a:prstGeom>
+          <a:noFill/>
+          <a:ln/>
+        </p:spPr>
+        <p:txBody>
+          <a:bodyPr wrap="square" lIns="0" tIns="0" rIns="0" bIns="0" rtlCol="0" anchor="ctr"/>
+          <a:lstStyle/>
+          <a:p>
+            <a:pPr indent="0" marL="0">
+              <a:buNone/>
+            </a:pPr>
+            <a:r>
+              <a:rPr lang="en-US" sz="1150" b="1" spc="100" kern="0" dirty="0">
                 <a:solidFill>
                   <a:srgbClr val="FFFFFF"/>
                 </a:solidFill>
@@ -10317,22 +11201,88 @@
                 <a:ea typeface="Inter" pitchFamily="34" charset="-122"/>
                 <a:cs typeface="Inter" pitchFamily="34" charset="-120"/>
               </a:rPr>
-              <a:t>FORMA B</a:t>
-            </a:r>
-            <a:endParaRPr lang="en-US" sz="900" dirty="0"/>
-          </a:p>
-        </p:txBody>
-      </p:sp>
-      <p:sp>
-        <p:nvSpPr>
-          <p:cNvPr id="13" name="Text 10"/>
-          <p:cNvSpPr/>
-          <p:nvPr/>
-        </p:nvSpPr>
-        <p:spPr>
-          <a:xfrm>
-            <a:off x="4956048" y="1572768"/>
-            <a:ext cx="3511296" cy="457200"/>
+              <a:t>CUANDO TE COMPARTEN</a:t>
+            </a:r>
+            <a:endParaRPr lang="en-US" sz="1150" dirty="0"/>
+          </a:p>
+        </p:txBody>
+      </p:sp>
+      <p:sp>
+        <p:nvSpPr>
+          <p:cNvPr id="14" name="Shape 11"/>
+          <p:cNvSpPr/>
+          <p:nvPr/>
+        </p:nvSpPr>
+        <p:spPr>
+          <a:xfrm>
+            <a:off x="4736592" y="1700784"/>
+            <a:ext cx="3950208" cy="2011680"/>
+          </a:xfrm>
+          <a:prstGeom prst="roundRect">
+            <a:avLst>
+              <a:gd name="adj" fmla="val 4091"/>
+            </a:avLst>
+          </a:prstGeom>
+          <a:solidFill>
+            <a:srgbClr val="F3F3F3"/>
+          </a:solidFill>
+          <a:ln w="12700">
+            <a:solidFill>
+              <a:srgbClr val="F3F3F3"/>
+            </a:solidFill>
+            <a:prstDash val="solid"/>
+          </a:ln>
+        </p:spPr>
+      </p:sp>
+      <p:sp>
+        <p:nvSpPr>
+          <p:cNvPr id="15" name="Text 12"/>
+          <p:cNvSpPr/>
+          <p:nvPr/>
+        </p:nvSpPr>
+        <p:spPr>
+          <a:xfrm>
+            <a:off x="4956048" y="1792224"/>
+            <a:ext cx="3566160" cy="274320"/>
+          </a:xfrm>
+          <a:prstGeom prst="rect">
+            <a:avLst/>
+          </a:prstGeom>
+          <a:noFill/>
+          <a:ln/>
+        </p:spPr>
+        <p:txBody>
+          <a:bodyPr wrap="square" lIns="0" tIns="0" rIns="0" bIns="0" rtlCol="0" anchor="ctr"/>
+          <a:lstStyle/>
+          <a:p>
+            <a:pPr indent="0" marL="0">
+              <a:buNone/>
+            </a:pPr>
+            <a:r>
+              <a:rPr lang="en-US" sz="1150" b="1" dirty="0">
+                <a:solidFill>
+                  <a:srgbClr val="08407C"/>
+                </a:solidFill>
+                <a:latin typeface="Inter" pitchFamily="34" charset="0"/>
+                <a:ea typeface="Inter" pitchFamily="34" charset="-122"/>
+                <a:cs typeface="Inter" pitchFamily="34" charset="-120"/>
+              </a:rPr>
+              <a:t>Podés pedir más, con argumentos creíbles</a:t>
+            </a:r>
+            <a:endParaRPr lang="en-US" sz="1150" dirty="0"/>
+          </a:p>
+        </p:txBody>
+      </p:sp>
+      <p:sp>
+        <p:nvSpPr>
+          <p:cNvPr id="16" name="Text 13"/>
+          <p:cNvSpPr/>
+          <p:nvPr/>
+        </p:nvSpPr>
+        <p:spPr>
+          <a:xfrm>
+            <a:off x="4992624" y="2139696"/>
+            <a:ext cx="3511296" cy="1508760"/>
           </a:xfrm>
           <a:prstGeom prst="rect">
             <a:avLst/>
@@ -10344,78 +11294,79 @@
           <a:bodyPr wrap="square" lIns="0" tIns="0" rIns="0" bIns="0" rtlCol="0" anchor="t"/>
           <a:lstStyle/>
           <a:p>
-            <a:pPr indent="0" marL="0">
-              <a:lnSpc>
-                <a:spcPts val="2100"/>
-              </a:lnSpc>
-              <a:buNone/>
-            </a:pPr>
-            <a:r>
-              <a:rPr lang="en-US" sz="1800" b="1" dirty="0">
-                <a:solidFill>
-                  <a:srgbClr val="FFFFFF"/>
-                </a:solidFill>
-                <a:latin typeface="Inter" pitchFamily="34" charset="0"/>
-                <a:ea typeface="Inter" pitchFamily="34" charset="-122"/>
-                <a:cs typeface="Inter" pitchFamily="34" charset="-120"/>
-              </a:rPr>
-              <a:t>Convenio de honorarios</a:t>
-            </a:r>
-            <a:endParaRPr lang="en-US" sz="1800" dirty="0"/>
-          </a:p>
-        </p:txBody>
-      </p:sp>
-      <p:sp>
-        <p:nvSpPr>
-          <p:cNvPr id="14" name="Text 11"/>
-          <p:cNvSpPr/>
-          <p:nvPr/>
-        </p:nvSpPr>
-        <p:spPr>
-          <a:xfrm>
-            <a:off x="4956048" y="2103120"/>
-            <a:ext cx="3511296" cy="1106424"/>
-          </a:xfrm>
-          <a:prstGeom prst="rect">
-            <a:avLst/>
-          </a:prstGeom>
-          <a:noFill/>
-          <a:ln/>
-        </p:spPr>
-        <p:txBody>
-          <a:bodyPr wrap="square" lIns="0" tIns="0" rIns="0" bIns="0" rtlCol="0" anchor="t"/>
-          <a:lstStyle/>
-          <a:p>
-            <a:pPr indent="0" marL="0">
-              <a:lnSpc>
-                <a:spcPts val="1400"/>
-              </a:lnSpc>
-              <a:buNone/>
-            </a:pPr>
-            <a:r>
-              <a:rPr lang="en-US" sz="1200" dirty="0">
-                <a:solidFill>
-                  <a:srgbClr val="EAEFF5"/>
-                </a:solidFill>
-                <a:latin typeface="Inter" pitchFamily="34" charset="0"/>
-                <a:ea typeface="Inter" pitchFamily="34" charset="-122"/>
-                <a:cs typeface="Inter" pitchFamily="34" charset="-120"/>
-              </a:rPr>
-              <a:t>Un acuerdo escrito y firmado solo entre los colegas, aparte de la reserva, con lo que cobra cada uno.</a:t>
-            </a:r>
-            <a:endParaRPr lang="en-US" sz="1200" dirty="0"/>
-          </a:p>
-        </p:txBody>
-      </p:sp>
-      <p:sp>
-        <p:nvSpPr>
-          <p:cNvPr id="15" name="Shape 12"/>
-          <p:cNvSpPr/>
-          <p:nvPr/>
-        </p:nvSpPr>
-        <p:spPr>
-          <a:xfrm>
-            <a:off x="603504" y="3611880"/>
+            <a:pPr marL="177800" indent="-177800">
+              <a:spcAft>
+                <a:spcPts val="700"/>
+              </a:spcAft>
+              <a:buSzPct val="100000"/>
+              <a:buChar char="•"/>
+            </a:pPr>
+            <a:r>
+              <a:rPr lang="en-US" sz="1100" dirty="0">
+                <a:solidFill>
+                  <a:srgbClr val="2E4258"/>
+                </a:solidFill>
+                <a:latin typeface="Inter" pitchFamily="34" charset="0"/>
+                <a:ea typeface="Inter" pitchFamily="34" charset="-122"/>
+                <a:cs typeface="Inter" pitchFamily="34" charset="-120"/>
+              </a:rPr>
+              <a:t>“Mi cliente ya me pidió un descuento.”</a:t>
+            </a:r>
+            <a:endParaRPr lang="en-US" sz="1100" dirty="0"/>
+          </a:p>
+          <a:p>
+            <a:pPr marL="177800" indent="-177800">
+              <a:spcAft>
+                <a:spcPts val="700"/>
+              </a:spcAft>
+              <a:buSzPct val="100000"/>
+              <a:buChar char="•"/>
+            </a:pPr>
+            <a:r>
+              <a:rPr lang="en-US" sz="1100" dirty="0">
+                <a:solidFill>
+                  <a:srgbClr val="2E4258"/>
+                </a:solidFill>
+                <a:latin typeface="Inter" pitchFamily="34" charset="0"/>
+                <a:ea typeface="Inter" pitchFamily="34" charset="-122"/>
+                <a:cs typeface="Inter" pitchFamily="34" charset="-120"/>
+              </a:rPr>
+              <a:t>“Con este monto no me cierra dedicarle tiempo a la operación.”</a:t>
+            </a:r>
+            <a:endParaRPr lang="en-US" sz="1100" dirty="0"/>
+          </a:p>
+          <a:p>
+            <a:pPr marL="177800" indent="-177800">
+              <a:spcAft>
+                <a:spcPts val="700"/>
+              </a:spcAft>
+              <a:buSzPct val="100000"/>
+              <a:buChar char="•"/>
+            </a:pPr>
+            <a:r>
+              <a:rPr lang="en-US" sz="1100" dirty="0">
+                <a:solidFill>
+                  <a:srgbClr val="2E4258"/>
+                </a:solidFill>
+                <a:latin typeface="Inter" pitchFamily="34" charset="0"/>
+                <a:ea typeface="Inter" pitchFamily="34" charset="-122"/>
+                <a:cs typeface="Inter" pitchFamily="34" charset="-120"/>
+              </a:rPr>
+              <a:t>“Tengo un acuerdo con un productor o asesor del cliente.”</a:t>
+            </a:r>
+            <a:endParaRPr lang="en-US" sz="1100" dirty="0"/>
+          </a:p>
+        </p:txBody>
+      </p:sp>
+      <p:sp>
+        <p:nvSpPr>
+          <p:cNvPr id="17" name="Shape 14"/>
+          <p:cNvSpPr/>
+          <p:nvPr/>
+        </p:nvSpPr>
+        <p:spPr>
+          <a:xfrm>
+            <a:off x="603504" y="3931920"/>
             <a:ext cx="8083296" cy="658368"/>
           </a:xfrm>
           <a:prstGeom prst="roundRect">
@@ -10424,11 +11375,11 @@
             </a:avLst>
           </a:prstGeom>
           <a:solidFill>
-            <a:srgbClr val="4E586E"/>
+            <a:srgbClr val="08407C"/>
           </a:solidFill>
           <a:ln w="12700">
             <a:solidFill>
-              <a:srgbClr val="4E586E"/>
+              <a:srgbClr val="08407C"/>
             </a:solidFill>
             <a:prstDash val="solid"/>
           </a:ln>
@@ -10436,13 +11387,13 @@
       </p:sp>
       <p:sp>
         <p:nvSpPr>
-          <p:cNvPr id="16" name="Text 13"/>
-          <p:cNvSpPr/>
-          <p:nvPr/>
-        </p:nvSpPr>
-        <p:spPr>
-          <a:xfrm>
-            <a:off x="841248" y="3657600"/>
+          <p:cNvPr id="18" name="Text 15"/>
+          <p:cNvSpPr/>
+          <p:nvPr/>
+        </p:nvSpPr>
+        <p:spPr>
+          <a:xfrm>
+            <a:off x="841248" y="3977640"/>
             <a:ext cx="7626096" cy="201168"/>
           </a:xfrm>
           <a:prstGeom prst="rect">
@@ -10467,7 +11418,7 @@
                 <a:ea typeface="Inter" pitchFamily="34" charset="-122"/>
                 <a:cs typeface="Inter" pitchFamily="34" charset="-120"/>
               </a:rPr>
-              <a:t>PRINCIPIO</a:t>
+              <a:t>PARA QUÉ SIRVE ACORDARLO PRIMERO</a:t>
             </a:r>
             <a:endParaRPr lang="en-US" sz="900" dirty="0"/>
           </a:p>
@@ -10475,13 +11426,13 @@
       </p:sp>
       <p:sp>
         <p:nvSpPr>
-          <p:cNvPr id="17" name="Text 14"/>
-          <p:cNvSpPr/>
-          <p:nvPr/>
-        </p:nvSpPr>
-        <p:spPr>
-          <a:xfrm>
-            <a:off x="841248" y="3858768"/>
+          <p:cNvPr id="19" name="Text 16"/>
+          <p:cNvSpPr/>
+          <p:nvPr/>
+        </p:nvSpPr>
+        <p:spPr>
+          <a:xfrm>
+            <a:off x="841248" y="4178808"/>
             <a:ext cx="7607808" cy="347472"/>
           </a:xfrm>
           <a:prstGeom prst="rect">
@@ -10509,7 +11460,7 @@
                 <a:ea typeface="Inter" pitchFamily="34" charset="-122"/>
                 <a:cs typeface="Inter" pitchFamily="34" charset="-120"/>
               </a:rPr>
-              <a:t>Hay que dejarlo por escrito. El objetivo no es poder reclamar un cobro: es evitar que el malentendido exista.</a:t>
+              <a:t>Cada uno sabe por cuánto trabaja y hay margen para negociar. Los argumentos tienen que ser reales.</a:t>
             </a:r>
             <a:endParaRPr lang="en-US" sz="1100" dirty="0"/>
           </a:p>
@@ -10661,7 +11612,7 @@
                 <a:ea typeface="Inter" pitchFamily="34" charset="-122"/>
                 <a:cs typeface="Inter" pitchFamily="34" charset="-120"/>
               </a:rPr>
-              <a:t>¿Reserva o convenio?</a:t>
+              <a:t>Dos formas de asegurar el cobro</a:t>
             </a:r>
             <a:endParaRPr lang="en-US" sz="2600" dirty="0"/>
           </a:p>
@@ -10700,7 +11651,7 @@
                 <a:ea typeface="Inter" pitchFamily="34" charset="-122"/>
                 <a:cs typeface="Inter" pitchFamily="34" charset="-120"/>
               </a:rPr>
-              <a:t>Depende de quién tiene que ver el acuerdo.</a:t>
+              <a:t>El objetivo es prever: que nunca haya que ejecutar un cobro.</a:t>
             </a:r>
             <a:endParaRPr lang="en-US" sz="1200" dirty="0"/>
           </a:p>
@@ -10715,11 +11666,11 @@
         <p:spPr>
           <a:xfrm>
             <a:off x="603504" y="1188720"/>
-            <a:ext cx="3950208" cy="457200"/>
+            <a:ext cx="3950208" cy="2148840"/>
           </a:xfrm>
           <a:prstGeom prst="roundRect">
             <a:avLst>
-              <a:gd name="adj" fmla="val 18000"/>
+              <a:gd name="adj" fmla="val 3830"/>
             </a:avLst>
           </a:prstGeom>
           <a:solidFill>
@@ -10741,24 +11692,24 @@
         </p:nvSpPr>
         <p:spPr>
           <a:xfrm>
-            <a:off x="822960" y="1188720"/>
-            <a:ext cx="3584448" cy="457200"/>
-          </a:xfrm>
-          <a:prstGeom prst="rect">
-            <a:avLst/>
-          </a:prstGeom>
-          <a:noFill/>
-          <a:ln/>
-        </p:spPr>
-        <p:txBody>
-          <a:bodyPr wrap="square" lIns="0" tIns="0" rIns="0" bIns="0" rtlCol="0" anchor="ctr"/>
-          <a:lstStyle/>
-          <a:p>
-            <a:pPr indent="0" marL="0">
-              <a:buNone/>
-            </a:pPr>
-            <a:r>
-              <a:rPr lang="en-US" sz="1150" b="1" spc="100" kern="0" dirty="0">
+            <a:off x="822960" y="1335024"/>
+            <a:ext cx="3511296" cy="201168"/>
+          </a:xfrm>
+          <a:prstGeom prst="rect">
+            <a:avLst/>
+          </a:prstGeom>
+          <a:noFill/>
+          <a:ln/>
+        </p:spPr>
+        <p:txBody>
+          <a:bodyPr wrap="square" lIns="0" tIns="0" rIns="0" bIns="0" rtlCol="0" anchor="ctr"/>
+          <a:lstStyle/>
+          <a:p>
+            <a:pPr indent="0" marL="0">
+              <a:buNone/>
+            </a:pPr>
+            <a:r>
+              <a:rPr lang="en-US" sz="900" b="1" spc="120" kern="0" dirty="0">
                 <a:solidFill>
                   <a:srgbClr val="FFFFFF"/>
                 </a:solidFill>
@@ -10766,177 +11717,110 @@
                 <a:ea typeface="Inter" pitchFamily="34" charset="-122"/>
                 <a:cs typeface="Inter" pitchFamily="34" charset="-120"/>
               </a:rPr>
-              <a:t>EN LA RESERVA</a:t>
-            </a:r>
-            <a:endParaRPr lang="en-US" sz="1150" dirty="0"/>
-          </a:p>
-        </p:txBody>
-      </p:sp>
-      <p:sp>
-        <p:nvSpPr>
-          <p:cNvPr id="9" name="Shape 6"/>
-          <p:cNvSpPr/>
-          <p:nvPr/>
-        </p:nvSpPr>
-        <p:spPr>
-          <a:xfrm>
-            <a:off x="603504" y="1700784"/>
-            <a:ext cx="3950208" cy="1965960"/>
+              <a:t>FORMA A</a:t>
+            </a:r>
+            <a:endParaRPr lang="en-US" sz="900" dirty="0"/>
+          </a:p>
+        </p:txBody>
+      </p:sp>
+      <p:sp>
+        <p:nvSpPr>
+          <p:cNvPr id="9" name="Text 6"/>
+          <p:cNvSpPr/>
+          <p:nvPr/>
+        </p:nvSpPr>
+        <p:spPr>
+          <a:xfrm>
+            <a:off x="822960" y="1572768"/>
+            <a:ext cx="3511296" cy="457200"/>
+          </a:xfrm>
+          <a:prstGeom prst="rect">
+            <a:avLst/>
+          </a:prstGeom>
+          <a:noFill/>
+          <a:ln/>
+        </p:spPr>
+        <p:txBody>
+          <a:bodyPr wrap="square" lIns="0" tIns="0" rIns="0" bIns="0" rtlCol="0" anchor="t"/>
+          <a:lstStyle/>
+          <a:p>
+            <a:pPr indent="0" marL="0">
+              <a:lnSpc>
+                <a:spcPts val="2100"/>
+              </a:lnSpc>
+              <a:buNone/>
+            </a:pPr>
+            <a:r>
+              <a:rPr lang="en-US" sz="1800" b="1" dirty="0">
+                <a:solidFill>
+                  <a:srgbClr val="FFFFFF"/>
+                </a:solidFill>
+                <a:latin typeface="Inter" pitchFamily="34" charset="0"/>
+                <a:ea typeface="Inter" pitchFamily="34" charset="-122"/>
+                <a:cs typeface="Inter" pitchFamily="34" charset="-120"/>
+              </a:rPr>
+              <a:t>En la reserva</a:t>
+            </a:r>
+            <a:endParaRPr lang="en-US" sz="1800" dirty="0"/>
+          </a:p>
+        </p:txBody>
+      </p:sp>
+      <p:sp>
+        <p:nvSpPr>
+          <p:cNvPr id="10" name="Text 7"/>
+          <p:cNvSpPr/>
+          <p:nvPr/>
+        </p:nvSpPr>
+        <p:spPr>
+          <a:xfrm>
+            <a:off x="822960" y="2103120"/>
+            <a:ext cx="3511296" cy="1106424"/>
+          </a:xfrm>
+          <a:prstGeom prst="rect">
+            <a:avLst/>
+          </a:prstGeom>
+          <a:noFill/>
+          <a:ln/>
+        </p:spPr>
+        <p:txBody>
+          <a:bodyPr wrap="square" lIns="0" tIns="0" rIns="0" bIns="0" rtlCol="0" anchor="t"/>
+          <a:lstStyle/>
+          <a:p>
+            <a:pPr indent="0" marL="0">
+              <a:lnSpc>
+                <a:spcPts val="1400"/>
+              </a:lnSpc>
+              <a:buNone/>
+            </a:pPr>
+            <a:r>
+              <a:rPr lang="en-US" sz="1200" dirty="0">
+                <a:solidFill>
+                  <a:srgbClr val="EAEFF5"/>
+                </a:solidFill>
+                <a:latin typeface="Inter" pitchFamily="34" charset="0"/>
+                <a:ea typeface="Inter" pitchFamily="34" charset="-122"/>
+                <a:cs typeface="Inter" pitchFamily="34" charset="-120"/>
+              </a:rPr>
+              <a:t>La participación de cada colega queda escrita en el documento de la reserva, firmada por las partes.</a:t>
+            </a:r>
+            <a:endParaRPr lang="en-US" sz="1200" dirty="0"/>
+          </a:p>
+        </p:txBody>
+      </p:sp>
+      <p:sp>
+        <p:nvSpPr>
+          <p:cNvPr id="11" name="Shape 8"/>
+          <p:cNvSpPr/>
+          <p:nvPr/>
+        </p:nvSpPr>
+        <p:spPr>
+          <a:xfrm>
+            <a:off x="4736592" y="1188720"/>
+            <a:ext cx="3950208" cy="2148840"/>
           </a:xfrm>
           <a:prstGeom prst="roundRect">
             <a:avLst>
-              <a:gd name="adj" fmla="val 4186"/>
-            </a:avLst>
-          </a:prstGeom>
-          <a:solidFill>
-            <a:srgbClr val="F3F3F3"/>
-          </a:solidFill>
-          <a:ln w="12700">
-            <a:solidFill>
-              <a:srgbClr val="F3F3F3"/>
-            </a:solidFill>
-            <a:prstDash val="solid"/>
-          </a:ln>
-        </p:spPr>
-      </p:sp>
-      <p:sp>
-        <p:nvSpPr>
-          <p:cNvPr id="10" name="Text 7"/>
-          <p:cNvSpPr/>
-          <p:nvPr/>
-        </p:nvSpPr>
-        <p:spPr>
-          <a:xfrm>
-            <a:off x="822960" y="1792224"/>
-            <a:ext cx="3566160" cy="274320"/>
-          </a:xfrm>
-          <a:prstGeom prst="rect">
-            <a:avLst/>
-          </a:prstGeom>
-          <a:noFill/>
-          <a:ln/>
-        </p:spPr>
-        <p:txBody>
-          <a:bodyPr wrap="square" lIns="0" tIns="0" rIns="0" bIns="0" rtlCol="0" anchor="ctr"/>
-          <a:lstStyle/>
-          <a:p>
-            <a:pPr indent="0" marL="0">
-              <a:buNone/>
-            </a:pPr>
-            <a:r>
-              <a:rPr lang="en-US" sz="1150" b="1" dirty="0">
-                <a:solidFill>
-                  <a:srgbClr val="08407C"/>
-                </a:solidFill>
-                <a:latin typeface="Inter" pitchFamily="34" charset="0"/>
-                <a:ea typeface="Inter" pitchFamily="34" charset="-122"/>
-                <a:cs typeface="Inter" pitchFamily="34" charset="-120"/>
-              </a:rPr>
-              <a:t>Visible para las partes de la operación</a:t>
-            </a:r>
-            <a:endParaRPr lang="en-US" sz="1150" dirty="0"/>
-          </a:p>
-        </p:txBody>
-      </p:sp>
-      <p:sp>
-        <p:nvSpPr>
-          <p:cNvPr id="11" name="Text 8"/>
-          <p:cNvSpPr/>
-          <p:nvPr/>
-        </p:nvSpPr>
-        <p:spPr>
-          <a:xfrm>
-            <a:off x="859536" y="2139696"/>
-            <a:ext cx="3511296" cy="1417320"/>
-          </a:xfrm>
-          <a:prstGeom prst="rect">
-            <a:avLst/>
-          </a:prstGeom>
-          <a:noFill/>
-          <a:ln/>
-        </p:spPr>
-        <p:txBody>
-          <a:bodyPr wrap="square" lIns="0" tIns="0" rIns="0" bIns="0" rtlCol="0" anchor="t"/>
-          <a:lstStyle/>
-          <a:p>
-            <a:pPr marL="177800" indent="-177800">
-              <a:spcAft>
-                <a:spcPts val="700"/>
-              </a:spcAft>
-              <a:buSzPct val="100000"/>
-              <a:buChar char="•"/>
-            </a:pPr>
-            <a:r>
-              <a:rPr lang="en-US" sz="1100" dirty="0">
-                <a:solidFill>
-                  <a:srgbClr val="2E4258"/>
-                </a:solidFill>
-                <a:latin typeface="Inter" pitchFamily="34" charset="0"/>
-                <a:ea typeface="Inter" pitchFamily="34" charset="-122"/>
-                <a:cs typeface="Inter" pitchFamily="34" charset="-120"/>
-              </a:rPr>
-              <a:t>Sirve cuando no hay nada que proteger.</a:t>
-            </a:r>
-            <a:endParaRPr lang="en-US" sz="1100" dirty="0"/>
-          </a:p>
-          <a:p>
-            <a:pPr marL="177800" indent="-177800">
-              <a:spcAft>
-                <a:spcPts val="700"/>
-              </a:spcAft>
-              <a:buSzPct val="100000"/>
-              <a:buChar char="•"/>
-            </a:pPr>
-            <a:r>
-              <a:rPr lang="en-US" sz="1100" dirty="0">
-                <a:solidFill>
-                  <a:srgbClr val="2E4258"/>
-                </a:solidFill>
-                <a:latin typeface="Inter" pitchFamily="34" charset="0"/>
-                <a:ea typeface="Inter" pitchFamily="34" charset="-122"/>
-                <a:cs typeface="Inter" pitchFamily="34" charset="-120"/>
-              </a:rPr>
-              <a:t>Deja la participación de cada uno dentro del mismo documento.</a:t>
-            </a:r>
-            <a:endParaRPr lang="en-US" sz="1100" dirty="0"/>
-          </a:p>
-          <a:p>
-            <a:pPr marL="177800" indent="-177800">
-              <a:spcAft>
-                <a:spcPts val="700"/>
-              </a:spcAft>
-              <a:buSzPct val="100000"/>
-              <a:buChar char="•"/>
-            </a:pPr>
-            <a:r>
-              <a:rPr lang="en-US" sz="1100" dirty="0">
-                <a:solidFill>
-                  <a:srgbClr val="2E4258"/>
-                </a:solidFill>
-                <a:latin typeface="Inter" pitchFamily="34" charset="0"/>
-                <a:ea typeface="Inter" pitchFamily="34" charset="-122"/>
-                <a:cs typeface="Inter" pitchFamily="34" charset="-120"/>
-              </a:rPr>
-              <a:t>Es lo más simple de armar.</a:t>
-            </a:r>
-            <a:endParaRPr lang="en-US" sz="1100" dirty="0"/>
-          </a:p>
-        </p:txBody>
-      </p:sp>
-      <p:sp>
-        <p:nvSpPr>
-          <p:cNvPr id="12" name="Shape 9"/>
-          <p:cNvSpPr/>
-          <p:nvPr/>
-        </p:nvSpPr>
-        <p:spPr>
-          <a:xfrm>
-            <a:off x="4736592" y="1188720"/>
-            <a:ext cx="3950208" cy="457200"/>
-          </a:xfrm>
-          <a:prstGeom prst="roundRect">
-            <a:avLst>
-              <a:gd name="adj" fmla="val 18000"/>
+              <a:gd name="adj" fmla="val 3830"/>
             </a:avLst>
           </a:prstGeom>
           <a:solidFill>
@@ -10952,30 +11836,72 @@
       </p:sp>
       <p:sp>
         <p:nvSpPr>
+          <p:cNvPr id="12" name="Text 9"/>
+          <p:cNvSpPr/>
+          <p:nvPr/>
+        </p:nvSpPr>
+        <p:spPr>
+          <a:xfrm>
+            <a:off x="4956048" y="1335024"/>
+            <a:ext cx="3511296" cy="201168"/>
+          </a:xfrm>
+          <a:prstGeom prst="rect">
+            <a:avLst/>
+          </a:prstGeom>
+          <a:noFill/>
+          <a:ln/>
+        </p:spPr>
+        <p:txBody>
+          <a:bodyPr wrap="square" lIns="0" tIns="0" rIns="0" bIns="0" rtlCol="0" anchor="ctr"/>
+          <a:lstStyle/>
+          <a:p>
+            <a:pPr indent="0" marL="0">
+              <a:buNone/>
+            </a:pPr>
+            <a:r>
+              <a:rPr lang="en-US" sz="900" b="1" spc="120" kern="0" dirty="0">
+                <a:solidFill>
+                  <a:srgbClr val="FFFFFF"/>
+                </a:solidFill>
+                <a:latin typeface="Inter" pitchFamily="34" charset="0"/>
+                <a:ea typeface="Inter" pitchFamily="34" charset="-122"/>
+                <a:cs typeface="Inter" pitchFamily="34" charset="-120"/>
+              </a:rPr>
+              <a:t>FORMA B</a:t>
+            </a:r>
+            <a:endParaRPr lang="en-US" sz="900" dirty="0"/>
+          </a:p>
+        </p:txBody>
+      </p:sp>
+      <p:sp>
+        <p:nvSpPr>
           <p:cNvPr id="13" name="Text 10"/>
           <p:cNvSpPr/>
           <p:nvPr/>
         </p:nvSpPr>
         <p:spPr>
           <a:xfrm>
-            <a:off x="4956048" y="1188720"/>
-            <a:ext cx="3584448" cy="457200"/>
-          </a:xfrm>
-          <a:prstGeom prst="rect">
-            <a:avLst/>
-          </a:prstGeom>
-          <a:noFill/>
-          <a:ln/>
-        </p:spPr>
-        <p:txBody>
-          <a:bodyPr wrap="square" lIns="0" tIns="0" rIns="0" bIns="0" rtlCol="0" anchor="ctr"/>
-          <a:lstStyle/>
-          <a:p>
-            <a:pPr indent="0" marL="0">
-              <a:buNone/>
-            </a:pPr>
-            <a:r>
-              <a:rPr lang="en-US" sz="1150" b="1" spc="100" kern="0" dirty="0">
+            <a:off x="4956048" y="1572768"/>
+            <a:ext cx="3511296" cy="457200"/>
+          </a:xfrm>
+          <a:prstGeom prst="rect">
+            <a:avLst/>
+          </a:prstGeom>
+          <a:noFill/>
+          <a:ln/>
+        </p:spPr>
+        <p:txBody>
+          <a:bodyPr wrap="square" lIns="0" tIns="0" rIns="0" bIns="0" rtlCol="0" anchor="t"/>
+          <a:lstStyle/>
+          <a:p>
+            <a:pPr indent="0" marL="0">
+              <a:lnSpc>
+                <a:spcPts val="2100"/>
+              </a:lnSpc>
+              <a:buNone/>
+            </a:pPr>
+            <a:r>
+              <a:rPr lang="en-US" sz="1800" b="1" dirty="0">
                 <a:solidFill>
                   <a:srgbClr val="FFFFFF"/>
                 </a:solidFill>
@@ -10983,88 +11909,22 @@
                 <a:ea typeface="Inter" pitchFamily="34" charset="-122"/>
                 <a:cs typeface="Inter" pitchFamily="34" charset="-120"/>
               </a:rPr>
-              <a:t>EN UN CONVENIO</a:t>
-            </a:r>
-            <a:endParaRPr lang="en-US" sz="1150" dirty="0"/>
-          </a:p>
-        </p:txBody>
-      </p:sp>
-      <p:sp>
-        <p:nvSpPr>
-          <p:cNvPr id="14" name="Shape 11"/>
-          <p:cNvSpPr/>
-          <p:nvPr/>
-        </p:nvSpPr>
-        <p:spPr>
-          <a:xfrm>
-            <a:off x="4736592" y="1700784"/>
-            <a:ext cx="3950208" cy="1965960"/>
-          </a:xfrm>
-          <a:prstGeom prst="roundRect">
-            <a:avLst>
-              <a:gd name="adj" fmla="val 4186"/>
-            </a:avLst>
-          </a:prstGeom>
-          <a:solidFill>
-            <a:srgbClr val="F3F3F3"/>
-          </a:solidFill>
-          <a:ln w="12700">
-            <a:solidFill>
-              <a:srgbClr val="F3F3F3"/>
-            </a:solidFill>
-            <a:prstDash val="solid"/>
-          </a:ln>
-        </p:spPr>
-      </p:sp>
-      <p:sp>
-        <p:nvSpPr>
-          <p:cNvPr id="15" name="Text 12"/>
-          <p:cNvSpPr/>
-          <p:nvPr/>
-        </p:nvSpPr>
-        <p:spPr>
-          <a:xfrm>
-            <a:off x="4956048" y="1792224"/>
-            <a:ext cx="3566160" cy="274320"/>
-          </a:xfrm>
-          <a:prstGeom prst="rect">
-            <a:avLst/>
-          </a:prstGeom>
-          <a:noFill/>
-          <a:ln/>
-        </p:spPr>
-        <p:txBody>
-          <a:bodyPr wrap="square" lIns="0" tIns="0" rIns="0" bIns="0" rtlCol="0" anchor="ctr"/>
-          <a:lstStyle/>
-          <a:p>
-            <a:pPr indent="0" marL="0">
-              <a:buNone/>
-            </a:pPr>
-            <a:r>
-              <a:rPr lang="en-US" sz="1150" b="1" dirty="0">
-                <a:solidFill>
-                  <a:srgbClr val="08407C"/>
-                </a:solidFill>
-                <a:latin typeface="Inter" pitchFamily="34" charset="0"/>
-                <a:ea typeface="Inter" pitchFamily="34" charset="-122"/>
-                <a:cs typeface="Inter" pitchFamily="34" charset="-120"/>
-              </a:rPr>
-              <a:t>Privado entre los colegas</a:t>
-            </a:r>
-            <a:endParaRPr lang="en-US" sz="1150" dirty="0"/>
-          </a:p>
-        </p:txBody>
-      </p:sp>
-      <p:sp>
-        <p:nvSpPr>
-          <p:cNvPr id="16" name="Text 13"/>
-          <p:cNvSpPr/>
-          <p:nvPr/>
-        </p:nvSpPr>
-        <p:spPr>
-          <a:xfrm>
-            <a:off x="4992624" y="2139696"/>
-            <a:ext cx="3511296" cy="1417320"/>
+              <a:t>Convenio de honorarios</a:t>
+            </a:r>
+            <a:endParaRPr lang="en-US" sz="1800" dirty="0"/>
+          </a:p>
+        </p:txBody>
+      </p:sp>
+      <p:sp>
+        <p:nvSpPr>
+          <p:cNvPr id="14" name="Text 11"/>
+          <p:cNvSpPr/>
+          <p:nvPr/>
+        </p:nvSpPr>
+        <p:spPr>
+          <a:xfrm>
+            <a:off x="4956048" y="2103120"/>
+            <a:ext cx="3511296" cy="1106424"/>
           </a:xfrm>
           <a:prstGeom prst="rect">
             <a:avLst/>
@@ -11076,79 +11936,36 @@
           <a:bodyPr wrap="square" lIns="0" tIns="0" rIns="0" bIns="0" rtlCol="0" anchor="t"/>
           <a:lstStyle/>
           <a:p>
-            <a:pPr marL="177800" indent="-177800">
-              <a:spcAft>
-                <a:spcPts val="700"/>
-              </a:spcAft>
-              <a:buSzPct val="100000"/>
-              <a:buChar char="•"/>
-            </a:pPr>
-            <a:r>
-              <a:rPr lang="en-US" sz="1100" dirty="0">
-                <a:solidFill>
-                  <a:srgbClr val="2E4258"/>
-                </a:solidFill>
-                <a:latin typeface="Inter" pitchFamily="34" charset="0"/>
-                <a:ea typeface="Inter" pitchFamily="34" charset="-122"/>
-                <a:cs typeface="Inter" pitchFamily="34" charset="-120"/>
-              </a:rPr>
-              <a:t>Protege la identidad de uno de los colegas cuando la operación lo requiere.</a:t>
-            </a:r>
-            <a:endParaRPr lang="en-US" sz="1100" dirty="0"/>
-          </a:p>
-          <a:p>
-            <a:pPr marL="177800" indent="-177800">
-              <a:spcAft>
-                <a:spcPts val="700"/>
-              </a:spcAft>
-              <a:buSzPct val="100000"/>
-              <a:buChar char="•"/>
-            </a:pPr>
-            <a:r>
-              <a:rPr lang="en-US" sz="1100" dirty="0">
-                <a:solidFill>
-                  <a:srgbClr val="2E4258"/>
-                </a:solidFill>
-                <a:latin typeface="Inter" pitchFamily="34" charset="0"/>
-                <a:ea typeface="Inter" pitchFamily="34" charset="-122"/>
-                <a:cs typeface="Inter" pitchFamily="34" charset="-120"/>
-              </a:rPr>
-              <a:t>No expone la relación entre las distintas marcas.</a:t>
-            </a:r>
-            <a:endParaRPr lang="en-US" sz="1100" dirty="0"/>
-          </a:p>
-          <a:p>
-            <a:pPr marL="177800" indent="-177800">
-              <a:spcAft>
-                <a:spcPts val="700"/>
-              </a:spcAft>
-              <a:buSzPct val="100000"/>
-              <a:buChar char="•"/>
-            </a:pPr>
-            <a:r>
-              <a:rPr lang="en-US" sz="1100" dirty="0">
-                <a:solidFill>
-                  <a:srgbClr val="2E4258"/>
-                </a:solidFill>
-                <a:latin typeface="Inter" pitchFamily="34" charset="0"/>
-                <a:ea typeface="Inter" pitchFamily="34" charset="-122"/>
-                <a:cs typeface="Inter" pitchFamily="34" charset="-120"/>
-              </a:rPr>
-              <a:t>Deja el reparto fuera de la reserva.</a:t>
-            </a:r>
-            <a:endParaRPr lang="en-US" sz="1100" dirty="0"/>
-          </a:p>
-        </p:txBody>
-      </p:sp>
-      <p:sp>
-        <p:nvSpPr>
-          <p:cNvPr id="17" name="Shape 14"/>
-          <p:cNvSpPr/>
-          <p:nvPr/>
-        </p:nvSpPr>
-        <p:spPr>
-          <a:xfrm>
-            <a:off x="603504" y="3931920"/>
+            <a:pPr indent="0" marL="0">
+              <a:lnSpc>
+                <a:spcPts val="1400"/>
+              </a:lnSpc>
+              <a:buNone/>
+            </a:pPr>
+            <a:r>
+              <a:rPr lang="en-US" sz="1200" dirty="0">
+                <a:solidFill>
+                  <a:srgbClr val="EAEFF5"/>
+                </a:solidFill>
+                <a:latin typeface="Inter" pitchFamily="34" charset="0"/>
+                <a:ea typeface="Inter" pitchFamily="34" charset="-122"/>
+                <a:cs typeface="Inter" pitchFamily="34" charset="-120"/>
+              </a:rPr>
+              <a:t>Un acuerdo escrito y firmado solo entre los colegas, aparte de la reserva, con lo que cobra cada uno.</a:t>
+            </a:r>
+            <a:endParaRPr lang="en-US" sz="1200" dirty="0"/>
+          </a:p>
+        </p:txBody>
+      </p:sp>
+      <p:sp>
+        <p:nvSpPr>
+          <p:cNvPr id="15" name="Shape 12"/>
+          <p:cNvSpPr/>
+          <p:nvPr/>
+        </p:nvSpPr>
+        <p:spPr>
+          <a:xfrm>
+            <a:off x="603504" y="3611880"/>
             <a:ext cx="8083296" cy="658368"/>
           </a:xfrm>
           <a:prstGeom prst="roundRect">
@@ -11157,11 +11974,11 @@
             </a:avLst>
           </a:prstGeom>
           <a:solidFill>
-            <a:srgbClr val="08407C"/>
+            <a:srgbClr val="4E586E"/>
           </a:solidFill>
           <a:ln w="12700">
             <a:solidFill>
-              <a:srgbClr val="08407C"/>
+              <a:srgbClr val="4E586E"/>
             </a:solidFill>
             <a:prstDash val="solid"/>
           </a:ln>
@@ -11169,13 +11986,13 @@
       </p:sp>
       <p:sp>
         <p:nvSpPr>
-          <p:cNvPr id="18" name="Text 15"/>
-          <p:cNvSpPr/>
-          <p:nvPr/>
-        </p:nvSpPr>
-        <p:spPr>
-          <a:xfrm>
-            <a:off x="841248" y="3977640"/>
+          <p:cNvPr id="16" name="Text 13"/>
+          <p:cNvSpPr/>
+          <p:nvPr/>
+        </p:nvSpPr>
+        <p:spPr>
+          <a:xfrm>
+            <a:off x="841248" y="3657600"/>
             <a:ext cx="7626096" cy="201168"/>
           </a:xfrm>
           <a:prstGeom prst="rect">
@@ -11200,7 +12017,7 @@
                 <a:ea typeface="Inter" pitchFamily="34" charset="-122"/>
                 <a:cs typeface="Inter" pitchFamily="34" charset="-120"/>
               </a:rPr>
-              <a:t>CRITERIO</a:t>
+              <a:t>PRINCIPIO</a:t>
             </a:r>
             <a:endParaRPr lang="en-US" sz="900" dirty="0"/>
           </a:p>
@@ -11208,13 +12025,13 @@
       </p:sp>
       <p:sp>
         <p:nvSpPr>
-          <p:cNvPr id="19" name="Text 16"/>
-          <p:cNvSpPr/>
-          <p:nvPr/>
-        </p:nvSpPr>
-        <p:spPr>
-          <a:xfrm>
-            <a:off x="841248" y="4178808"/>
+          <p:cNvPr id="17" name="Text 14"/>
+          <p:cNvSpPr/>
+          <p:nvPr/>
+        </p:nvSpPr>
+        <p:spPr>
+          <a:xfrm>
+            <a:off x="841248" y="3858768"/>
             <a:ext cx="7607808" cy="347472"/>
           </a:xfrm>
           <a:prstGeom prst="rect">
@@ -11242,7 +12059,7 @@
                 <a:ea typeface="Inter" pitchFamily="34" charset="-122"/>
                 <a:cs typeface="Inter" pitchFamily="34" charset="-120"/>
               </a:rPr>
-              <a:t>Si hay que proteger a alguien por el bien de la operación, se usa convenio. Si no, la reserva alcanza.</a:t>
+              <a:t>Hay que dejarlo por escrito. El objetivo no es poder reclamar un cobro: es evitar que el malentendido exista.</a:t>
             </a:r>
             <a:endParaRPr lang="en-US" sz="1100" dirty="0"/>
           </a:p>
@@ -11394,7 +12211,7 @@
                 <a:ea typeface="Inter" pitchFamily="34" charset="-122"/>
                 <a:cs typeface="Inter" pitchFamily="34" charset="-120"/>
               </a:rPr>
-              <a:t>Mail y WhatsApp también sirven</a:t>
+              <a:t>¿Reserva o convenio?</a:t>
             </a:r>
             <a:endParaRPr lang="en-US" sz="2600" dirty="0"/>
           </a:p>
@@ -11433,7 +12250,7 @@
                 <a:ea typeface="Inter" pitchFamily="34" charset="-122"/>
                 <a:cs typeface="Inter" pitchFamily="34" charset="-120"/>
               </a:rPr>
-              <a:t>Como respaldo: no reemplazan al documento, pero son prueba.</a:t>
+              <a:t>Depende de quién tiene que ver el acuerdo.</a:t>
             </a:r>
             <a:endParaRPr lang="en-US" sz="1200" dirty="0"/>
           </a:p>
@@ -11448,11 +12265,11 @@
         <p:spPr>
           <a:xfrm>
             <a:off x="603504" y="1188720"/>
-            <a:ext cx="2542032" cy="2331720"/>
+            <a:ext cx="3950208" cy="457200"/>
           </a:xfrm>
           <a:prstGeom prst="roundRect">
             <a:avLst>
-              <a:gd name="adj" fmla="val 3529"/>
+              <a:gd name="adj" fmla="val 18000"/>
             </a:avLst>
           </a:prstGeom>
           <a:solidFill>
@@ -11474,24 +12291,24 @@
         </p:nvSpPr>
         <p:spPr>
           <a:xfrm>
-            <a:off x="822960" y="1335024"/>
-            <a:ext cx="2103120" cy="201168"/>
-          </a:xfrm>
-          <a:prstGeom prst="rect">
-            <a:avLst/>
-          </a:prstGeom>
-          <a:noFill/>
-          <a:ln/>
-        </p:spPr>
-        <p:txBody>
-          <a:bodyPr wrap="square" lIns="0" tIns="0" rIns="0" bIns="0" rtlCol="0" anchor="ctr"/>
-          <a:lstStyle/>
-          <a:p>
-            <a:pPr indent="0" marL="0">
-              <a:buNone/>
-            </a:pPr>
-            <a:r>
-              <a:rPr lang="en-US" sz="900" b="1" spc="120" kern="0" dirty="0">
+            <a:off x="822960" y="1188720"/>
+            <a:ext cx="3584448" cy="457200"/>
+          </a:xfrm>
+          <a:prstGeom prst="rect">
+            <a:avLst/>
+          </a:prstGeom>
+          <a:noFill/>
+          <a:ln/>
+        </p:spPr>
+        <p:txBody>
+          <a:bodyPr wrap="square" lIns="0" tIns="0" rIns="0" bIns="0" rtlCol="0" anchor="ctr"/>
+          <a:lstStyle/>
+          <a:p>
+            <a:pPr indent="0" marL="0">
+              <a:buNone/>
+            </a:pPr>
+            <a:r>
+              <a:rPr lang="en-US" sz="1150" b="1" spc="100" kern="0" dirty="0">
                 <a:solidFill>
                   <a:srgbClr val="FFFFFF"/>
                 </a:solidFill>
@@ -11499,110 +12316,177 @@
                 <a:ea typeface="Inter" pitchFamily="34" charset="-122"/>
                 <a:cs typeface="Inter" pitchFamily="34" charset="-120"/>
               </a:rPr>
-              <a:t>LO MEJOR</a:t>
-            </a:r>
-            <a:endParaRPr lang="en-US" sz="900" dirty="0"/>
-          </a:p>
-        </p:txBody>
-      </p:sp>
-      <p:sp>
-        <p:nvSpPr>
-          <p:cNvPr id="9" name="Text 6"/>
-          <p:cNvSpPr/>
-          <p:nvPr/>
-        </p:nvSpPr>
-        <p:spPr>
-          <a:xfrm>
-            <a:off x="822960" y="1572768"/>
-            <a:ext cx="2103120" cy="566928"/>
-          </a:xfrm>
-          <a:prstGeom prst="rect">
-            <a:avLst/>
-          </a:prstGeom>
-          <a:noFill/>
-          <a:ln/>
-        </p:spPr>
-        <p:txBody>
-          <a:bodyPr wrap="square" lIns="0" tIns="0" rIns="0" bIns="0" rtlCol="0" anchor="t"/>
-          <a:lstStyle/>
-          <a:p>
-            <a:pPr indent="0" marL="0">
-              <a:lnSpc>
-                <a:spcPts val="1900"/>
-              </a:lnSpc>
-              <a:buNone/>
-            </a:pPr>
-            <a:r>
-              <a:rPr lang="en-US" sz="1600" b="1" dirty="0">
-                <a:solidFill>
-                  <a:srgbClr val="FFFFFF"/>
-                </a:solidFill>
-                <a:latin typeface="Inter" pitchFamily="34" charset="0"/>
-                <a:ea typeface="Inter" pitchFamily="34" charset="-122"/>
-                <a:cs typeface="Inter" pitchFamily="34" charset="-120"/>
-              </a:rPr>
-              <a:t>Reserva o convenio firmado</a:t>
-            </a:r>
-            <a:endParaRPr lang="en-US" sz="1600" dirty="0"/>
-          </a:p>
-        </p:txBody>
-      </p:sp>
-      <p:sp>
-        <p:nvSpPr>
-          <p:cNvPr id="10" name="Text 7"/>
-          <p:cNvSpPr/>
-          <p:nvPr/>
-        </p:nvSpPr>
-        <p:spPr>
-          <a:xfrm>
-            <a:off x="822960" y="2212848"/>
-            <a:ext cx="2103120" cy="1179576"/>
-          </a:xfrm>
-          <a:prstGeom prst="rect">
-            <a:avLst/>
-          </a:prstGeom>
-          <a:noFill/>
-          <a:ln/>
-        </p:spPr>
-        <p:txBody>
-          <a:bodyPr wrap="square" lIns="0" tIns="0" rIns="0" bIns="0" rtlCol="0" anchor="t"/>
-          <a:lstStyle/>
-          <a:p>
-            <a:pPr indent="0" marL="0">
-              <a:lnSpc>
-                <a:spcPts val="1400"/>
-              </a:lnSpc>
-              <a:buNone/>
-            </a:pPr>
-            <a:r>
-              <a:rPr lang="en-US" sz="1100" dirty="0">
-                <a:solidFill>
-                  <a:srgbClr val="EAEFF5"/>
-                </a:solidFill>
-                <a:latin typeface="Inter" pitchFamily="34" charset="0"/>
-                <a:ea typeface="Inter" pitchFamily="34" charset="-122"/>
-                <a:cs typeface="Inter" pitchFamily="34" charset="-120"/>
-              </a:rPr>
-              <a:t>El acuerdo queda en un documento con la firma de las partes.</a:t>
-            </a:r>
-            <a:endParaRPr lang="en-US" sz="1100" dirty="0"/>
-          </a:p>
-        </p:txBody>
-      </p:sp>
-      <p:sp>
-        <p:nvSpPr>
-          <p:cNvPr id="11" name="Shape 8"/>
-          <p:cNvSpPr/>
-          <p:nvPr/>
-        </p:nvSpPr>
-        <p:spPr>
-          <a:xfrm>
-            <a:off x="3374136" y="1188720"/>
-            <a:ext cx="2542032" cy="2331720"/>
+              <a:t>EN LA RESERVA</a:t>
+            </a:r>
+            <a:endParaRPr lang="en-US" sz="1150" dirty="0"/>
+          </a:p>
+        </p:txBody>
+      </p:sp>
+      <p:sp>
+        <p:nvSpPr>
+          <p:cNvPr id="9" name="Shape 6"/>
+          <p:cNvSpPr/>
+          <p:nvPr/>
+        </p:nvSpPr>
+        <p:spPr>
+          <a:xfrm>
+            <a:off x="603504" y="1700784"/>
+            <a:ext cx="3950208" cy="1965960"/>
           </a:xfrm>
           <a:prstGeom prst="roundRect">
             <a:avLst>
-              <a:gd name="adj" fmla="val 3529"/>
+              <a:gd name="adj" fmla="val 4186"/>
+            </a:avLst>
+          </a:prstGeom>
+          <a:solidFill>
+            <a:srgbClr val="F3F3F3"/>
+          </a:solidFill>
+          <a:ln w="12700">
+            <a:solidFill>
+              <a:srgbClr val="F3F3F3"/>
+            </a:solidFill>
+            <a:prstDash val="solid"/>
+          </a:ln>
+        </p:spPr>
+      </p:sp>
+      <p:sp>
+        <p:nvSpPr>
+          <p:cNvPr id="10" name="Text 7"/>
+          <p:cNvSpPr/>
+          <p:nvPr/>
+        </p:nvSpPr>
+        <p:spPr>
+          <a:xfrm>
+            <a:off x="822960" y="1792224"/>
+            <a:ext cx="3566160" cy="274320"/>
+          </a:xfrm>
+          <a:prstGeom prst="rect">
+            <a:avLst/>
+          </a:prstGeom>
+          <a:noFill/>
+          <a:ln/>
+        </p:spPr>
+        <p:txBody>
+          <a:bodyPr wrap="square" lIns="0" tIns="0" rIns="0" bIns="0" rtlCol="0" anchor="ctr"/>
+          <a:lstStyle/>
+          <a:p>
+            <a:pPr indent="0" marL="0">
+              <a:buNone/>
+            </a:pPr>
+            <a:r>
+              <a:rPr lang="en-US" sz="1150" b="1" dirty="0">
+                <a:solidFill>
+                  <a:srgbClr val="08407C"/>
+                </a:solidFill>
+                <a:latin typeface="Inter" pitchFamily="34" charset="0"/>
+                <a:ea typeface="Inter" pitchFamily="34" charset="-122"/>
+                <a:cs typeface="Inter" pitchFamily="34" charset="-120"/>
+              </a:rPr>
+              <a:t>Visible para las partes de la operación</a:t>
+            </a:r>
+            <a:endParaRPr lang="en-US" sz="1150" dirty="0"/>
+          </a:p>
+        </p:txBody>
+      </p:sp>
+      <p:sp>
+        <p:nvSpPr>
+          <p:cNvPr id="11" name="Text 8"/>
+          <p:cNvSpPr/>
+          <p:nvPr/>
+        </p:nvSpPr>
+        <p:spPr>
+          <a:xfrm>
+            <a:off x="859536" y="2139696"/>
+            <a:ext cx="3511296" cy="1417320"/>
+          </a:xfrm>
+          <a:prstGeom prst="rect">
+            <a:avLst/>
+          </a:prstGeom>
+          <a:noFill/>
+          <a:ln/>
+        </p:spPr>
+        <p:txBody>
+          <a:bodyPr wrap="square" lIns="0" tIns="0" rIns="0" bIns="0" rtlCol="0" anchor="t"/>
+          <a:lstStyle/>
+          <a:p>
+            <a:pPr marL="177800" indent="-177800">
+              <a:spcAft>
+                <a:spcPts val="700"/>
+              </a:spcAft>
+              <a:buSzPct val="100000"/>
+              <a:buChar char="•"/>
+            </a:pPr>
+            <a:r>
+              <a:rPr lang="en-US" sz="1100" dirty="0">
+                <a:solidFill>
+                  <a:srgbClr val="2E4258"/>
+                </a:solidFill>
+                <a:latin typeface="Inter" pitchFamily="34" charset="0"/>
+                <a:ea typeface="Inter" pitchFamily="34" charset="-122"/>
+                <a:cs typeface="Inter" pitchFamily="34" charset="-120"/>
+              </a:rPr>
+              <a:t>Sirve cuando no hay nada que proteger.</a:t>
+            </a:r>
+            <a:endParaRPr lang="en-US" sz="1100" dirty="0"/>
+          </a:p>
+          <a:p>
+            <a:pPr marL="177800" indent="-177800">
+              <a:spcAft>
+                <a:spcPts val="700"/>
+              </a:spcAft>
+              <a:buSzPct val="100000"/>
+              <a:buChar char="•"/>
+            </a:pPr>
+            <a:r>
+              <a:rPr lang="en-US" sz="1100" dirty="0">
+                <a:solidFill>
+                  <a:srgbClr val="2E4258"/>
+                </a:solidFill>
+                <a:latin typeface="Inter" pitchFamily="34" charset="0"/>
+                <a:ea typeface="Inter" pitchFamily="34" charset="-122"/>
+                <a:cs typeface="Inter" pitchFamily="34" charset="-120"/>
+              </a:rPr>
+              <a:t>Deja la participación de cada uno dentro del mismo documento.</a:t>
+            </a:r>
+            <a:endParaRPr lang="en-US" sz="1100" dirty="0"/>
+          </a:p>
+          <a:p>
+            <a:pPr marL="177800" indent="-177800">
+              <a:spcAft>
+                <a:spcPts val="700"/>
+              </a:spcAft>
+              <a:buSzPct val="100000"/>
+              <a:buChar char="•"/>
+            </a:pPr>
+            <a:r>
+              <a:rPr lang="en-US" sz="1100" dirty="0">
+                <a:solidFill>
+                  <a:srgbClr val="2E4258"/>
+                </a:solidFill>
+                <a:latin typeface="Inter" pitchFamily="34" charset="0"/>
+                <a:ea typeface="Inter" pitchFamily="34" charset="-122"/>
+                <a:cs typeface="Inter" pitchFamily="34" charset="-120"/>
+              </a:rPr>
+              <a:t>Es lo más simple de armar.</a:t>
+            </a:r>
+            <a:endParaRPr lang="en-US" sz="1100" dirty="0"/>
+          </a:p>
+        </p:txBody>
+      </p:sp>
+      <p:sp>
+        <p:nvSpPr>
+          <p:cNvPr id="12" name="Shape 9"/>
+          <p:cNvSpPr/>
+          <p:nvPr/>
+        </p:nvSpPr>
+        <p:spPr>
+          <a:xfrm>
+            <a:off x="4736592" y="1188720"/>
+            <a:ext cx="3950208" cy="457200"/>
+          </a:xfrm>
+          <a:prstGeom prst="roundRect">
+            <a:avLst>
+              <a:gd name="adj" fmla="val 18000"/>
             </a:avLst>
           </a:prstGeom>
           <a:solidFill>
@@ -11618,30 +12502,30 @@
       </p:sp>
       <p:sp>
         <p:nvSpPr>
-          <p:cNvPr id="12" name="Text 9"/>
-          <p:cNvSpPr/>
-          <p:nvPr/>
-        </p:nvSpPr>
-        <p:spPr>
-          <a:xfrm>
-            <a:off x="3593592" y="1335024"/>
-            <a:ext cx="2103120" cy="201168"/>
-          </a:xfrm>
-          <a:prstGeom prst="rect">
-            <a:avLst/>
-          </a:prstGeom>
-          <a:noFill/>
-          <a:ln/>
-        </p:spPr>
-        <p:txBody>
-          <a:bodyPr wrap="square" lIns="0" tIns="0" rIns="0" bIns="0" rtlCol="0" anchor="ctr"/>
-          <a:lstStyle/>
-          <a:p>
-            <a:pPr indent="0" marL="0">
-              <a:buNone/>
-            </a:pPr>
-            <a:r>
-              <a:rPr lang="en-US" sz="900" b="1" spc="120" kern="0" dirty="0">
+          <p:cNvPr id="13" name="Text 10"/>
+          <p:cNvSpPr/>
+          <p:nvPr/>
+        </p:nvSpPr>
+        <p:spPr>
+          <a:xfrm>
+            <a:off x="4956048" y="1188720"/>
+            <a:ext cx="3584448" cy="457200"/>
+          </a:xfrm>
+          <a:prstGeom prst="rect">
+            <a:avLst/>
+          </a:prstGeom>
+          <a:noFill/>
+          <a:ln/>
+        </p:spPr>
+        <p:txBody>
+          <a:bodyPr wrap="square" lIns="0" tIns="0" rIns="0" bIns="0" rtlCol="0" anchor="ctr"/>
+          <a:lstStyle/>
+          <a:p>
+            <a:pPr indent="0" marL="0">
+              <a:buNone/>
+            </a:pPr>
+            <a:r>
+              <a:rPr lang="en-US" sz="1150" b="1" spc="100" kern="0" dirty="0">
                 <a:solidFill>
                   <a:srgbClr val="FFFFFF"/>
                 </a:solidFill>
@@ -11649,118 +12533,34 @@
                 <a:ea typeface="Inter" pitchFamily="34" charset="-122"/>
                 <a:cs typeface="Inter" pitchFamily="34" charset="-120"/>
               </a:rPr>
-              <a:t>SIRVE COMO PRUEBA</a:t>
-            </a:r>
-            <a:endParaRPr lang="en-US" sz="900" dirty="0"/>
-          </a:p>
-        </p:txBody>
-      </p:sp>
-      <p:sp>
-        <p:nvSpPr>
-          <p:cNvPr id="13" name="Text 10"/>
-          <p:cNvSpPr/>
-          <p:nvPr/>
-        </p:nvSpPr>
-        <p:spPr>
-          <a:xfrm>
-            <a:off x="3593592" y="1572768"/>
-            <a:ext cx="2103120" cy="566928"/>
-          </a:xfrm>
-          <a:prstGeom prst="rect">
-            <a:avLst/>
-          </a:prstGeom>
-          <a:noFill/>
-          <a:ln/>
-        </p:spPr>
-        <p:txBody>
-          <a:bodyPr wrap="square" lIns="0" tIns="0" rIns="0" bIns="0" rtlCol="0" anchor="t"/>
-          <a:lstStyle/>
-          <a:p>
-            <a:pPr indent="0" marL="0">
-              <a:lnSpc>
-                <a:spcPts val="1900"/>
-              </a:lnSpc>
-              <a:buNone/>
-            </a:pPr>
-            <a:r>
-              <a:rPr lang="en-US" sz="1600" b="1" dirty="0">
-                <a:solidFill>
-                  <a:srgbClr val="FFFFFF"/>
-                </a:solidFill>
-                <a:latin typeface="Inter" pitchFamily="34" charset="0"/>
-                <a:ea typeface="Inter" pitchFamily="34" charset="-122"/>
-                <a:cs typeface="Inter" pitchFamily="34" charset="-120"/>
-              </a:rPr>
-              <a:t>Mail o WhatsApp</a:t>
-            </a:r>
-            <a:endParaRPr lang="en-US" sz="1600" dirty="0"/>
-          </a:p>
-        </p:txBody>
-      </p:sp>
-      <p:sp>
-        <p:nvSpPr>
-          <p:cNvPr id="14" name="Text 11"/>
-          <p:cNvSpPr/>
-          <p:nvPr/>
-        </p:nvSpPr>
-        <p:spPr>
-          <a:xfrm>
-            <a:off x="3593592" y="2212848"/>
-            <a:ext cx="2103120" cy="1179576"/>
-          </a:xfrm>
-          <a:prstGeom prst="rect">
-            <a:avLst/>
-          </a:prstGeom>
-          <a:noFill/>
-          <a:ln/>
-        </p:spPr>
-        <p:txBody>
-          <a:bodyPr wrap="square" lIns="0" tIns="0" rIns="0" bIns="0" rtlCol="0" anchor="t"/>
-          <a:lstStyle/>
-          <a:p>
-            <a:pPr indent="0" marL="0">
-              <a:lnSpc>
-                <a:spcPts val="1400"/>
-              </a:lnSpc>
-              <a:buNone/>
-            </a:pPr>
-            <a:r>
-              <a:rPr lang="en-US" sz="1100" dirty="0">
-                <a:solidFill>
-                  <a:srgbClr val="EAEFF5"/>
-                </a:solidFill>
-                <a:latin typeface="Inter" pitchFamily="34" charset="0"/>
-                <a:ea typeface="Inter" pitchFamily="34" charset="-122"/>
-                <a:cs typeface="Inter" pitchFamily="34" charset="-120"/>
-              </a:rPr>
-              <a:t>Escribir el acuerdo y pedir que el colega lo confirme por el mismo medio.</a:t>
-            </a:r>
-            <a:endParaRPr lang="en-US" sz="1100" dirty="0"/>
-          </a:p>
-        </p:txBody>
-      </p:sp>
-      <p:sp>
-        <p:nvSpPr>
-          <p:cNvPr id="15" name="Shape 12"/>
-          <p:cNvSpPr/>
-          <p:nvPr/>
-        </p:nvSpPr>
-        <p:spPr>
-          <a:xfrm>
-            <a:off x="6144768" y="1188720"/>
-            <a:ext cx="2542032" cy="2331720"/>
+              <a:t>EN UN CONVENIO</a:t>
+            </a:r>
+            <a:endParaRPr lang="en-US" sz="1150" dirty="0"/>
+          </a:p>
+        </p:txBody>
+      </p:sp>
+      <p:sp>
+        <p:nvSpPr>
+          <p:cNvPr id="14" name="Shape 11"/>
+          <p:cNvSpPr/>
+          <p:nvPr/>
+        </p:nvSpPr>
+        <p:spPr>
+          <a:xfrm>
+            <a:off x="4736592" y="1700784"/>
+            <a:ext cx="3950208" cy="1965960"/>
           </a:xfrm>
           <a:prstGeom prst="roundRect">
             <a:avLst>
-              <a:gd name="adj" fmla="val 3529"/>
+              <a:gd name="adj" fmla="val 4186"/>
             </a:avLst>
           </a:prstGeom>
           <a:solidFill>
-            <a:srgbClr val="4E586E"/>
+            <a:srgbClr val="F3F3F3"/>
           </a:solidFill>
           <a:ln w="12700">
             <a:solidFill>
-              <a:srgbClr val="4E586E"/>
+              <a:srgbClr val="F3F3F3"/>
             </a:solidFill>
             <a:prstDash val="solid"/>
           </a:ln>
@@ -11768,53 +12568,53 @@
       </p:sp>
       <p:sp>
         <p:nvSpPr>
+          <p:cNvPr id="15" name="Text 12"/>
+          <p:cNvSpPr/>
+          <p:nvPr/>
+        </p:nvSpPr>
+        <p:spPr>
+          <a:xfrm>
+            <a:off x="4956048" y="1792224"/>
+            <a:ext cx="3566160" cy="274320"/>
+          </a:xfrm>
+          <a:prstGeom prst="rect">
+            <a:avLst/>
+          </a:prstGeom>
+          <a:noFill/>
+          <a:ln/>
+        </p:spPr>
+        <p:txBody>
+          <a:bodyPr wrap="square" lIns="0" tIns="0" rIns="0" bIns="0" rtlCol="0" anchor="ctr"/>
+          <a:lstStyle/>
+          <a:p>
+            <a:pPr indent="0" marL="0">
+              <a:buNone/>
+            </a:pPr>
+            <a:r>
+              <a:rPr lang="en-US" sz="1150" b="1" dirty="0">
+                <a:solidFill>
+                  <a:srgbClr val="08407C"/>
+                </a:solidFill>
+                <a:latin typeface="Inter" pitchFamily="34" charset="0"/>
+                <a:ea typeface="Inter" pitchFamily="34" charset="-122"/>
+                <a:cs typeface="Inter" pitchFamily="34" charset="-120"/>
+              </a:rPr>
+              <a:t>Privado entre los colegas</a:t>
+            </a:r>
+            <a:endParaRPr lang="en-US" sz="1150" dirty="0"/>
+          </a:p>
+        </p:txBody>
+      </p:sp>
+      <p:sp>
+        <p:nvSpPr>
           <p:cNvPr id="16" name="Text 13"/>
           <p:cNvSpPr/>
           <p:nvPr/>
         </p:nvSpPr>
         <p:spPr>
           <a:xfrm>
-            <a:off x="6364224" y="1335024"/>
-            <a:ext cx="2103120" cy="201168"/>
-          </a:xfrm>
-          <a:prstGeom prst="rect">
-            <a:avLst/>
-          </a:prstGeom>
-          <a:noFill/>
-          <a:ln/>
-        </p:spPr>
-        <p:txBody>
-          <a:bodyPr wrap="square" lIns="0" tIns="0" rIns="0" bIns="0" rtlCol="0" anchor="ctr"/>
-          <a:lstStyle/>
-          <a:p>
-            <a:pPr indent="0" marL="0">
-              <a:buNone/>
-            </a:pPr>
-            <a:r>
-              <a:rPr lang="en-US" sz="900" b="1" spc="120" kern="0" dirty="0">
-                <a:solidFill>
-                  <a:srgbClr val="FFFFFF"/>
-                </a:solidFill>
-                <a:latin typeface="Inter" pitchFamily="34" charset="0"/>
-                <a:ea typeface="Inter" pitchFamily="34" charset="-122"/>
-                <a:cs typeface="Inter" pitchFamily="34" charset="-120"/>
-              </a:rPr>
-              <a:t>NO ALCANZA</a:t>
-            </a:r>
-            <a:endParaRPr lang="en-US" sz="900" dirty="0"/>
-          </a:p>
-        </p:txBody>
-      </p:sp>
-      <p:sp>
-        <p:nvSpPr>
-          <p:cNvPr id="17" name="Text 14"/>
-          <p:cNvSpPr/>
-          <p:nvPr/>
-        </p:nvSpPr>
-        <p:spPr>
-          <a:xfrm>
-            <a:off x="6364224" y="1572768"/>
-            <a:ext cx="2103120" cy="566928"/>
+            <a:off x="4992624" y="2139696"/>
+            <a:ext cx="3511296" cy="1417320"/>
           </a:xfrm>
           <a:prstGeom prst="rect">
             <a:avLst/>
@@ -11826,78 +12626,79 @@
           <a:bodyPr wrap="square" lIns="0" tIns="0" rIns="0" bIns="0" rtlCol="0" anchor="t"/>
           <a:lstStyle/>
           <a:p>
-            <a:pPr indent="0" marL="0">
-              <a:lnSpc>
-                <a:spcPts val="1900"/>
-              </a:lnSpc>
-              <a:buNone/>
-            </a:pPr>
-            <a:r>
-              <a:rPr lang="en-US" sz="1600" b="1" dirty="0">
-                <a:solidFill>
-                  <a:srgbClr val="FFFFFF"/>
-                </a:solidFill>
-                <a:latin typeface="Inter" pitchFamily="34" charset="0"/>
-                <a:ea typeface="Inter" pitchFamily="34" charset="-122"/>
-                <a:cs typeface="Inter" pitchFamily="34" charset="-120"/>
-              </a:rPr>
-              <a:t>Acuerdo de palabra</a:t>
-            </a:r>
-            <a:endParaRPr lang="en-US" sz="1600" dirty="0"/>
-          </a:p>
-        </p:txBody>
-      </p:sp>
-      <p:sp>
-        <p:nvSpPr>
-          <p:cNvPr id="18" name="Text 15"/>
-          <p:cNvSpPr/>
-          <p:nvPr/>
-        </p:nvSpPr>
-        <p:spPr>
-          <a:xfrm>
-            <a:off x="6364224" y="2212848"/>
-            <a:ext cx="2103120" cy="1179576"/>
-          </a:xfrm>
-          <a:prstGeom prst="rect">
-            <a:avLst/>
-          </a:prstGeom>
-          <a:noFill/>
-          <a:ln/>
-        </p:spPr>
-        <p:txBody>
-          <a:bodyPr wrap="square" lIns="0" tIns="0" rIns="0" bIns="0" rtlCol="0" anchor="t"/>
-          <a:lstStyle/>
-          <a:p>
-            <a:pPr indent="0" marL="0">
-              <a:lnSpc>
-                <a:spcPts val="1400"/>
-              </a:lnSpc>
-              <a:buNone/>
+            <a:pPr marL="177800" indent="-177800">
+              <a:spcAft>
+                <a:spcPts val="700"/>
+              </a:spcAft>
+              <a:buSzPct val="100000"/>
+              <a:buChar char="•"/>
             </a:pPr>
             <a:r>
               <a:rPr lang="en-US" sz="1100" dirty="0">
                 <a:solidFill>
-                  <a:srgbClr val="EAEFF5"/>
-                </a:solidFill>
-                <a:latin typeface="Inter" pitchFamily="34" charset="0"/>
-                <a:ea typeface="Inter" pitchFamily="34" charset="-122"/>
-                <a:cs typeface="Inter" pitchFamily="34" charset="-120"/>
-              </a:rPr>
-              <a:t>Un llamado o una charla en una visita no deja nada que mostrar si hay un malentendido.</a:t>
+                  <a:srgbClr val="2E4258"/>
+                </a:solidFill>
+                <a:latin typeface="Inter" pitchFamily="34" charset="0"/>
+                <a:ea typeface="Inter" pitchFamily="34" charset="-122"/>
+                <a:cs typeface="Inter" pitchFamily="34" charset="-120"/>
+              </a:rPr>
+              <a:t>Protege la identidad de uno de los colegas cuando la operación lo requiere.</a:t>
             </a:r>
             <a:endParaRPr lang="en-US" sz="1100" dirty="0"/>
           </a:p>
-        </p:txBody>
-      </p:sp>
-      <p:sp>
-        <p:nvSpPr>
-          <p:cNvPr id="19" name="Shape 16"/>
-          <p:cNvSpPr/>
-          <p:nvPr/>
-        </p:nvSpPr>
-        <p:spPr>
-          <a:xfrm>
-            <a:off x="603504" y="3794760"/>
+          <a:p>
+            <a:pPr marL="177800" indent="-177800">
+              <a:spcAft>
+                <a:spcPts val="700"/>
+              </a:spcAft>
+              <a:buSzPct val="100000"/>
+              <a:buChar char="•"/>
+            </a:pPr>
+            <a:r>
+              <a:rPr lang="en-US" sz="1100" dirty="0">
+                <a:solidFill>
+                  <a:srgbClr val="2E4258"/>
+                </a:solidFill>
+                <a:latin typeface="Inter" pitchFamily="34" charset="0"/>
+                <a:ea typeface="Inter" pitchFamily="34" charset="-122"/>
+                <a:cs typeface="Inter" pitchFamily="34" charset="-120"/>
+              </a:rPr>
+              <a:t>No expone la relación entre las distintas marcas.</a:t>
+            </a:r>
+            <a:endParaRPr lang="en-US" sz="1100" dirty="0"/>
+          </a:p>
+          <a:p>
+            <a:pPr marL="177800" indent="-177800">
+              <a:spcAft>
+                <a:spcPts val="700"/>
+              </a:spcAft>
+              <a:buSzPct val="100000"/>
+              <a:buChar char="•"/>
+            </a:pPr>
+            <a:r>
+              <a:rPr lang="en-US" sz="1100" dirty="0">
+                <a:solidFill>
+                  <a:srgbClr val="2E4258"/>
+                </a:solidFill>
+                <a:latin typeface="Inter" pitchFamily="34" charset="0"/>
+                <a:ea typeface="Inter" pitchFamily="34" charset="-122"/>
+                <a:cs typeface="Inter" pitchFamily="34" charset="-120"/>
+              </a:rPr>
+              <a:t>Deja el reparto fuera de la reserva.</a:t>
+            </a:r>
+            <a:endParaRPr lang="en-US" sz="1100" dirty="0"/>
+          </a:p>
+        </p:txBody>
+      </p:sp>
+      <p:sp>
+        <p:nvSpPr>
+          <p:cNvPr id="17" name="Shape 14"/>
+          <p:cNvSpPr/>
+          <p:nvPr/>
+        </p:nvSpPr>
+        <p:spPr>
+          <a:xfrm>
+            <a:off x="603504" y="3931920"/>
             <a:ext cx="8083296" cy="658368"/>
           </a:xfrm>
           <a:prstGeom prst="roundRect">
@@ -11918,13 +12719,13 @@
       </p:sp>
       <p:sp>
         <p:nvSpPr>
-          <p:cNvPr id="20" name="Text 17"/>
-          <p:cNvSpPr/>
-          <p:nvPr/>
-        </p:nvSpPr>
-        <p:spPr>
-          <a:xfrm>
-            <a:off x="841248" y="3840480"/>
+          <p:cNvPr id="18" name="Text 15"/>
+          <p:cNvSpPr/>
+          <p:nvPr/>
+        </p:nvSpPr>
+        <p:spPr>
+          <a:xfrm>
+            <a:off x="841248" y="3977640"/>
             <a:ext cx="7626096" cy="201168"/>
           </a:xfrm>
           <a:prstGeom prst="rect">
@@ -11949,7 +12750,7 @@
                 <a:ea typeface="Inter" pitchFamily="34" charset="-122"/>
                 <a:cs typeface="Inter" pitchFamily="34" charset="-120"/>
               </a:rPr>
-              <a:t>HÁBITO</a:t>
+              <a:t>CRITERIO</a:t>
             </a:r>
             <a:endParaRPr lang="en-US" sz="900" dirty="0"/>
           </a:p>
@@ -11957,13 +12758,13 @@
       </p:sp>
       <p:sp>
         <p:nvSpPr>
-          <p:cNvPr id="21" name="Text 18"/>
-          <p:cNvSpPr/>
-          <p:nvPr/>
-        </p:nvSpPr>
-        <p:spPr>
-          <a:xfrm>
-            <a:off x="841248" y="4041648"/>
+          <p:cNvPr id="19" name="Text 16"/>
+          <p:cNvSpPr/>
+          <p:nvPr/>
+        </p:nvSpPr>
+        <p:spPr>
+          <a:xfrm>
+            <a:off x="841248" y="4178808"/>
             <a:ext cx="7607808" cy="347472"/>
           </a:xfrm>
           <a:prstGeom prst="rect">
@@ -11991,7 +12792,7 @@
                 <a:ea typeface="Inter" pitchFamily="34" charset="-122"/>
                 <a:cs typeface="Inter" pitchFamily="34" charset="-120"/>
               </a:rPr>
-              <a:t>Si no hay documento a mano, se escribe el acuerdo por mail o WhatsApp y se pide la confirmación del colega.</a:t>
+              <a:t>Si hay que proteger a alguien por el bien de la operación, se usa convenio. Si no, la reserva alcanza.</a:t>
             </a:r>
             <a:endParaRPr lang="en-US" sz="1100" dirty="0"/>
           </a:p>
